--- a/static/decks/ICICIBANK.BO.pptx
+++ b/static/decks/ICICIBANK.BO.pptx
@@ -107,6 +107,451 @@
     </a:lvl9pPr>
   </p:defaultTextStyle>
 </p:presentation>
+</file>
+
+<file path=ppt/charts/chart1.xml><?xml version="1.0" encoding="utf-8"?>
+<c:chartSpace xmlns:c="http://schemas.openxmlformats.org/drawingml/2006/chart" xmlns:a="http://schemas.openxmlformats.org/drawingml/2006/main" xmlns:r="http://schemas.openxmlformats.org/officeDocument/2006/relationships">
+  <c:date1904 val="0"/>
+  <c:chart>
+    <c:autoTitleDeleted val="0"/>
+    <c:plotArea>
+      <c:lineChart>
+        <c:grouping val="standard"/>
+        <c:varyColors val="0"/>
+        <c:ser>
+          <c:idx val="0"/>
+          <c:order val="0"/>
+          <c:tx>
+            <c:strRef>
+              <c:f>Sheet1!$B$1</c:f>
+              <c:strCache>
+                <c:ptCount val="1"/>
+                <c:pt idx="0">
+                  <c:v>Close</c:v>
+                </c:pt>
+              </c:strCache>
+            </c:strRef>
+          </c:tx>
+          <c:spPr>
+            <a:ln w="19050">
+              <a:solidFill>
+                <a:srgbClr val="A28860"/>
+              </a:solidFill>
+            </a:ln>
+          </c:spPr>
+          <c:marker>
+            <c:symbol val="none"/>
+          </c:marker>
+          <c:cat>
+            <c:strRef>
+              <c:f>Sheet1!$A$2:$A$51</c:f>
+              <c:strCache>
+                <c:ptCount val="50"/>
+                <c:pt idx="0">
+                  <c:v>05-13</c:v>
+                </c:pt>
+                <c:pt idx="1">
+                  <c:v>05-20</c:v>
+                </c:pt>
+                <c:pt idx="2">
+                  <c:v>05-27</c:v>
+                </c:pt>
+                <c:pt idx="3">
+                  <c:v>06-03</c:v>
+                </c:pt>
+                <c:pt idx="4">
+                  <c:v>06-10</c:v>
+                </c:pt>
+                <c:pt idx="5">
+                  <c:v>06-17</c:v>
+                </c:pt>
+                <c:pt idx="6">
+                  <c:v>06-24</c:v>
+                </c:pt>
+                <c:pt idx="7">
+                  <c:v>07-01</c:v>
+                </c:pt>
+                <c:pt idx="8">
+                  <c:v>07-08</c:v>
+                </c:pt>
+                <c:pt idx="9">
+                  <c:v>07-15</c:v>
+                </c:pt>
+                <c:pt idx="10">
+                  <c:v>07-22</c:v>
+                </c:pt>
+                <c:pt idx="11">
+                  <c:v>07-29</c:v>
+                </c:pt>
+                <c:pt idx="12">
+                  <c:v>08-05</c:v>
+                </c:pt>
+                <c:pt idx="13">
+                  <c:v>08-12</c:v>
+                </c:pt>
+                <c:pt idx="14">
+                  <c:v>08-20</c:v>
+                </c:pt>
+                <c:pt idx="15">
+                  <c:v>08-28</c:v>
+                </c:pt>
+                <c:pt idx="16">
+                  <c:v>09-04</c:v>
+                </c:pt>
+                <c:pt idx="17">
+                  <c:v>09-11</c:v>
+                </c:pt>
+                <c:pt idx="18">
+                  <c:v>09-18</c:v>
+                </c:pt>
+                <c:pt idx="19">
+                  <c:v>09-25</c:v>
+                </c:pt>
+                <c:pt idx="20">
+                  <c:v>10-03</c:v>
+                </c:pt>
+                <c:pt idx="21">
+                  <c:v>10-10</c:v>
+                </c:pt>
+                <c:pt idx="22">
+                  <c:v>10-17</c:v>
+                </c:pt>
+                <c:pt idx="23">
+                  <c:v>10-27</c:v>
+                </c:pt>
+                <c:pt idx="24">
+                  <c:v>11-03</c:v>
+                </c:pt>
+                <c:pt idx="25">
+                  <c:v>11-11</c:v>
+                </c:pt>
+                <c:pt idx="26">
+                  <c:v>11-18</c:v>
+                </c:pt>
+                <c:pt idx="27">
+                  <c:v>11-25</c:v>
+                </c:pt>
+                <c:pt idx="28">
+                  <c:v>12-02</c:v>
+                </c:pt>
+                <c:pt idx="29">
+                  <c:v>12-09</c:v>
+                </c:pt>
+                <c:pt idx="30">
+                  <c:v>12-16</c:v>
+                </c:pt>
+                <c:pt idx="31">
+                  <c:v>12-23</c:v>
+                </c:pt>
+                <c:pt idx="32">
+                  <c:v>12-31</c:v>
+                </c:pt>
+                <c:pt idx="33">
+                  <c:v>01-07</c:v>
+                </c:pt>
+                <c:pt idx="34">
+                  <c:v>01-14</c:v>
+                </c:pt>
+                <c:pt idx="35">
+                  <c:v>01-22</c:v>
+                </c:pt>
+                <c:pt idx="36">
+                  <c:v>01-30</c:v>
+                </c:pt>
+                <c:pt idx="37">
+                  <c:v>02-06</c:v>
+                </c:pt>
+                <c:pt idx="38">
+                  <c:v>02-13</c:v>
+                </c:pt>
+                <c:pt idx="39">
+                  <c:v>02-20</c:v>
+                </c:pt>
+                <c:pt idx="40">
+                  <c:v>02-27</c:v>
+                </c:pt>
+                <c:pt idx="41">
+                  <c:v>03-09</c:v>
+                </c:pt>
+                <c:pt idx="42">
+                  <c:v>03-16</c:v>
+                </c:pt>
+                <c:pt idx="43">
+                  <c:v>03-23</c:v>
+                </c:pt>
+                <c:pt idx="44">
+                  <c:v>04-01</c:v>
+                </c:pt>
+                <c:pt idx="45">
+                  <c:v>04-09</c:v>
+                </c:pt>
+                <c:pt idx="46">
+                  <c:v>04-17</c:v>
+                </c:pt>
+                <c:pt idx="47">
+                  <c:v>04-24</c:v>
+                </c:pt>
+                <c:pt idx="48">
+                  <c:v>05-04</c:v>
+                </c:pt>
+                <c:pt idx="49">
+                  <c:v>05-11</c:v>
+                </c:pt>
+              </c:strCache>
+            </c:strRef>
+          </c:cat>
+          <c:val>
+            <c:numRef>
+              <c:f>Sheet1!$B$2:$B$51</c:f>
+              <c:numCache>
+                <c:formatCode>General</c:formatCode>
+                <c:ptCount val="50"/>
+                <c:pt idx="0">
+                  <c:v>1431.0999755859375</c:v>
+                </c:pt>
+                <c:pt idx="1">
+                  <c:v>1437.550048828125</c:v>
+                </c:pt>
+                <c:pt idx="2">
+                  <c:v>1447.050048828125</c:v>
+                </c:pt>
+                <c:pt idx="3">
+                  <c:v>1438.0</c:v>
+                </c:pt>
+                <c:pt idx="4">
+                  <c:v>1422.9000244140625</c:v>
+                </c:pt>
+                <c:pt idx="5">
+                  <c:v>1423.050048828125</c:v>
+                </c:pt>
+                <c:pt idx="6">
+                  <c:v>1423.9000244140625</c:v>
+                </c:pt>
+                <c:pt idx="7">
+                  <c:v>1432.0</c:v>
+                </c:pt>
+                <c:pt idx="8">
+                  <c:v>1442.1500244140625</c:v>
+                </c:pt>
+                <c:pt idx="9">
+                  <c:v>1431.449951171875</c:v>
+                </c:pt>
+                <c:pt idx="10">
+                  <c:v>1473.550048828125</c:v>
+                </c:pt>
+                <c:pt idx="11">
+                  <c:v>1486.25</c:v>
+                </c:pt>
+                <c:pt idx="12">
+                  <c:v>1444.300048828125</c:v>
+                </c:pt>
+                <c:pt idx="13">
+                  <c:v>1422.0999755859375</c:v>
+                </c:pt>
+                <c:pt idx="14">
+                  <c:v>1430.25</c:v>
+                </c:pt>
+                <c:pt idx="15">
+                  <c:v>1398.800048828125</c:v>
+                </c:pt>
+                <c:pt idx="16">
+                  <c:v>1405.6500244140625</c:v>
+                </c:pt>
+                <c:pt idx="17">
+                  <c:v>1401.800048828125</c:v>
+                </c:pt>
+                <c:pt idx="18">
+                  <c:v>1421.8499755859375</c:v>
+                </c:pt>
+                <c:pt idx="19">
+                  <c:v>1375.5</c:v>
+                </c:pt>
+                <c:pt idx="20">
+                  <c:v>1365.0</c:v>
+                </c:pt>
+                <c:pt idx="21">
+                  <c:v>1380.6500244140625</c:v>
+                </c:pt>
+                <c:pt idx="22">
+                  <c:v>1436.699951171875</c:v>
+                </c:pt>
+                <c:pt idx="23">
+                  <c:v>1377.699951171875</c:v>
+                </c:pt>
+                <c:pt idx="24">
+                  <c:v>1345.5999755859375</c:v>
+                </c:pt>
+                <c:pt idx="25">
+                  <c:v>1358.4000244140625</c:v>
+                </c:pt>
+                <c:pt idx="26">
+                  <c:v>1371.9000244140625</c:v>
+                </c:pt>
+                <c:pt idx="27">
+                  <c:v>1358.050048828125</c:v>
+                </c:pt>
+                <c:pt idx="28">
+                  <c:v>1372.6500244140625</c:v>
+                </c:pt>
+                <c:pt idx="29">
+                  <c:v>1374.9000244140625</c:v>
+                </c:pt>
+                <c:pt idx="30">
+                  <c:v>1366.0</c:v>
+                </c:pt>
+                <c:pt idx="31">
+                  <c:v>1363.050048828125</c:v>
+                </c:pt>
+                <c:pt idx="32">
+                  <c:v>1342.9000244140625</c:v>
+                </c:pt>
+                <c:pt idx="33">
+                  <c:v>1428.449951171875</c:v>
+                </c:pt>
+                <c:pt idx="34">
+                  <c:v>1418.1500244140625</c:v>
+                </c:pt>
+                <c:pt idx="35">
+                  <c:v>1345.6500244140625</c:v>
+                </c:pt>
+                <c:pt idx="36">
+                  <c:v>1355.050048828125</c:v>
+                </c:pt>
+                <c:pt idx="37">
+                  <c:v>1406.6500244140625</c:v>
+                </c:pt>
+                <c:pt idx="38">
+                  <c:v>1414.3499755859375</c:v>
+                </c:pt>
+                <c:pt idx="39">
+                  <c:v>1393.550048828125</c:v>
+                </c:pt>
+                <c:pt idx="40">
+                  <c:v>1379.0</c:v>
+                </c:pt>
+                <c:pt idx="41">
+                  <c:v>1277.4000244140625</c:v>
+                </c:pt>
+                <c:pt idx="42">
+                  <c:v>1273.0</c:v>
+                </c:pt>
+                <c:pt idx="43">
+                  <c:v>1222.6500244140625</c:v>
+                </c:pt>
+                <c:pt idx="44">
+                  <c:v>1212.550048828125</c:v>
+                </c:pt>
+                <c:pt idx="45">
+                  <c:v>1280.75</c:v>
+                </c:pt>
+                <c:pt idx="46">
+                  <c:v>1347.5</c:v>
+                </c:pt>
+                <c:pt idx="47">
+                  <c:v>1326.300048828125</c:v>
+                </c:pt>
+                <c:pt idx="48">
+                  <c:v>1270.949951171875</c:v>
+                </c:pt>
+                <c:pt idx="49">
+                  <c:v>1266.1500244140625</c:v>
+                </c:pt>
+              </c:numCache>
+            </c:numRef>
+          </c:val>
+          <c:smooth val="0"/>
+        </c:ser>
+        <c:marker val="1"/>
+        <c:smooth val="0"/>
+        <c:axId val="2118791784"/>
+        <c:axId val="2140495176"/>
+      </c:lineChart>
+      <c:catAx>
+        <c:axId val="2118791784"/>
+        <c:scaling>
+          <c:orientation val="minMax"/>
+        </c:scaling>
+        <c:delete val="0"/>
+        <c:axPos val="b"/>
+        <c:majorTickMark val="out"/>
+        <c:minorTickMark val="none"/>
+        <c:tickLblPos val="nextTo"/>
+        <c:spPr>
+          <a:ln>
+            <a:noFill/>
+          </a:ln>
+        </c:spPr>
+        <c:txPr>
+          <a:bodyPr/>
+          <a:lstStyle/>
+          <a:p>
+            <a:pPr>
+              <a:defRPr sz="700">
+                <a:solidFill>
+                  <a:srgbClr val="9A9A9A"/>
+                </a:solidFill>
+                <a:latin typeface="Calibri"/>
+              </a:defRPr>
+            </a:pPr>
+          </a:p>
+        </c:txPr>
+        <c:crossAx val="2140495176"/>
+        <c:crosses val="autoZero"/>
+        <c:auto val="1"/>
+        <c:lblAlgn val="ctr"/>
+        <c:lblOffset val="100"/>
+        <c:noMultiLvlLbl val="0"/>
+      </c:catAx>
+      <c:valAx>
+        <c:axId val="2140495176"/>
+        <c:scaling/>
+        <c:delete val="0"/>
+        <c:axPos val="l"/>
+        <c:majorGridlines/>
+        <c:majorTickMark val="out"/>
+        <c:minorTickMark val="none"/>
+        <c:tickLblPos val="nextTo"/>
+        <c:spPr>
+          <a:ln>
+            <a:noFill/>
+          </a:ln>
+        </c:spPr>
+        <c:txPr>
+          <a:bodyPr/>
+          <a:lstStyle/>
+          <a:p>
+            <a:pPr>
+              <a:defRPr sz="700">
+                <a:solidFill>
+                  <a:srgbClr val="9A9A9A"/>
+                </a:solidFill>
+                <a:latin typeface="Calibri"/>
+              </a:defRPr>
+            </a:pPr>
+          </a:p>
+        </c:txPr>
+        <c:crossAx val="2118791784"/>
+        <c:crosses val="autoZero"/>
+      </c:valAx>
+    </c:plotArea>
+    <c:plotVisOnly val="1"/>
+    <c:dispBlanksAs val="gap"/>
+    <c:showDLblsOverMax val="0"/>
+  </c:chart>
+  <c:txPr>
+    <a:bodyPr/>
+    <a:lstStyle/>
+    <a:p>
+      <a:pPr>
+        <a:defRPr sz="1800"/>
+      </a:pPr>
+      <a:endParaRPr lang="en-US"/>
+    </a:p>
+  </c:txPr>
+  <c:externalData r:id="rId1">
+    <c:autoUpdate val="0"/>
+  </c:externalData>
+</c:chartSpace>
 </file>
 
 <file path=ppt/slideLayouts/slideLayout1.xml><?xml version="1.0" encoding="utf-8"?>
@@ -3339,7 +3784,7 @@
                 </a:solidFill>
                 <a:latin typeface="Georgia"/>
               </a:rPr>
-              <a:t>ICICIBANK.BO</a:t>
+              <a:t>ICICI Bank Limited</a:t>
             </a:r>
           </a:p>
         </p:txBody>
@@ -3374,7 +3819,7 @@
                 </a:solidFill>
                 <a:latin typeface="Calibri"/>
               </a:rPr>
-              <a:t>ICICIBANK.BO  ·  —  ·  —  ·  —</a:t>
+              <a:t>ICICIBANK.BO  ·  Financials  ·  Banks—Diversified  ·  —</a:t>
             </a:r>
           </a:p>
         </p:txBody>
@@ -3808,7 +4253,7 @@
                 </a:solidFill>
                 <a:latin typeface="Calibri"/>
               </a:rPr>
-              <a:t>1,669.80</a:t>
+              <a:t>INR 1,669.80</a:t>
             </a:r>
           </a:p>
         </p:txBody>
@@ -3968,7 +4413,7 @@
                 </a:solidFill>
                 <a:latin typeface="Calibri"/>
               </a:rPr>
-              <a:t>+333860.0%</a:t>
+              <a:t>+35.2%</a:t>
             </a:r>
           </a:p>
         </p:txBody>
@@ -4117,7 +4562,7 @@
                 </a:solidFill>
                 <a:latin typeface="Calibri"/>
               </a:rPr>
-              <a:t>0.50</a:t>
+              <a:t>INR 1,235.10</a:t>
             </a:r>
           </a:p>
         </p:txBody>
@@ -4187,7 +4632,7 @@
                 </a:solidFill>
                 <a:latin typeface="Calibri"/>
               </a:rPr>
-              <a:t>—</a:t>
+              <a:t>INR 8.89T</a:t>
             </a:r>
           </a:p>
         </p:txBody>
@@ -4327,7 +4772,7 @@
                 </a:solidFill>
                 <a:latin typeface="Calibri"/>
               </a:rPr>
-              <a:t>—</a:t>
+              <a:t>13.6x</a:t>
             </a:r>
           </a:p>
         </p:txBody>
@@ -4397,7 +4842,7 @@
                 </a:solidFill>
                 <a:latin typeface="Calibri"/>
               </a:rPr>
-              <a:t>—</a:t>
+              <a:t>1.24%</a:t>
             </a:r>
           </a:p>
         </p:txBody>
@@ -4467,7 +4912,7 @@
                 </a:solidFill>
                 <a:latin typeface="Calibri"/>
               </a:rPr>
-              <a:t/>
+              <a:t>INR</a:t>
             </a:r>
           </a:p>
         </p:txBody>
@@ -4612,11 +5057,11 @@
             <a:r>
               <a:rPr sz="1400" b="0">
                 <a:solidFill>
-                  <a:srgbClr val="5C5C5C"/>
-                </a:solidFill>
-                <a:latin typeface="Calibri"/>
-              </a:rPr>
-              <a:t>—</a:t>
+                  <a:srgbClr val="B83227"/>
+                </a:solidFill>
+                <a:latin typeface="Calibri"/>
+              </a:rPr>
+              <a:t>-0.4%</a:t>
             </a:r>
           </a:p>
         </p:txBody>
@@ -4682,11 +5127,11 @@
             <a:r>
               <a:rPr sz="1400" b="0">
                 <a:solidFill>
-                  <a:srgbClr val="5C5C5C"/>
-                </a:solidFill>
-                <a:latin typeface="Calibri"/>
-              </a:rPr>
-              <a:t>—</a:t>
+                  <a:srgbClr val="B83227"/>
+                </a:solidFill>
+                <a:latin typeface="Calibri"/>
+              </a:rPr>
+              <a:t>-3.5%</a:t>
             </a:r>
           </a:p>
         </p:txBody>
@@ -4752,11 +5197,11 @@
             <a:r>
               <a:rPr sz="1400" b="0">
                 <a:solidFill>
-                  <a:srgbClr val="5C5C5C"/>
-                </a:solidFill>
-                <a:latin typeface="Calibri"/>
-              </a:rPr>
-              <a:t>—</a:t>
+                  <a:srgbClr val="B83227"/>
+                </a:solidFill>
+                <a:latin typeface="Calibri"/>
+              </a:rPr>
+              <a:t>-6.6%</a:t>
             </a:r>
           </a:p>
         </p:txBody>
@@ -4822,11 +5267,11 @@
             <a:r>
               <a:rPr sz="1400" b="0">
                 <a:solidFill>
-                  <a:srgbClr val="5C5C5C"/>
-                </a:solidFill>
-                <a:latin typeface="Calibri"/>
-              </a:rPr>
-              <a:t>—</a:t>
+                  <a:srgbClr val="B83227"/>
+                </a:solidFill>
+                <a:latin typeface="Calibri"/>
+              </a:rPr>
+              <a:t>-11.5%</a:t>
             </a:r>
           </a:p>
         </p:txBody>
@@ -4892,11 +5337,11 @@
             <a:r>
               <a:rPr sz="1400" b="0">
                 <a:solidFill>
-                  <a:srgbClr val="5C5C5C"/>
-                </a:solidFill>
-                <a:latin typeface="Calibri"/>
-              </a:rPr>
-              <a:t>—</a:t>
+                  <a:srgbClr val="B83227"/>
+                </a:solidFill>
+                <a:latin typeface="Calibri"/>
+              </a:rPr>
+              <a:t>-7.6%</a:t>
             </a:r>
           </a:p>
         </p:txBody>
@@ -4962,11 +5407,11 @@
             <a:r>
               <a:rPr sz="1400" b="0">
                 <a:solidFill>
-                  <a:srgbClr val="5C5C5C"/>
-                </a:solidFill>
-                <a:latin typeface="Calibri"/>
-              </a:rPr>
-              <a:t>—</a:t>
+                  <a:srgbClr val="B83227"/>
+                </a:solidFill>
+                <a:latin typeface="Calibri"/>
+              </a:rPr>
+              <a:t>-7.7%</a:t>
             </a:r>
           </a:p>
         </p:txBody>
@@ -5080,7 +5525,7 @@
                 </a:solidFill>
                 <a:latin typeface="Calibri"/>
               </a:rPr>
-              <a:t> 0.00</a:t>
+              <a:t>INR 1,205.20</a:t>
             </a:r>
           </a:p>
         </p:txBody>
@@ -5115,7 +5560,7 @@
                 </a:solidFill>
                 <a:latin typeface="Calibri"/>
               </a:rPr>
-              <a:t> 1.00</a:t>
+              <a:t>INR 1,488.65</a:t>
             </a:r>
           </a:p>
         </p:txBody>
@@ -5172,7 +5617,7 @@
         <p:spPr>
           <a:xfrm>
             <a:off x="1280160" y="6400799"/>
-            <a:ext cx="2148839" cy="54864"/>
+            <a:ext cx="453345" cy="54864"/>
           </a:xfrm>
           <a:prstGeom prst="rect">
             <a:avLst/>
@@ -5214,7 +5659,7 @@
         </p:nvSpPr>
         <p:spPr>
           <a:xfrm>
-            <a:off x="3346703" y="6345936"/>
+            <a:off x="1651209" y="6345936"/>
             <a:ext cx="164592" cy="164592"/>
           </a:xfrm>
           <a:prstGeom prst="diamond">
@@ -5257,7 +5702,7 @@
         </p:nvSpPr>
         <p:spPr>
           <a:xfrm>
-            <a:off x="2788920" y="6565392"/>
+            <a:off x="1093425" y="6565392"/>
             <a:ext cx="1280160" cy="182880"/>
           </a:xfrm>
           <a:prstGeom prst="rect">
@@ -5279,7 +5724,7 @@
                 </a:solidFill>
                 <a:latin typeface="Calibri"/>
               </a:rPr>
-              <a:t>Current   0.50</a:t>
+              <a:t>Current  INR 1,235.10</a:t>
             </a:r>
           </a:p>
         </p:txBody>
@@ -6002,7 +6447,7 @@
                 </a:solidFill>
                 <a:latin typeface="Calibri"/>
               </a:rPr>
-              <a:t>Source: investing  |  Generated 13 May 2026  |  Analyst: Jabal Research</a:t>
+              <a:t>Source: investing, marketscreener, yahoo  |  Generated 13 May 2026  |  Analyst: Jabal Research</a:t>
             </a:r>
           </a:p>
         </p:txBody>
@@ -6548,7 +6993,7 @@
                 </a:solidFill>
                 <a:latin typeface="Calibri"/>
               </a:rPr>
-              <a:t>Jabal maintains a constructive view into the upcoming print. the company sits in the — sector (—). Street consensus is buy (40 analysts covering); consensus target 1669.80. The thesis hinges on three factors: demand trajectory through H2, feedstock/input-cost discipline, and management's tone on guidance during the call. We expect the print itself to be within consensus bounds; the read on forward commentary is the swing factor.</a:t>
+              <a:t>Jabal maintains a constructive view into the upcoming print. ICICI Bank Limited sits in the Financials sector (Banks—Diversified). Street consensus is buy (40 analysts covering); consensus target 1669.80. The shares trade at a P/E around 13.6x trailing earnings. Macro context: local-economy GDP growth recently at 6.5%. The thesis hinges on three factors: demand trajectory through H2, feedstock/input-cost discipline, and management's tone on guidance during the call. We expect the print itself to be within consensus bounds; the read on forward commentary is the swing factor.</a:t>
             </a:r>
           </a:p>
         </p:txBody>
@@ -6986,7 +7431,7 @@
                 </a:solidFill>
                 <a:latin typeface="Calibri"/>
               </a:rPr>
-              <a:t>—</a:t>
+              <a:t>19.350</a:t>
             </a:r>
           </a:p>
         </p:txBody>
@@ -7204,7 +7649,7 @@
                 </a:solidFill>
                 <a:latin typeface="Calibri"/>
               </a:rPr>
-              <a:t>—</a:t>
+              <a:t>0</a:t>
             </a:r>
           </a:p>
         </p:txBody>
@@ -7379,7 +7824,7 @@
                 </a:solidFill>
                 <a:latin typeface="Calibri"/>
               </a:rPr>
-              <a:t>—</a:t>
+              <a:t>69.725</a:t>
             </a:r>
           </a:p>
         </p:txBody>
@@ -7597,7 +8042,7 @@
                 </a:solidFill>
                 <a:latin typeface="Calibri"/>
               </a:rPr>
-              <a:t>—</a:t>
+              <a:t>1.20T</a:t>
             </a:r>
           </a:p>
         </p:txBody>
@@ -7702,7 +8147,7 @@
                 </a:solidFill>
                 <a:latin typeface="Calibri"/>
               </a:rPr>
-              <a:t>Dividend yield (TTM)</a:t>
+              <a:t>EPS (FY+1 est.)</a:t>
             </a:r>
           </a:p>
         </p:txBody>
@@ -7772,7 +8217,7 @@
                 </a:solidFill>
                 <a:latin typeface="Calibri"/>
               </a:rPr>
-              <a:t>—</a:t>
+              <a:t>79.415</a:t>
             </a:r>
           </a:p>
         </p:txBody>
@@ -7849,7 +8294,400 @@
       </p:sp>
       <p:sp>
         <p:nvSpPr>
-          <p:cNvPr id="49" name="TextBox 48"/>
+          <p:cNvPr id="49" name="Rectangle 48"/>
+          <p:cNvSpPr/>
+          <p:nvPr/>
+        </p:nvSpPr>
+        <p:spPr>
+          <a:xfrm>
+            <a:off x="411480" y="5724144"/>
+            <a:ext cx="6035040" cy="274320"/>
+          </a:xfrm>
+          <a:prstGeom prst="rect">
+            <a:avLst/>
+          </a:prstGeom>
+          <a:solidFill>
+            <a:srgbClr val="EFE8DC"/>
+          </a:solidFill>
+          <a:ln>
+            <a:noFill/>
+          </a:ln>
+        </p:spPr>
+        <p:style>
+          <a:lnRef idx="1">
+            <a:schemeClr val="accent1"/>
+          </a:lnRef>
+          <a:fillRef idx="3">
+            <a:schemeClr val="accent1"/>
+          </a:fillRef>
+          <a:effectRef idx="2">
+            <a:schemeClr val="accent1"/>
+          </a:effectRef>
+          <a:fontRef idx="minor">
+            <a:schemeClr val="lt1"/>
+          </a:fontRef>
+        </p:style>
+        <p:txBody>
+          <a:bodyPr rtlCol="0" anchor="ctr"/>
+          <a:lstStyle/>
+          <a:p>
+            <a:pPr algn="ctr"/>
+          </a:p>
+        </p:txBody>
+      </p:sp>
+      <p:sp>
+        <p:nvSpPr>
+          <p:cNvPr id="50" name="TextBox 49"/>
+          <p:cNvSpPr txBox="1"/>
+          <p:nvPr/>
+        </p:nvSpPr>
+        <p:spPr>
+          <a:xfrm>
+            <a:off x="411480" y="5742432"/>
+            <a:ext cx="2148840" cy="274320"/>
+          </a:xfrm>
+          <a:prstGeom prst="rect">
+            <a:avLst/>
+          </a:prstGeom>
+          <a:noFill/>
+        </p:spPr>
+        <p:txBody>
+          <a:bodyPr wrap="square" lIns="0" rIns="0" tIns="0" bIns="0" anchor="t">
+            <a:spAutoFit/>
+          </a:bodyPr>
+          <a:lstStyle/>
+          <a:p>
+            <a:pPr algn="l"/>
+            <a:r>
+              <a:rPr sz="1000" b="0">
+                <a:solidFill>
+                  <a:srgbClr val="1A1A1A"/>
+                </a:solidFill>
+                <a:latin typeface="Calibri"/>
+              </a:rPr>
+              <a:t>Revenue (FY+1)</a:t>
+            </a:r>
+          </a:p>
+        </p:txBody>
+      </p:sp>
+      <p:sp>
+        <p:nvSpPr>
+          <p:cNvPr id="51" name="TextBox 50"/>
+          <p:cNvSpPr txBox="1"/>
+          <p:nvPr/>
+        </p:nvSpPr>
+        <p:spPr>
+          <a:xfrm>
+            <a:off x="2606040" y="5742432"/>
+            <a:ext cx="960120" cy="274320"/>
+          </a:xfrm>
+          <a:prstGeom prst="rect">
+            <a:avLst/>
+          </a:prstGeom>
+          <a:noFill/>
+        </p:spPr>
+        <p:txBody>
+          <a:bodyPr wrap="square" lIns="0" rIns="0" tIns="0" bIns="0" anchor="t">
+            <a:spAutoFit/>
+          </a:bodyPr>
+          <a:lstStyle/>
+          <a:p>
+            <a:pPr algn="r"/>
+            <a:r>
+              <a:rPr sz="1000" b="0">
+                <a:solidFill>
+                  <a:srgbClr val="1A1A1A"/>
+                </a:solidFill>
+                <a:latin typeface="Calibri"/>
+              </a:rPr>
+              <a:t>—</a:t>
+            </a:r>
+          </a:p>
+        </p:txBody>
+      </p:sp>
+      <p:sp>
+        <p:nvSpPr>
+          <p:cNvPr id="52" name="TextBox 51"/>
+          <p:cNvSpPr txBox="1"/>
+          <p:nvPr/>
+        </p:nvSpPr>
+        <p:spPr>
+          <a:xfrm>
+            <a:off x="3611880" y="5742432"/>
+            <a:ext cx="960120" cy="274320"/>
+          </a:xfrm>
+          <a:prstGeom prst="rect">
+            <a:avLst/>
+          </a:prstGeom>
+          <a:noFill/>
+        </p:spPr>
+        <p:txBody>
+          <a:bodyPr wrap="square" lIns="0" rIns="0" tIns="0" bIns="0" anchor="t">
+            <a:spAutoFit/>
+          </a:bodyPr>
+          <a:lstStyle/>
+          <a:p>
+            <a:pPr algn="r"/>
+            <a:r>
+              <a:rPr sz="1000" b="0">
+                <a:solidFill>
+                  <a:srgbClr val="1A1A1A"/>
+                </a:solidFill>
+                <a:latin typeface="Calibri"/>
+              </a:rPr>
+              <a:t>1.36T</a:t>
+            </a:r>
+          </a:p>
+        </p:txBody>
+      </p:sp>
+      <p:sp>
+        <p:nvSpPr>
+          <p:cNvPr id="53" name="TextBox 52"/>
+          <p:cNvSpPr txBox="1"/>
+          <p:nvPr/>
+        </p:nvSpPr>
+        <p:spPr>
+          <a:xfrm>
+            <a:off x="4617720" y="5742432"/>
+            <a:ext cx="960120" cy="274320"/>
+          </a:xfrm>
+          <a:prstGeom prst="rect">
+            <a:avLst/>
+          </a:prstGeom>
+          <a:noFill/>
+        </p:spPr>
+        <p:txBody>
+          <a:bodyPr wrap="square" lIns="0" rIns="0" tIns="0" bIns="0" anchor="t">
+            <a:spAutoFit/>
+          </a:bodyPr>
+          <a:lstStyle/>
+          <a:p>
+            <a:pPr algn="r"/>
+            <a:r>
+              <a:rPr sz="1000" b="0">
+                <a:solidFill>
+                  <a:srgbClr val="1A1A1A"/>
+                </a:solidFill>
+                <a:latin typeface="Calibri"/>
+              </a:rPr>
+              <a:t>—</a:t>
+            </a:r>
+          </a:p>
+        </p:txBody>
+      </p:sp>
+      <p:sp>
+        <p:nvSpPr>
+          <p:cNvPr id="54" name="TextBox 53"/>
+          <p:cNvSpPr txBox="1"/>
+          <p:nvPr/>
+        </p:nvSpPr>
+        <p:spPr>
+          <a:xfrm>
+            <a:off x="5623560" y="5742432"/>
+            <a:ext cx="777240" cy="274320"/>
+          </a:xfrm>
+          <a:prstGeom prst="rect">
+            <a:avLst/>
+          </a:prstGeom>
+          <a:noFill/>
+        </p:spPr>
+        <p:txBody>
+          <a:bodyPr wrap="square" lIns="0" rIns="0" tIns="0" bIns="0" anchor="t">
+            <a:spAutoFit/>
+          </a:bodyPr>
+          <a:lstStyle/>
+          <a:p>
+            <a:pPr algn="r"/>
+            <a:r>
+              <a:rPr sz="1000" b="0">
+                <a:solidFill>
+                  <a:srgbClr val="1A1A1A"/>
+                </a:solidFill>
+                <a:latin typeface="Calibri"/>
+              </a:rPr>
+              <a:t>—</a:t>
+            </a:r>
+          </a:p>
+        </p:txBody>
+      </p:sp>
+      <p:sp>
+        <p:nvSpPr>
+          <p:cNvPr id="55" name="TextBox 54"/>
+          <p:cNvSpPr txBox="1"/>
+          <p:nvPr/>
+        </p:nvSpPr>
+        <p:spPr>
+          <a:xfrm>
+            <a:off x="411480" y="6016752"/>
+            <a:ext cx="2148840" cy="274320"/>
+          </a:xfrm>
+          <a:prstGeom prst="rect">
+            <a:avLst/>
+          </a:prstGeom>
+          <a:noFill/>
+        </p:spPr>
+        <p:txBody>
+          <a:bodyPr wrap="square" lIns="0" rIns="0" tIns="0" bIns="0" anchor="t">
+            <a:spAutoFit/>
+          </a:bodyPr>
+          <a:lstStyle/>
+          <a:p>
+            <a:pPr algn="l"/>
+            <a:r>
+              <a:rPr sz="1000" b="0">
+                <a:solidFill>
+                  <a:srgbClr val="1A1A1A"/>
+                </a:solidFill>
+                <a:latin typeface="Calibri"/>
+              </a:rPr>
+              <a:t>Dividend yield (TTM)</a:t>
+            </a:r>
+          </a:p>
+        </p:txBody>
+      </p:sp>
+      <p:sp>
+        <p:nvSpPr>
+          <p:cNvPr id="56" name="TextBox 55"/>
+          <p:cNvSpPr txBox="1"/>
+          <p:nvPr/>
+        </p:nvSpPr>
+        <p:spPr>
+          <a:xfrm>
+            <a:off x="2606040" y="6016752"/>
+            <a:ext cx="960120" cy="274320"/>
+          </a:xfrm>
+          <a:prstGeom prst="rect">
+            <a:avLst/>
+          </a:prstGeom>
+          <a:noFill/>
+        </p:spPr>
+        <p:txBody>
+          <a:bodyPr wrap="square" lIns="0" rIns="0" tIns="0" bIns="0" anchor="t">
+            <a:spAutoFit/>
+          </a:bodyPr>
+          <a:lstStyle/>
+          <a:p>
+            <a:pPr algn="r"/>
+            <a:r>
+              <a:rPr sz="1000" b="0">
+                <a:solidFill>
+                  <a:srgbClr val="1A1A1A"/>
+                </a:solidFill>
+                <a:latin typeface="Calibri"/>
+              </a:rPr>
+              <a:t>—</a:t>
+            </a:r>
+          </a:p>
+        </p:txBody>
+      </p:sp>
+      <p:sp>
+        <p:nvSpPr>
+          <p:cNvPr id="57" name="TextBox 56"/>
+          <p:cNvSpPr txBox="1"/>
+          <p:nvPr/>
+        </p:nvSpPr>
+        <p:spPr>
+          <a:xfrm>
+            <a:off x="3611880" y="6016752"/>
+            <a:ext cx="960120" cy="274320"/>
+          </a:xfrm>
+          <a:prstGeom prst="rect">
+            <a:avLst/>
+          </a:prstGeom>
+          <a:noFill/>
+        </p:spPr>
+        <p:txBody>
+          <a:bodyPr wrap="square" lIns="0" rIns="0" tIns="0" bIns="0" anchor="t">
+            <a:spAutoFit/>
+          </a:bodyPr>
+          <a:lstStyle/>
+          <a:p>
+            <a:pPr algn="r"/>
+            <a:r>
+              <a:rPr sz="1000" b="0">
+                <a:solidFill>
+                  <a:srgbClr val="1A1A1A"/>
+                </a:solidFill>
+                <a:latin typeface="Calibri"/>
+              </a:rPr>
+              <a:t>1.24%</a:t>
+            </a:r>
+          </a:p>
+        </p:txBody>
+      </p:sp>
+      <p:sp>
+        <p:nvSpPr>
+          <p:cNvPr id="58" name="TextBox 57"/>
+          <p:cNvSpPr txBox="1"/>
+          <p:nvPr/>
+        </p:nvSpPr>
+        <p:spPr>
+          <a:xfrm>
+            <a:off x="4617720" y="6016752"/>
+            <a:ext cx="960120" cy="274320"/>
+          </a:xfrm>
+          <a:prstGeom prst="rect">
+            <a:avLst/>
+          </a:prstGeom>
+          <a:noFill/>
+        </p:spPr>
+        <p:txBody>
+          <a:bodyPr wrap="square" lIns="0" rIns="0" tIns="0" bIns="0" anchor="t">
+            <a:spAutoFit/>
+          </a:bodyPr>
+          <a:lstStyle/>
+          <a:p>
+            <a:pPr algn="r"/>
+            <a:r>
+              <a:rPr sz="1000" b="0">
+                <a:solidFill>
+                  <a:srgbClr val="1A1A1A"/>
+                </a:solidFill>
+                <a:latin typeface="Calibri"/>
+              </a:rPr>
+              <a:t>—</a:t>
+            </a:r>
+          </a:p>
+        </p:txBody>
+      </p:sp>
+      <p:sp>
+        <p:nvSpPr>
+          <p:cNvPr id="59" name="TextBox 58"/>
+          <p:cNvSpPr txBox="1"/>
+          <p:nvPr/>
+        </p:nvSpPr>
+        <p:spPr>
+          <a:xfrm>
+            <a:off x="5623560" y="6016752"/>
+            <a:ext cx="777240" cy="274320"/>
+          </a:xfrm>
+          <a:prstGeom prst="rect">
+            <a:avLst/>
+          </a:prstGeom>
+          <a:noFill/>
+        </p:spPr>
+        <p:txBody>
+          <a:bodyPr wrap="square" lIns="0" rIns="0" tIns="0" bIns="0" anchor="t">
+            <a:spAutoFit/>
+          </a:bodyPr>
+          <a:lstStyle/>
+          <a:p>
+            <a:pPr algn="r"/>
+            <a:r>
+              <a:rPr sz="1000" b="0">
+                <a:solidFill>
+                  <a:srgbClr val="1A1A1A"/>
+                </a:solidFill>
+                <a:latin typeface="Calibri"/>
+              </a:rPr>
+              <a:t>—</a:t>
+            </a:r>
+          </a:p>
+        </p:txBody>
+      </p:sp>
+      <p:sp>
+        <p:nvSpPr>
+          <p:cNvPr id="60" name="TextBox 59"/>
           <p:cNvSpPr txBox="1"/>
           <p:nvPr/>
         </p:nvSpPr>
@@ -7877,14 +8715,14 @@
                 </a:solidFill>
                 <a:latin typeface="Calibri"/>
               </a:rPr>
-              <a:t>Consensus: —  ·  40 analysts covering</a:t>
-            </a:r>
-          </a:p>
-        </p:txBody>
-      </p:sp>
-      <p:sp>
-        <p:nvSpPr>
-          <p:cNvPr id="50" name="Rectangle 49"/>
+              <a:t>Consensus: Yahoo  ·  40 analysts covering</a:t>
+            </a:r>
+          </a:p>
+        </p:txBody>
+      </p:sp>
+      <p:sp>
+        <p:nvSpPr>
+          <p:cNvPr id="61" name="Rectangle 60"/>
           <p:cNvSpPr/>
           <p:nvPr/>
         </p:nvSpPr>
@@ -7930,7 +8768,7 @@
       </p:sp>
       <p:sp>
         <p:nvSpPr>
-          <p:cNvPr id="51" name="Rectangle 50"/>
+          <p:cNvPr id="62" name="Rectangle 61"/>
           <p:cNvSpPr/>
           <p:nvPr/>
         </p:nvSpPr>
@@ -7974,7 +8812,7 @@
       </p:sp>
       <p:sp>
         <p:nvSpPr>
-          <p:cNvPr id="52" name="TextBox 51"/>
+          <p:cNvPr id="63" name="TextBox 62"/>
           <p:cNvSpPr txBox="1"/>
           <p:nvPr/>
         </p:nvSpPr>
@@ -8009,7 +8847,7 @@
       </p:sp>
       <p:sp>
         <p:nvSpPr>
-          <p:cNvPr id="53" name="Oval 52"/>
+          <p:cNvPr id="64" name="Oval 63"/>
           <p:cNvSpPr/>
           <p:nvPr/>
         </p:nvSpPr>
@@ -8052,7 +8890,7 @@
       </p:sp>
       <p:sp>
         <p:nvSpPr>
-          <p:cNvPr id="54" name="TextBox 53"/>
+          <p:cNvPr id="65" name="TextBox 64"/>
           <p:cNvSpPr txBox="1"/>
           <p:nvPr/>
         </p:nvSpPr>
@@ -8087,7 +8925,7 @@
       </p:sp>
       <p:sp>
         <p:nvSpPr>
-          <p:cNvPr id="55" name="Oval 54"/>
+          <p:cNvPr id="66" name="Oval 65"/>
           <p:cNvSpPr/>
           <p:nvPr/>
         </p:nvSpPr>
@@ -8130,7 +8968,7 @@
       </p:sp>
       <p:sp>
         <p:nvSpPr>
-          <p:cNvPr id="56" name="TextBox 55"/>
+          <p:cNvPr id="67" name="TextBox 66"/>
           <p:cNvSpPr txBox="1"/>
           <p:nvPr/>
         </p:nvSpPr>
@@ -8165,7 +9003,7 @@
       </p:sp>
       <p:sp>
         <p:nvSpPr>
-          <p:cNvPr id="57" name="Oval 56"/>
+          <p:cNvPr id="68" name="Oval 67"/>
           <p:cNvSpPr/>
           <p:nvPr/>
         </p:nvSpPr>
@@ -8208,7 +9046,7 @@
       </p:sp>
       <p:sp>
         <p:nvSpPr>
-          <p:cNvPr id="58" name="TextBox 57"/>
+          <p:cNvPr id="69" name="TextBox 68"/>
           <p:cNvSpPr txBox="1"/>
           <p:nvPr/>
         </p:nvSpPr>
@@ -8243,7 +9081,7 @@
       </p:sp>
       <p:sp>
         <p:nvSpPr>
-          <p:cNvPr id="59" name="Rectangle 58"/>
+          <p:cNvPr id="70" name="Rectangle 69"/>
           <p:cNvSpPr/>
           <p:nvPr/>
         </p:nvSpPr>
@@ -8289,7 +9127,7 @@
       </p:sp>
       <p:sp>
         <p:nvSpPr>
-          <p:cNvPr id="60" name="Rectangle 59"/>
+          <p:cNvPr id="71" name="Rectangle 70"/>
           <p:cNvSpPr/>
           <p:nvPr/>
         </p:nvSpPr>
@@ -8333,7 +9171,7 @@
       </p:sp>
       <p:sp>
         <p:nvSpPr>
-          <p:cNvPr id="61" name="TextBox 60"/>
+          <p:cNvPr id="72" name="TextBox 71"/>
           <p:cNvSpPr txBox="1"/>
           <p:nvPr/>
         </p:nvSpPr>
@@ -8368,7 +9206,7 @@
       </p:sp>
       <p:sp>
         <p:nvSpPr>
-          <p:cNvPr id="62" name="Oval 61"/>
+          <p:cNvPr id="73" name="Oval 72"/>
           <p:cNvSpPr/>
           <p:nvPr/>
         </p:nvSpPr>
@@ -8411,7 +9249,7 @@
       </p:sp>
       <p:sp>
         <p:nvSpPr>
-          <p:cNvPr id="63" name="TextBox 62"/>
+          <p:cNvPr id="74" name="TextBox 73"/>
           <p:cNvSpPr txBox="1"/>
           <p:nvPr/>
         </p:nvSpPr>
@@ -8446,7 +9284,7 @@
       </p:sp>
       <p:sp>
         <p:nvSpPr>
-          <p:cNvPr id="64" name="Oval 63"/>
+          <p:cNvPr id="75" name="Oval 74"/>
           <p:cNvSpPr/>
           <p:nvPr/>
         </p:nvSpPr>
@@ -8489,7 +9327,7 @@
       </p:sp>
       <p:sp>
         <p:nvSpPr>
-          <p:cNvPr id="65" name="TextBox 64"/>
+          <p:cNvPr id="76" name="TextBox 75"/>
           <p:cNvSpPr txBox="1"/>
           <p:nvPr/>
         </p:nvSpPr>
@@ -8524,7 +9362,7 @@
       </p:sp>
       <p:sp>
         <p:nvSpPr>
-          <p:cNvPr id="66" name="Oval 65"/>
+          <p:cNvPr id="77" name="Oval 76"/>
           <p:cNvSpPr/>
           <p:nvPr/>
         </p:nvSpPr>
@@ -8567,7 +9405,7 @@
       </p:sp>
       <p:sp>
         <p:nvSpPr>
-          <p:cNvPr id="67" name="TextBox 66"/>
+          <p:cNvPr id="78" name="TextBox 77"/>
           <p:cNvSpPr txBox="1"/>
           <p:nvPr/>
         </p:nvSpPr>
@@ -8602,7 +9440,7 @@
       </p:sp>
       <p:sp>
         <p:nvSpPr>
-          <p:cNvPr id="68" name="Rectangle 67"/>
+          <p:cNvPr id="79" name="Rectangle 78"/>
           <p:cNvSpPr/>
           <p:nvPr/>
         </p:nvSpPr>
@@ -8646,7 +9484,7 @@
       </p:sp>
       <p:sp>
         <p:nvSpPr>
-          <p:cNvPr id="69" name="TextBox 68"/>
+          <p:cNvPr id="80" name="TextBox 79"/>
           <p:cNvSpPr txBox="1"/>
           <p:nvPr/>
         </p:nvSpPr>
@@ -8681,7 +9519,7 @@
       </p:sp>
       <p:sp>
         <p:nvSpPr>
-          <p:cNvPr id="70" name="TextBox 69"/>
+          <p:cNvPr id="81" name="TextBox 80"/>
           <p:cNvSpPr txBox="1"/>
           <p:nvPr/>
         </p:nvSpPr>
@@ -8716,7 +9554,7 @@
       </p:sp>
       <p:sp>
         <p:nvSpPr>
-          <p:cNvPr id="71" name="TextBox 70"/>
+          <p:cNvPr id="82" name="TextBox 81"/>
           <p:cNvSpPr txBox="1"/>
           <p:nvPr/>
         </p:nvSpPr>
@@ -8751,7 +9589,7 @@
       </p:sp>
       <p:sp>
         <p:nvSpPr>
-          <p:cNvPr id="72" name="TextBox 71"/>
+          <p:cNvPr id="83" name="TextBox 82"/>
           <p:cNvSpPr txBox="1"/>
           <p:nvPr/>
         </p:nvSpPr>
@@ -8786,7 +9624,7 @@
       </p:sp>
       <p:sp>
         <p:nvSpPr>
-          <p:cNvPr id="73" name="TextBox 72"/>
+          <p:cNvPr id="84" name="TextBox 83"/>
           <p:cNvSpPr txBox="1"/>
           <p:nvPr/>
         </p:nvSpPr>
@@ -8821,7 +9659,7 @@
       </p:sp>
       <p:sp>
         <p:nvSpPr>
-          <p:cNvPr id="74" name="TextBox 73"/>
+          <p:cNvPr id="85" name="TextBox 84"/>
           <p:cNvSpPr txBox="1"/>
           <p:nvPr/>
         </p:nvSpPr>
@@ -8856,7 +9694,7 @@
       </p:sp>
       <p:sp>
         <p:nvSpPr>
-          <p:cNvPr id="75" name="TextBox 74"/>
+          <p:cNvPr id="86" name="TextBox 85"/>
           <p:cNvSpPr txBox="1"/>
           <p:nvPr/>
         </p:nvSpPr>
@@ -8891,7 +9729,7 @@
       </p:sp>
       <p:sp>
         <p:nvSpPr>
-          <p:cNvPr id="76" name="Rectangle 75"/>
+          <p:cNvPr id="87" name="Rectangle 86"/>
           <p:cNvSpPr/>
           <p:nvPr/>
         </p:nvSpPr>
@@ -8935,7 +9773,7 @@
       </p:sp>
       <p:sp>
         <p:nvSpPr>
-          <p:cNvPr id="77" name="TextBox 76"/>
+          <p:cNvPr id="88" name="TextBox 87"/>
           <p:cNvSpPr txBox="1"/>
           <p:nvPr/>
         </p:nvSpPr>
@@ -8963,14 +9801,14 @@
                 </a:solidFill>
                 <a:latin typeface="Calibri"/>
               </a:rPr>
-              <a:t>Source: investing  |  Generated 13 May 2026  |  Analyst: Jabal Research</a:t>
-            </a:r>
-          </a:p>
-        </p:txBody>
-      </p:sp>
-      <p:sp>
-        <p:nvSpPr>
-          <p:cNvPr id="78" name="TextBox 77"/>
+              <a:t>Source: investing, marketscreener, yahoo  |  Generated 13 May 2026  |  Analyst: Jabal Research</a:t>
+            </a:r>
+          </a:p>
+        </p:txBody>
+      </p:sp>
+      <p:sp>
+        <p:nvSpPr>
+          <p:cNvPr id="89" name="TextBox 88"/>
           <p:cNvSpPr txBox="1"/>
           <p:nvPr/>
         </p:nvSpPr>
@@ -9005,7 +9843,7 @@
       </p:sp>
       <p:sp>
         <p:nvSpPr>
-          <p:cNvPr id="79" name="TextBox 78"/>
+          <p:cNvPr id="90" name="TextBox 89"/>
           <p:cNvSpPr txBox="1"/>
           <p:nvPr/>
         </p:nvSpPr>
@@ -9040,7 +9878,7 @@
       </p:sp>
       <p:sp>
         <p:nvSpPr>
-          <p:cNvPr id="80" name="TextBox 79"/>
+          <p:cNvPr id="91" name="TextBox 90"/>
           <p:cNvSpPr txBox="1"/>
           <p:nvPr/>
         </p:nvSpPr>
@@ -9419,46 +10257,29 @@
                 </a:solidFill>
                 <a:latin typeface="Calibri"/>
               </a:rPr>
-              <a:t>52-WEEK PRICE  ·  </a:t>
-            </a:r>
-          </a:p>
-        </p:txBody>
-      </p:sp>
-      <p:sp>
-        <p:nvSpPr>
-          <p:cNvPr id="11" name="TextBox 10"/>
-          <p:cNvSpPr txBox="1"/>
-          <p:nvPr/>
-        </p:nvSpPr>
-        <p:spPr>
-          <a:xfrm>
-            <a:off x="411480" y="2894076"/>
-            <a:ext cx="2926079" cy="274320"/>
-          </a:xfrm>
-          <a:prstGeom prst="rect">
-            <a:avLst/>
-          </a:prstGeom>
-          <a:noFill/>
-        </p:spPr>
-        <p:txBody>
-          <a:bodyPr wrap="square" lIns="0" rIns="0" tIns="0" bIns="0" anchor="t">
-            <a:spAutoFit/>
-          </a:bodyPr>
-          <a:lstStyle/>
-          <a:p>
-            <a:pPr algn="ctr"/>
-            <a:r>
-              <a:rPr sz="1000" b="0">
-                <a:solidFill>
-                  <a:srgbClr val="9A9A9A"/>
-                </a:solidFill>
-                <a:latin typeface="Calibri"/>
-              </a:rPr>
-              <a:t>No price history available</a:t>
-            </a:r>
-          </a:p>
-        </p:txBody>
-      </p:sp>
+              <a:t>52-WEEK PRICE  ·  INR</a:t>
+            </a:r>
+          </a:p>
+        </p:txBody>
+      </p:sp>
+      <p:graphicFrame>
+        <p:nvGraphicFramePr>
+          <p:cNvPr id="11" name="Chart 10"/>
+          <p:cNvGraphicFramePr>
+            <a:graphicFrameLocks noGrp="1"/>
+          </p:cNvGraphicFramePr>
+          <p:nvPr/>
+        </p:nvGraphicFramePr>
+        <p:xfrm>
+          <a:off x="411480" y="2029967"/>
+          <a:ext cx="2926079" cy="1920240"/>
+        </p:xfrm>
+        <a:graphic>
+          <a:graphicData uri="http://schemas.openxmlformats.org/drawingml/2006/chart">
+            <c:chart xmlns:c="http://schemas.openxmlformats.org/drawingml/2006/chart" r:id="rId2"/>
+          </a:graphicData>
+        </a:graphic>
+      </p:graphicFrame>
       <p:sp>
         <p:nvSpPr>
           <p:cNvPr id="12" name="TextBox 11"/>
@@ -9502,36 +10323,1467 @@
         </p:nvSpPr>
         <p:spPr>
           <a:xfrm>
-            <a:off x="3520440" y="2779776"/>
-            <a:ext cx="2926079" cy="274320"/>
-          </a:xfrm>
-          <a:prstGeom prst="rect">
-            <a:avLst/>
-          </a:prstGeom>
-          <a:noFill/>
-        </p:spPr>
-        <p:txBody>
-          <a:bodyPr wrap="square" lIns="0" rIns="0" tIns="0" bIns="0" anchor="t">
-            <a:spAutoFit/>
-          </a:bodyPr>
+            <a:off x="3520440" y="2066543"/>
+            <a:ext cx="502920" cy="182880"/>
+          </a:xfrm>
+          <a:prstGeom prst="rect">
+            <a:avLst/>
+          </a:prstGeom>
+          <a:noFill/>
+        </p:spPr>
+        <p:txBody>
+          <a:bodyPr wrap="square" lIns="0" rIns="0" tIns="0" bIns="0" anchor="t">
+            <a:spAutoFit/>
+          </a:bodyPr>
+          <a:lstStyle/>
+          <a:p>
+            <a:pPr algn="l"/>
+            <a:r>
+              <a:rPr sz="1000" b="0">
+                <a:solidFill>
+                  <a:srgbClr val="1A1A1A"/>
+                </a:solidFill>
+                <a:latin typeface="Calibri"/>
+              </a:rPr>
+              <a:t>FY2021</a:t>
+            </a:r>
+          </a:p>
+        </p:txBody>
+      </p:sp>
+      <p:sp>
+        <p:nvSpPr>
+          <p:cNvPr id="14" name="Rectangle 13"/>
+          <p:cNvSpPr/>
+          <p:nvPr/>
+        </p:nvSpPr>
+        <p:spPr>
+          <a:xfrm>
+            <a:off x="4023360" y="2121408"/>
+            <a:ext cx="1837518" cy="73152"/>
+          </a:xfrm>
+          <a:prstGeom prst="rect">
+            <a:avLst/>
+          </a:prstGeom>
+          <a:solidFill>
+            <a:srgbClr val="EFE8DC"/>
+          </a:solidFill>
+          <a:ln>
+            <a:noFill/>
+          </a:ln>
+        </p:spPr>
+        <p:style>
+          <a:lnRef idx="1">
+            <a:schemeClr val="accent1"/>
+          </a:lnRef>
+          <a:fillRef idx="3">
+            <a:schemeClr val="accent1"/>
+          </a:fillRef>
+          <a:effectRef idx="2">
+            <a:schemeClr val="accent1"/>
+          </a:effectRef>
+          <a:fontRef idx="minor">
+            <a:schemeClr val="lt1"/>
+          </a:fontRef>
+        </p:style>
+        <p:txBody>
+          <a:bodyPr rtlCol="0" anchor="ctr"/>
           <a:lstStyle/>
           <a:p>
             <a:pPr algn="ctr"/>
+          </a:p>
+        </p:txBody>
+      </p:sp>
+      <p:sp>
+        <p:nvSpPr>
+          <p:cNvPr id="15" name="Oval 14"/>
+          <p:cNvSpPr/>
+          <p:nvPr/>
+        </p:nvSpPr>
+        <p:spPr>
+          <a:xfrm>
+            <a:off x="5815158" y="2103120"/>
+            <a:ext cx="91440" cy="109728"/>
+          </a:xfrm>
+          <a:prstGeom prst="ellipse">
+            <a:avLst/>
+          </a:prstGeom>
+          <a:solidFill>
+            <a:srgbClr val="7E6849"/>
+          </a:solidFill>
+          <a:ln>
+            <a:noFill/>
+          </a:ln>
+        </p:spPr>
+        <p:style>
+          <a:lnRef idx="1">
+            <a:schemeClr val="accent1"/>
+          </a:lnRef>
+          <a:fillRef idx="3">
+            <a:schemeClr val="accent1"/>
+          </a:fillRef>
+          <a:effectRef idx="2">
+            <a:schemeClr val="accent1"/>
+          </a:effectRef>
+          <a:fontRef idx="minor">
+            <a:schemeClr val="lt1"/>
+          </a:fontRef>
+        </p:style>
+        <p:txBody>
+          <a:bodyPr rtlCol="0" anchor="ctr"/>
+          <a:lstStyle/>
+          <a:p>
+            <a:pPr algn="ctr"/>
+          </a:p>
+        </p:txBody>
+      </p:sp>
+      <p:sp>
+        <p:nvSpPr>
+          <p:cNvPr id="16" name="TextBox 15"/>
+          <p:cNvSpPr txBox="1"/>
+          <p:nvPr/>
+        </p:nvSpPr>
+        <p:spPr>
+          <a:xfrm>
+            <a:off x="5906598" y="2084831"/>
+            <a:ext cx="411480" cy="182880"/>
+          </a:xfrm>
+          <a:prstGeom prst="rect">
+            <a:avLst/>
+          </a:prstGeom>
+          <a:noFill/>
+        </p:spPr>
+        <p:txBody>
+          <a:bodyPr wrap="square" lIns="0" rIns="0" tIns="0" bIns="0" anchor="t">
+            <a:spAutoFit/>
+          </a:bodyPr>
+          <a:lstStyle/>
+          <a:p>
+            <a:pPr algn="l"/>
             <a:r>
               <a:rPr sz="1000" b="0">
                 <a:solidFill>
+                  <a:srgbClr val="1A1A1A"/>
+                </a:solidFill>
+                <a:latin typeface="Calibri"/>
+              </a:rPr>
+              <a:t>24.6x</a:t>
+            </a:r>
+          </a:p>
+        </p:txBody>
+      </p:sp>
+      <p:sp>
+        <p:nvSpPr>
+          <p:cNvPr id="17" name="TextBox 16"/>
+          <p:cNvSpPr txBox="1"/>
+          <p:nvPr/>
+        </p:nvSpPr>
+        <p:spPr>
+          <a:xfrm>
+            <a:off x="3520440" y="2340863"/>
+            <a:ext cx="502920" cy="182880"/>
+          </a:xfrm>
+          <a:prstGeom prst="rect">
+            <a:avLst/>
+          </a:prstGeom>
+          <a:noFill/>
+        </p:spPr>
+        <p:txBody>
+          <a:bodyPr wrap="square" lIns="0" rIns="0" tIns="0" bIns="0" anchor="t">
+            <a:spAutoFit/>
+          </a:bodyPr>
+          <a:lstStyle/>
+          <a:p>
+            <a:pPr algn="l"/>
+            <a:r>
+              <a:rPr sz="1000" b="0">
+                <a:solidFill>
+                  <a:srgbClr val="1A1A1A"/>
+                </a:solidFill>
+                <a:latin typeface="Calibri"/>
+              </a:rPr>
+              <a:t>FY2022</a:t>
+            </a:r>
+          </a:p>
+        </p:txBody>
+      </p:sp>
+      <p:sp>
+        <p:nvSpPr>
+          <p:cNvPr id="18" name="Rectangle 17"/>
+          <p:cNvSpPr/>
+          <p:nvPr/>
+        </p:nvSpPr>
+        <p:spPr>
+          <a:xfrm>
+            <a:off x="4023360" y="2395727"/>
+            <a:ext cx="1502693" cy="73152"/>
+          </a:xfrm>
+          <a:prstGeom prst="rect">
+            <a:avLst/>
+          </a:prstGeom>
+          <a:solidFill>
+            <a:srgbClr val="EFE8DC"/>
+          </a:solidFill>
+          <a:ln>
+            <a:noFill/>
+          </a:ln>
+        </p:spPr>
+        <p:style>
+          <a:lnRef idx="1">
+            <a:schemeClr val="accent1"/>
+          </a:lnRef>
+          <a:fillRef idx="3">
+            <a:schemeClr val="accent1"/>
+          </a:fillRef>
+          <a:effectRef idx="2">
+            <a:schemeClr val="accent1"/>
+          </a:effectRef>
+          <a:fontRef idx="minor">
+            <a:schemeClr val="lt1"/>
+          </a:fontRef>
+        </p:style>
+        <p:txBody>
+          <a:bodyPr rtlCol="0" anchor="ctr"/>
+          <a:lstStyle/>
+          <a:p>
+            <a:pPr algn="ctr"/>
+          </a:p>
+        </p:txBody>
+      </p:sp>
+      <p:sp>
+        <p:nvSpPr>
+          <p:cNvPr id="19" name="Oval 18"/>
+          <p:cNvSpPr/>
+          <p:nvPr/>
+        </p:nvSpPr>
+        <p:spPr>
+          <a:xfrm>
+            <a:off x="5480333" y="2377439"/>
+            <a:ext cx="91440" cy="109728"/>
+          </a:xfrm>
+          <a:prstGeom prst="ellipse">
+            <a:avLst/>
+          </a:prstGeom>
+          <a:solidFill>
+            <a:srgbClr val="7E6849"/>
+          </a:solidFill>
+          <a:ln>
+            <a:noFill/>
+          </a:ln>
+        </p:spPr>
+        <p:style>
+          <a:lnRef idx="1">
+            <a:schemeClr val="accent1"/>
+          </a:lnRef>
+          <a:fillRef idx="3">
+            <a:schemeClr val="accent1"/>
+          </a:fillRef>
+          <a:effectRef idx="2">
+            <a:schemeClr val="accent1"/>
+          </a:effectRef>
+          <a:fontRef idx="minor">
+            <a:schemeClr val="lt1"/>
+          </a:fontRef>
+        </p:style>
+        <p:txBody>
+          <a:bodyPr rtlCol="0" anchor="ctr"/>
+          <a:lstStyle/>
+          <a:p>
+            <a:pPr algn="ctr"/>
+          </a:p>
+        </p:txBody>
+      </p:sp>
+      <p:sp>
+        <p:nvSpPr>
+          <p:cNvPr id="20" name="TextBox 19"/>
+          <p:cNvSpPr txBox="1"/>
+          <p:nvPr/>
+        </p:nvSpPr>
+        <p:spPr>
+          <a:xfrm>
+            <a:off x="5571773" y="2359151"/>
+            <a:ext cx="411480" cy="182880"/>
+          </a:xfrm>
+          <a:prstGeom prst="rect">
+            <a:avLst/>
+          </a:prstGeom>
+          <a:noFill/>
+        </p:spPr>
+        <p:txBody>
+          <a:bodyPr wrap="square" lIns="0" rIns="0" tIns="0" bIns="0" anchor="t">
+            <a:spAutoFit/>
+          </a:bodyPr>
+          <a:lstStyle/>
+          <a:p>
+            <a:pPr algn="l"/>
+            <a:r>
+              <a:rPr sz="1000" b="0">
+                <a:solidFill>
+                  <a:srgbClr val="1A1A1A"/>
+                </a:solidFill>
+                <a:latin typeface="Calibri"/>
+              </a:rPr>
+              <a:t>22.1x</a:t>
+            </a:r>
+          </a:p>
+        </p:txBody>
+      </p:sp>
+      <p:sp>
+        <p:nvSpPr>
+          <p:cNvPr id="21" name="TextBox 20"/>
+          <p:cNvSpPr txBox="1"/>
+          <p:nvPr/>
+        </p:nvSpPr>
+        <p:spPr>
+          <a:xfrm>
+            <a:off x="3520440" y="2615184"/>
+            <a:ext cx="502920" cy="182880"/>
+          </a:xfrm>
+          <a:prstGeom prst="rect">
+            <a:avLst/>
+          </a:prstGeom>
+          <a:noFill/>
+        </p:spPr>
+        <p:txBody>
+          <a:bodyPr wrap="square" lIns="0" rIns="0" tIns="0" bIns="0" anchor="t">
+            <a:spAutoFit/>
+          </a:bodyPr>
+          <a:lstStyle/>
+          <a:p>
+            <a:pPr algn="l"/>
+            <a:r>
+              <a:rPr sz="1000" b="0">
+                <a:solidFill>
+                  <a:srgbClr val="1A1A1A"/>
+                </a:solidFill>
+                <a:latin typeface="Calibri"/>
+              </a:rPr>
+              <a:t>FY2023</a:t>
+            </a:r>
+          </a:p>
+        </p:txBody>
+      </p:sp>
+      <p:sp>
+        <p:nvSpPr>
+          <p:cNvPr id="22" name="Rectangle 21"/>
+          <p:cNvSpPr/>
+          <p:nvPr/>
+        </p:nvSpPr>
+        <p:spPr>
+          <a:xfrm>
+            <a:off x="4023360" y="2670048"/>
+            <a:ext cx="1154475" cy="73152"/>
+          </a:xfrm>
+          <a:prstGeom prst="rect">
+            <a:avLst/>
+          </a:prstGeom>
+          <a:solidFill>
+            <a:srgbClr val="EFE8DC"/>
+          </a:solidFill>
+          <a:ln>
+            <a:noFill/>
+          </a:ln>
+        </p:spPr>
+        <p:style>
+          <a:lnRef idx="1">
+            <a:schemeClr val="accent1"/>
+          </a:lnRef>
+          <a:fillRef idx="3">
+            <a:schemeClr val="accent1"/>
+          </a:fillRef>
+          <a:effectRef idx="2">
+            <a:schemeClr val="accent1"/>
+          </a:effectRef>
+          <a:fontRef idx="minor">
+            <a:schemeClr val="lt1"/>
+          </a:fontRef>
+        </p:style>
+        <p:txBody>
+          <a:bodyPr rtlCol="0" anchor="ctr"/>
+          <a:lstStyle/>
+          <a:p>
+            <a:pPr algn="ctr"/>
+          </a:p>
+        </p:txBody>
+      </p:sp>
+      <p:sp>
+        <p:nvSpPr>
+          <p:cNvPr id="23" name="Oval 22"/>
+          <p:cNvSpPr/>
+          <p:nvPr/>
+        </p:nvSpPr>
+        <p:spPr>
+          <a:xfrm>
+            <a:off x="5132115" y="2651760"/>
+            <a:ext cx="91440" cy="109728"/>
+          </a:xfrm>
+          <a:prstGeom prst="ellipse">
+            <a:avLst/>
+          </a:prstGeom>
+          <a:solidFill>
+            <a:srgbClr val="7E6849"/>
+          </a:solidFill>
+          <a:ln>
+            <a:noFill/>
+          </a:ln>
+        </p:spPr>
+        <p:style>
+          <a:lnRef idx="1">
+            <a:schemeClr val="accent1"/>
+          </a:lnRef>
+          <a:fillRef idx="3">
+            <a:schemeClr val="accent1"/>
+          </a:fillRef>
+          <a:effectRef idx="2">
+            <a:schemeClr val="accent1"/>
+          </a:effectRef>
+          <a:fontRef idx="minor">
+            <a:schemeClr val="lt1"/>
+          </a:fontRef>
+        </p:style>
+        <p:txBody>
+          <a:bodyPr rtlCol="0" anchor="ctr"/>
+          <a:lstStyle/>
+          <a:p>
+            <a:pPr algn="ctr"/>
+          </a:p>
+        </p:txBody>
+      </p:sp>
+      <p:sp>
+        <p:nvSpPr>
+          <p:cNvPr id="24" name="TextBox 23"/>
+          <p:cNvSpPr txBox="1"/>
+          <p:nvPr/>
+        </p:nvSpPr>
+        <p:spPr>
+          <a:xfrm>
+            <a:off x="5223555" y="2633472"/>
+            <a:ext cx="411480" cy="182880"/>
+          </a:xfrm>
+          <a:prstGeom prst="rect">
+            <a:avLst/>
+          </a:prstGeom>
+          <a:noFill/>
+        </p:spPr>
+        <p:txBody>
+          <a:bodyPr wrap="square" lIns="0" rIns="0" tIns="0" bIns="0" anchor="t">
+            <a:spAutoFit/>
+          </a:bodyPr>
+          <a:lstStyle/>
+          <a:p>
+            <a:pPr algn="l"/>
+            <a:r>
+              <a:rPr sz="1000" b="0">
+                <a:solidFill>
+                  <a:srgbClr val="1A1A1A"/>
+                </a:solidFill>
+                <a:latin typeface="Calibri"/>
+              </a:rPr>
+              <a:t>19.5x</a:t>
+            </a:r>
+          </a:p>
+        </p:txBody>
+      </p:sp>
+      <p:sp>
+        <p:nvSpPr>
+          <p:cNvPr id="25" name="TextBox 24"/>
+          <p:cNvSpPr txBox="1"/>
+          <p:nvPr/>
+        </p:nvSpPr>
+        <p:spPr>
+          <a:xfrm>
+            <a:off x="3520440" y="2889503"/>
+            <a:ext cx="502920" cy="182880"/>
+          </a:xfrm>
+          <a:prstGeom prst="rect">
+            <a:avLst/>
+          </a:prstGeom>
+          <a:noFill/>
+        </p:spPr>
+        <p:txBody>
+          <a:bodyPr wrap="square" lIns="0" rIns="0" tIns="0" bIns="0" anchor="t">
+            <a:spAutoFit/>
+          </a:bodyPr>
+          <a:lstStyle/>
+          <a:p>
+            <a:pPr algn="l"/>
+            <a:r>
+              <a:rPr sz="1000" b="0">
+                <a:solidFill>
+                  <a:srgbClr val="1A1A1A"/>
+                </a:solidFill>
+                <a:latin typeface="Calibri"/>
+              </a:rPr>
+              <a:t>FY2024</a:t>
+            </a:r>
+          </a:p>
+        </p:txBody>
+      </p:sp>
+      <p:sp>
+        <p:nvSpPr>
+          <p:cNvPr id="26" name="Rectangle 25"/>
+          <p:cNvSpPr/>
+          <p:nvPr/>
+        </p:nvSpPr>
+        <p:spPr>
+          <a:xfrm>
+            <a:off x="4023360" y="2944368"/>
+            <a:ext cx="1100903" cy="73152"/>
+          </a:xfrm>
+          <a:prstGeom prst="rect">
+            <a:avLst/>
+          </a:prstGeom>
+          <a:solidFill>
+            <a:srgbClr val="EFE8DC"/>
+          </a:solidFill>
+          <a:ln>
+            <a:noFill/>
+          </a:ln>
+        </p:spPr>
+        <p:style>
+          <a:lnRef idx="1">
+            <a:schemeClr val="accent1"/>
+          </a:lnRef>
+          <a:fillRef idx="3">
+            <a:schemeClr val="accent1"/>
+          </a:fillRef>
+          <a:effectRef idx="2">
+            <a:schemeClr val="accent1"/>
+          </a:effectRef>
+          <a:fontRef idx="minor">
+            <a:schemeClr val="lt1"/>
+          </a:fontRef>
+        </p:style>
+        <p:txBody>
+          <a:bodyPr rtlCol="0" anchor="ctr"/>
+          <a:lstStyle/>
+          <a:p>
+            <a:pPr algn="ctr"/>
+          </a:p>
+        </p:txBody>
+      </p:sp>
+      <p:sp>
+        <p:nvSpPr>
+          <p:cNvPr id="27" name="Oval 26"/>
+          <p:cNvSpPr/>
+          <p:nvPr/>
+        </p:nvSpPr>
+        <p:spPr>
+          <a:xfrm>
+            <a:off x="5078543" y="2926079"/>
+            <a:ext cx="91440" cy="109728"/>
+          </a:xfrm>
+          <a:prstGeom prst="ellipse">
+            <a:avLst/>
+          </a:prstGeom>
+          <a:solidFill>
+            <a:srgbClr val="7E6849"/>
+          </a:solidFill>
+          <a:ln>
+            <a:noFill/>
+          </a:ln>
+        </p:spPr>
+        <p:style>
+          <a:lnRef idx="1">
+            <a:schemeClr val="accent1"/>
+          </a:lnRef>
+          <a:fillRef idx="3">
+            <a:schemeClr val="accent1"/>
+          </a:fillRef>
+          <a:effectRef idx="2">
+            <a:schemeClr val="accent1"/>
+          </a:effectRef>
+          <a:fontRef idx="minor">
+            <a:schemeClr val="lt1"/>
+          </a:fontRef>
+        </p:style>
+        <p:txBody>
+          <a:bodyPr rtlCol="0" anchor="ctr"/>
+          <a:lstStyle/>
+          <a:p>
+            <a:pPr algn="ctr"/>
+          </a:p>
+        </p:txBody>
+      </p:sp>
+      <p:sp>
+        <p:nvSpPr>
+          <p:cNvPr id="28" name="TextBox 27"/>
+          <p:cNvSpPr txBox="1"/>
+          <p:nvPr/>
+        </p:nvSpPr>
+        <p:spPr>
+          <a:xfrm>
+            <a:off x="5169983" y="2907791"/>
+            <a:ext cx="411480" cy="182880"/>
+          </a:xfrm>
+          <a:prstGeom prst="rect">
+            <a:avLst/>
+          </a:prstGeom>
+          <a:noFill/>
+        </p:spPr>
+        <p:txBody>
+          <a:bodyPr wrap="square" lIns="0" rIns="0" tIns="0" bIns="0" anchor="t">
+            <a:spAutoFit/>
+          </a:bodyPr>
+          <a:lstStyle/>
+          <a:p>
+            <a:pPr algn="l"/>
+            <a:r>
+              <a:rPr sz="1000" b="0">
+                <a:solidFill>
+                  <a:srgbClr val="1A1A1A"/>
+                </a:solidFill>
+                <a:latin typeface="Calibri"/>
+              </a:rPr>
+              <a:t>19.1x</a:t>
+            </a:r>
+          </a:p>
+        </p:txBody>
+      </p:sp>
+      <p:sp>
+        <p:nvSpPr>
+          <p:cNvPr id="29" name="TextBox 28"/>
+          <p:cNvSpPr txBox="1"/>
+          <p:nvPr/>
+        </p:nvSpPr>
+        <p:spPr>
+          <a:xfrm>
+            <a:off x="3520440" y="3163824"/>
+            <a:ext cx="502920" cy="182880"/>
+          </a:xfrm>
+          <a:prstGeom prst="rect">
+            <a:avLst/>
+          </a:prstGeom>
+          <a:noFill/>
+        </p:spPr>
+        <p:txBody>
+          <a:bodyPr wrap="square" lIns="0" rIns="0" tIns="0" bIns="0" anchor="t">
+            <a:spAutoFit/>
+          </a:bodyPr>
+          <a:lstStyle/>
+          <a:p>
+            <a:pPr algn="l"/>
+            <a:r>
+              <a:rPr sz="1000" b="0">
+                <a:solidFill>
+                  <a:srgbClr val="1A1A1A"/>
+                </a:solidFill>
+                <a:latin typeface="Calibri"/>
+              </a:rPr>
+              <a:t>FY2025</a:t>
+            </a:r>
+          </a:p>
+        </p:txBody>
+      </p:sp>
+      <p:sp>
+        <p:nvSpPr>
+          <p:cNvPr id="30" name="Rectangle 29"/>
+          <p:cNvSpPr/>
+          <p:nvPr/>
+        </p:nvSpPr>
+        <p:spPr>
+          <a:xfrm>
+            <a:off x="4023360" y="3218688"/>
+            <a:ext cx="1288405" cy="73152"/>
+          </a:xfrm>
+          <a:prstGeom prst="rect">
+            <a:avLst/>
+          </a:prstGeom>
+          <a:solidFill>
+            <a:srgbClr val="EFE8DC"/>
+          </a:solidFill>
+          <a:ln>
+            <a:noFill/>
+          </a:ln>
+        </p:spPr>
+        <p:style>
+          <a:lnRef idx="1">
+            <a:schemeClr val="accent1"/>
+          </a:lnRef>
+          <a:fillRef idx="3">
+            <a:schemeClr val="accent1"/>
+          </a:fillRef>
+          <a:effectRef idx="2">
+            <a:schemeClr val="accent1"/>
+          </a:effectRef>
+          <a:fontRef idx="minor">
+            <a:schemeClr val="lt1"/>
+          </a:fontRef>
+        </p:style>
+        <p:txBody>
+          <a:bodyPr rtlCol="0" anchor="ctr"/>
+          <a:lstStyle/>
+          <a:p>
+            <a:pPr algn="ctr"/>
+          </a:p>
+        </p:txBody>
+      </p:sp>
+      <p:sp>
+        <p:nvSpPr>
+          <p:cNvPr id="31" name="Oval 30"/>
+          <p:cNvSpPr/>
+          <p:nvPr/>
+        </p:nvSpPr>
+        <p:spPr>
+          <a:xfrm>
+            <a:off x="5266045" y="3200400"/>
+            <a:ext cx="91440" cy="109728"/>
+          </a:xfrm>
+          <a:prstGeom prst="ellipse">
+            <a:avLst/>
+          </a:prstGeom>
+          <a:solidFill>
+            <a:srgbClr val="7E6849"/>
+          </a:solidFill>
+          <a:ln>
+            <a:noFill/>
+          </a:ln>
+        </p:spPr>
+        <p:style>
+          <a:lnRef idx="1">
+            <a:schemeClr val="accent1"/>
+          </a:lnRef>
+          <a:fillRef idx="3">
+            <a:schemeClr val="accent1"/>
+          </a:fillRef>
+          <a:effectRef idx="2">
+            <a:schemeClr val="accent1"/>
+          </a:effectRef>
+          <a:fontRef idx="minor">
+            <a:schemeClr val="lt1"/>
+          </a:fontRef>
+        </p:style>
+        <p:txBody>
+          <a:bodyPr rtlCol="0" anchor="ctr"/>
+          <a:lstStyle/>
+          <a:p>
+            <a:pPr algn="ctr"/>
+          </a:p>
+        </p:txBody>
+      </p:sp>
+      <p:sp>
+        <p:nvSpPr>
+          <p:cNvPr id="32" name="TextBox 31"/>
+          <p:cNvSpPr txBox="1"/>
+          <p:nvPr/>
+        </p:nvSpPr>
+        <p:spPr>
+          <a:xfrm>
+            <a:off x="5357485" y="3182112"/>
+            <a:ext cx="411480" cy="182880"/>
+          </a:xfrm>
+          <a:prstGeom prst="rect">
+            <a:avLst/>
+          </a:prstGeom>
+          <a:noFill/>
+        </p:spPr>
+        <p:txBody>
+          <a:bodyPr wrap="square" lIns="0" rIns="0" tIns="0" bIns="0" anchor="t">
+            <a:spAutoFit/>
+          </a:bodyPr>
+          <a:lstStyle/>
+          <a:p>
+            <a:pPr algn="l"/>
+            <a:r>
+              <a:rPr sz="1000" b="0">
+                <a:solidFill>
+                  <a:srgbClr val="1A1A1A"/>
+                </a:solidFill>
+                <a:latin typeface="Calibri"/>
+              </a:rPr>
+              <a:t>20.5x</a:t>
+            </a:r>
+          </a:p>
+        </p:txBody>
+      </p:sp>
+      <p:sp>
+        <p:nvSpPr>
+          <p:cNvPr id="33" name="TextBox 32"/>
+          <p:cNvSpPr txBox="1"/>
+          <p:nvPr/>
+        </p:nvSpPr>
+        <p:spPr>
+          <a:xfrm>
+            <a:off x="3520440" y="3438144"/>
+            <a:ext cx="502920" cy="182880"/>
+          </a:xfrm>
+          <a:prstGeom prst="rect">
+            <a:avLst/>
+          </a:prstGeom>
+          <a:noFill/>
+        </p:spPr>
+        <p:txBody>
+          <a:bodyPr wrap="square" lIns="0" rIns="0" tIns="0" bIns="0" anchor="t">
+            <a:spAutoFit/>
+          </a:bodyPr>
+          <a:lstStyle/>
+          <a:p>
+            <a:pPr algn="l"/>
+            <a:r>
+              <a:rPr sz="1000" b="0">
+                <a:solidFill>
+                  <a:srgbClr val="1A1A1A"/>
+                </a:solidFill>
+                <a:latin typeface="Calibri"/>
+              </a:rPr>
+              <a:t>FY2026</a:t>
+            </a:r>
+          </a:p>
+        </p:txBody>
+      </p:sp>
+      <p:sp>
+        <p:nvSpPr>
+          <p:cNvPr id="34" name="Rectangle 33"/>
+          <p:cNvSpPr/>
+          <p:nvPr/>
+        </p:nvSpPr>
+        <p:spPr>
+          <a:xfrm>
+            <a:off x="4023360" y="3493008"/>
+            <a:ext cx="873223" cy="73152"/>
+          </a:xfrm>
+          <a:prstGeom prst="rect">
+            <a:avLst/>
+          </a:prstGeom>
+          <a:solidFill>
+            <a:srgbClr val="EFE8DC"/>
+          </a:solidFill>
+          <a:ln>
+            <a:noFill/>
+          </a:ln>
+        </p:spPr>
+        <p:style>
+          <a:lnRef idx="1">
+            <a:schemeClr val="accent1"/>
+          </a:lnRef>
+          <a:fillRef idx="3">
+            <a:schemeClr val="accent1"/>
+          </a:fillRef>
+          <a:effectRef idx="2">
+            <a:schemeClr val="accent1"/>
+          </a:effectRef>
+          <a:fontRef idx="minor">
+            <a:schemeClr val="lt1"/>
+          </a:fontRef>
+        </p:style>
+        <p:txBody>
+          <a:bodyPr rtlCol="0" anchor="ctr"/>
+          <a:lstStyle/>
+          <a:p>
+            <a:pPr algn="ctr"/>
+          </a:p>
+        </p:txBody>
+      </p:sp>
+      <p:sp>
+        <p:nvSpPr>
+          <p:cNvPr id="35" name="Oval 34"/>
+          <p:cNvSpPr/>
+          <p:nvPr/>
+        </p:nvSpPr>
+        <p:spPr>
+          <a:xfrm>
+            <a:off x="4850863" y="3474720"/>
+            <a:ext cx="91440" cy="109728"/>
+          </a:xfrm>
+          <a:prstGeom prst="ellipse">
+            <a:avLst/>
+          </a:prstGeom>
+          <a:solidFill>
+            <a:srgbClr val="7E6849"/>
+          </a:solidFill>
+          <a:ln>
+            <a:noFill/>
+          </a:ln>
+        </p:spPr>
+        <p:style>
+          <a:lnRef idx="1">
+            <a:schemeClr val="accent1"/>
+          </a:lnRef>
+          <a:fillRef idx="3">
+            <a:schemeClr val="accent1"/>
+          </a:fillRef>
+          <a:effectRef idx="2">
+            <a:schemeClr val="accent1"/>
+          </a:effectRef>
+          <a:fontRef idx="minor">
+            <a:schemeClr val="lt1"/>
+          </a:fontRef>
+        </p:style>
+        <p:txBody>
+          <a:bodyPr rtlCol="0" anchor="ctr"/>
+          <a:lstStyle/>
+          <a:p>
+            <a:pPr algn="ctr"/>
+          </a:p>
+        </p:txBody>
+      </p:sp>
+      <p:sp>
+        <p:nvSpPr>
+          <p:cNvPr id="36" name="TextBox 35"/>
+          <p:cNvSpPr txBox="1"/>
+          <p:nvPr/>
+        </p:nvSpPr>
+        <p:spPr>
+          <a:xfrm>
+            <a:off x="4942303" y="3456432"/>
+            <a:ext cx="411480" cy="182880"/>
+          </a:xfrm>
+          <a:prstGeom prst="rect">
+            <a:avLst/>
+          </a:prstGeom>
+          <a:noFill/>
+        </p:spPr>
+        <p:txBody>
+          <a:bodyPr wrap="square" lIns="0" rIns="0" tIns="0" bIns="0" anchor="t">
+            <a:spAutoFit/>
+          </a:bodyPr>
+          <a:lstStyle/>
+          <a:p>
+            <a:pPr algn="l"/>
+            <a:r>
+              <a:rPr sz="1000" b="0">
+                <a:solidFill>
+                  <a:srgbClr val="1A1A1A"/>
+                </a:solidFill>
+                <a:latin typeface="Calibri"/>
+              </a:rPr>
+              <a:t>17.4x</a:t>
+            </a:r>
+          </a:p>
+        </p:txBody>
+      </p:sp>
+      <p:sp>
+        <p:nvSpPr>
+          <p:cNvPr id="37" name="TextBox 36"/>
+          <p:cNvSpPr txBox="1"/>
+          <p:nvPr/>
+        </p:nvSpPr>
+        <p:spPr>
+          <a:xfrm>
+            <a:off x="3520440" y="3712463"/>
+            <a:ext cx="502920" cy="182880"/>
+          </a:xfrm>
+          <a:prstGeom prst="rect">
+            <a:avLst/>
+          </a:prstGeom>
+          <a:noFill/>
+        </p:spPr>
+        <p:txBody>
+          <a:bodyPr wrap="square" lIns="0" rIns="0" tIns="0" bIns="0" anchor="t">
+            <a:spAutoFit/>
+          </a:bodyPr>
+          <a:lstStyle/>
+          <a:p>
+            <a:pPr algn="l"/>
+            <a:r>
+              <a:rPr sz="1000" b="0">
+                <a:solidFill>
+                  <a:srgbClr val="1A1A1A"/>
+                </a:solidFill>
+                <a:latin typeface="Calibri"/>
+              </a:rPr>
+              <a:t>FY2027</a:t>
+            </a:r>
+          </a:p>
+        </p:txBody>
+      </p:sp>
+      <p:sp>
+        <p:nvSpPr>
+          <p:cNvPr id="38" name="Rectangle 37"/>
+          <p:cNvSpPr/>
+          <p:nvPr/>
+        </p:nvSpPr>
+        <p:spPr>
+          <a:xfrm>
+            <a:off x="4023360" y="3767327"/>
+            <a:ext cx="645542" cy="73152"/>
+          </a:xfrm>
+          <a:prstGeom prst="rect">
+            <a:avLst/>
+          </a:prstGeom>
+          <a:solidFill>
+            <a:srgbClr val="EFE8DC"/>
+          </a:solidFill>
+          <a:ln>
+            <a:noFill/>
+          </a:ln>
+        </p:spPr>
+        <p:style>
+          <a:lnRef idx="1">
+            <a:schemeClr val="accent1"/>
+          </a:lnRef>
+          <a:fillRef idx="3">
+            <a:schemeClr val="accent1"/>
+          </a:fillRef>
+          <a:effectRef idx="2">
+            <a:schemeClr val="accent1"/>
+          </a:effectRef>
+          <a:fontRef idx="minor">
+            <a:schemeClr val="lt1"/>
+          </a:fontRef>
+        </p:style>
+        <p:txBody>
+          <a:bodyPr rtlCol="0" anchor="ctr"/>
+          <a:lstStyle/>
+          <a:p>
+            <a:pPr algn="ctr"/>
+          </a:p>
+        </p:txBody>
+      </p:sp>
+      <p:sp>
+        <p:nvSpPr>
+          <p:cNvPr id="39" name="Oval 38"/>
+          <p:cNvSpPr/>
+          <p:nvPr/>
+        </p:nvSpPr>
+        <p:spPr>
+          <a:xfrm>
+            <a:off x="4623182" y="3749039"/>
+            <a:ext cx="91440" cy="109728"/>
+          </a:xfrm>
+          <a:prstGeom prst="ellipse">
+            <a:avLst/>
+          </a:prstGeom>
+          <a:solidFill>
+            <a:srgbClr val="7E6849"/>
+          </a:solidFill>
+          <a:ln>
+            <a:noFill/>
+          </a:ln>
+        </p:spPr>
+        <p:style>
+          <a:lnRef idx="1">
+            <a:schemeClr val="accent1"/>
+          </a:lnRef>
+          <a:fillRef idx="3">
+            <a:schemeClr val="accent1"/>
+          </a:fillRef>
+          <a:effectRef idx="2">
+            <a:schemeClr val="accent1"/>
+          </a:effectRef>
+          <a:fontRef idx="minor">
+            <a:schemeClr val="lt1"/>
+          </a:fontRef>
+        </p:style>
+        <p:txBody>
+          <a:bodyPr rtlCol="0" anchor="ctr"/>
+          <a:lstStyle/>
+          <a:p>
+            <a:pPr algn="ctr"/>
+          </a:p>
+        </p:txBody>
+      </p:sp>
+      <p:sp>
+        <p:nvSpPr>
+          <p:cNvPr id="40" name="TextBox 39"/>
+          <p:cNvSpPr txBox="1"/>
+          <p:nvPr/>
+        </p:nvSpPr>
+        <p:spPr>
+          <a:xfrm>
+            <a:off x="4714622" y="3730751"/>
+            <a:ext cx="411480" cy="182880"/>
+          </a:xfrm>
+          <a:prstGeom prst="rect">
+            <a:avLst/>
+          </a:prstGeom>
+          <a:noFill/>
+        </p:spPr>
+        <p:txBody>
+          <a:bodyPr wrap="square" lIns="0" rIns="0" tIns="0" bIns="0" anchor="t">
+            <a:spAutoFit/>
+          </a:bodyPr>
+          <a:lstStyle/>
+          <a:p>
+            <a:pPr algn="l"/>
+            <a:r>
+              <a:rPr sz="1000" b="0">
+                <a:solidFill>
+                  <a:srgbClr val="1A1A1A"/>
+                </a:solidFill>
+                <a:latin typeface="Calibri"/>
+              </a:rPr>
+              <a:t>15.7x</a:t>
+            </a:r>
+          </a:p>
+        </p:txBody>
+      </p:sp>
+      <p:sp>
+        <p:nvSpPr>
+          <p:cNvPr id="41" name="TextBox 40"/>
+          <p:cNvSpPr txBox="1"/>
+          <p:nvPr/>
+        </p:nvSpPr>
+        <p:spPr>
+          <a:xfrm>
+            <a:off x="3520440" y="3986783"/>
+            <a:ext cx="502920" cy="182880"/>
+          </a:xfrm>
+          <a:prstGeom prst="rect">
+            <a:avLst/>
+          </a:prstGeom>
+          <a:noFill/>
+        </p:spPr>
+        <p:txBody>
+          <a:bodyPr wrap="square" lIns="0" rIns="0" tIns="0" bIns="0" anchor="t">
+            <a:spAutoFit/>
+          </a:bodyPr>
+          <a:lstStyle/>
+          <a:p>
+            <a:pPr algn="l"/>
+            <a:r>
+              <a:rPr sz="1000" b="0">
+                <a:solidFill>
+                  <a:srgbClr val="1A1A1A"/>
+                </a:solidFill>
+                <a:latin typeface="Calibri"/>
+              </a:rPr>
+              <a:t>FY2028</a:t>
+            </a:r>
+          </a:p>
+        </p:txBody>
+      </p:sp>
+      <p:sp>
+        <p:nvSpPr>
+          <p:cNvPr id="42" name="Rectangle 41"/>
+          <p:cNvSpPr/>
+          <p:nvPr/>
+        </p:nvSpPr>
+        <p:spPr>
+          <a:xfrm>
+            <a:off x="4023360" y="4041647"/>
+            <a:ext cx="364289" cy="73152"/>
+          </a:xfrm>
+          <a:prstGeom prst="rect">
+            <a:avLst/>
+          </a:prstGeom>
+          <a:solidFill>
+            <a:srgbClr val="EFE8DC"/>
+          </a:solidFill>
+          <a:ln>
+            <a:noFill/>
+          </a:ln>
+        </p:spPr>
+        <p:style>
+          <a:lnRef idx="1">
+            <a:schemeClr val="accent1"/>
+          </a:lnRef>
+          <a:fillRef idx="3">
+            <a:schemeClr val="accent1"/>
+          </a:fillRef>
+          <a:effectRef idx="2">
+            <a:schemeClr val="accent1"/>
+          </a:effectRef>
+          <a:fontRef idx="minor">
+            <a:schemeClr val="lt1"/>
+          </a:fontRef>
+        </p:style>
+        <p:txBody>
+          <a:bodyPr rtlCol="0" anchor="ctr"/>
+          <a:lstStyle/>
+          <a:p>
+            <a:pPr algn="ctr"/>
+          </a:p>
+        </p:txBody>
+      </p:sp>
+      <p:sp>
+        <p:nvSpPr>
+          <p:cNvPr id="43" name="Oval 42"/>
+          <p:cNvSpPr/>
+          <p:nvPr/>
+        </p:nvSpPr>
+        <p:spPr>
+          <a:xfrm>
+            <a:off x="4341929" y="4023359"/>
+            <a:ext cx="91440" cy="109728"/>
+          </a:xfrm>
+          <a:prstGeom prst="ellipse">
+            <a:avLst/>
+          </a:prstGeom>
+          <a:solidFill>
+            <a:srgbClr val="7E6849"/>
+          </a:solidFill>
+          <a:ln>
+            <a:noFill/>
+          </a:ln>
+        </p:spPr>
+        <p:style>
+          <a:lnRef idx="1">
+            <a:schemeClr val="accent1"/>
+          </a:lnRef>
+          <a:fillRef idx="3">
+            <a:schemeClr val="accent1"/>
+          </a:fillRef>
+          <a:effectRef idx="2">
+            <a:schemeClr val="accent1"/>
+          </a:effectRef>
+          <a:fontRef idx="minor">
+            <a:schemeClr val="lt1"/>
+          </a:fontRef>
+        </p:style>
+        <p:txBody>
+          <a:bodyPr rtlCol="0" anchor="ctr"/>
+          <a:lstStyle/>
+          <a:p>
+            <a:pPr algn="ctr"/>
+          </a:p>
+        </p:txBody>
+      </p:sp>
+      <p:sp>
+        <p:nvSpPr>
+          <p:cNvPr id="44" name="TextBox 43"/>
+          <p:cNvSpPr txBox="1"/>
+          <p:nvPr/>
+        </p:nvSpPr>
+        <p:spPr>
+          <a:xfrm>
+            <a:off x="4433369" y="4005071"/>
+            <a:ext cx="411480" cy="182880"/>
+          </a:xfrm>
+          <a:prstGeom prst="rect">
+            <a:avLst/>
+          </a:prstGeom>
+          <a:noFill/>
+        </p:spPr>
+        <p:txBody>
+          <a:bodyPr wrap="square" lIns="0" rIns="0" tIns="0" bIns="0" anchor="t">
+            <a:spAutoFit/>
+          </a:bodyPr>
+          <a:lstStyle/>
+          <a:p>
+            <a:pPr algn="l"/>
+            <a:r>
+              <a:rPr sz="1000" b="0">
+                <a:solidFill>
+                  <a:srgbClr val="1A1A1A"/>
+                </a:solidFill>
+                <a:latin typeface="Calibri"/>
+              </a:rPr>
+              <a:t>13.6x</a:t>
+            </a:r>
+          </a:p>
+        </p:txBody>
+      </p:sp>
+      <p:sp>
+        <p:nvSpPr>
+          <p:cNvPr id="45" name="TextBox 44"/>
+          <p:cNvSpPr txBox="1"/>
+          <p:nvPr/>
+        </p:nvSpPr>
+        <p:spPr>
+          <a:xfrm>
+            <a:off x="3886200" y="4297680"/>
+            <a:ext cx="365760" cy="164592"/>
+          </a:xfrm>
+          <a:prstGeom prst="rect">
+            <a:avLst/>
+          </a:prstGeom>
+          <a:noFill/>
+        </p:spPr>
+        <p:txBody>
+          <a:bodyPr wrap="square" lIns="0" rIns="0" tIns="0" bIns="0" anchor="t">
+            <a:spAutoFit/>
+          </a:bodyPr>
+          <a:lstStyle/>
+          <a:p>
+            <a:pPr algn="l"/>
+            <a:r>
+              <a:rPr sz="700" b="0">
+                <a:solidFill>
                   <a:srgbClr val="9A9A9A"/>
                 </a:solidFill>
                 <a:latin typeface="Calibri"/>
               </a:rPr>
-              <a:t>No P/E history available</a:t>
-            </a:r>
-          </a:p>
-        </p:txBody>
-      </p:sp>
-      <p:sp>
-        <p:nvSpPr>
-          <p:cNvPr id="14" name="Rectangle 13"/>
+              <a:t>11x</a:t>
+            </a:r>
+          </a:p>
+        </p:txBody>
+      </p:sp>
+      <p:sp>
+        <p:nvSpPr>
+          <p:cNvPr id="46" name="TextBox 45"/>
+          <p:cNvSpPr txBox="1"/>
+          <p:nvPr/>
+        </p:nvSpPr>
+        <p:spPr>
+          <a:xfrm>
+            <a:off x="4663440" y="4297680"/>
+            <a:ext cx="365760" cy="164592"/>
+          </a:xfrm>
+          <a:prstGeom prst="rect">
+            <a:avLst/>
+          </a:prstGeom>
+          <a:noFill/>
+        </p:spPr>
+        <p:txBody>
+          <a:bodyPr wrap="square" lIns="0" rIns="0" tIns="0" bIns="0" anchor="t">
+            <a:spAutoFit/>
+          </a:bodyPr>
+          <a:lstStyle/>
+          <a:p>
+            <a:pPr algn="l"/>
+            <a:r>
+              <a:rPr sz="700" b="0">
+                <a:solidFill>
+                  <a:srgbClr val="9A9A9A"/>
+                </a:solidFill>
+                <a:latin typeface="Calibri"/>
+              </a:rPr>
+              <a:t>17x</a:t>
+            </a:r>
+          </a:p>
+        </p:txBody>
+      </p:sp>
+      <p:sp>
+        <p:nvSpPr>
+          <p:cNvPr id="47" name="TextBox 46"/>
+          <p:cNvSpPr txBox="1"/>
+          <p:nvPr/>
+        </p:nvSpPr>
+        <p:spPr>
+          <a:xfrm>
+            <a:off x="5440679" y="4297680"/>
+            <a:ext cx="365760" cy="164592"/>
+          </a:xfrm>
+          <a:prstGeom prst="rect">
+            <a:avLst/>
+          </a:prstGeom>
+          <a:noFill/>
+        </p:spPr>
+        <p:txBody>
+          <a:bodyPr wrap="square" lIns="0" rIns="0" tIns="0" bIns="0" anchor="t">
+            <a:spAutoFit/>
+          </a:bodyPr>
+          <a:lstStyle/>
+          <a:p>
+            <a:pPr algn="l"/>
+            <a:r>
+              <a:rPr sz="700" b="0">
+                <a:solidFill>
+                  <a:srgbClr val="9A9A9A"/>
+                </a:solidFill>
+                <a:latin typeface="Calibri"/>
+              </a:rPr>
+              <a:t>22x</a:t>
+            </a:r>
+          </a:p>
+        </p:txBody>
+      </p:sp>
+      <p:sp>
+        <p:nvSpPr>
+          <p:cNvPr id="48" name="TextBox 47"/>
+          <p:cNvSpPr txBox="1"/>
+          <p:nvPr/>
+        </p:nvSpPr>
+        <p:spPr>
+          <a:xfrm>
+            <a:off x="6217920" y="4297680"/>
+            <a:ext cx="365760" cy="164592"/>
+          </a:xfrm>
+          <a:prstGeom prst="rect">
+            <a:avLst/>
+          </a:prstGeom>
+          <a:noFill/>
+        </p:spPr>
+        <p:txBody>
+          <a:bodyPr wrap="square" lIns="0" rIns="0" tIns="0" bIns="0" anchor="t">
+            <a:spAutoFit/>
+          </a:bodyPr>
+          <a:lstStyle/>
+          <a:p>
+            <a:pPr algn="l"/>
+            <a:r>
+              <a:rPr sz="700" b="0">
+                <a:solidFill>
+                  <a:srgbClr val="9A9A9A"/>
+                </a:solidFill>
+                <a:latin typeface="Calibri"/>
+              </a:rPr>
+              <a:t>28x</a:t>
+            </a:r>
+          </a:p>
+        </p:txBody>
+      </p:sp>
+      <p:sp>
+        <p:nvSpPr>
+          <p:cNvPr id="49" name="Diamond 48"/>
+          <p:cNvSpPr/>
+          <p:nvPr/>
+        </p:nvSpPr>
+        <p:spPr>
+          <a:xfrm>
+            <a:off x="4314497" y="4242816"/>
+            <a:ext cx="146304" cy="146304"/>
+          </a:xfrm>
+          <a:prstGeom prst="diamond">
+            <a:avLst/>
+          </a:prstGeom>
+          <a:solidFill>
+            <a:srgbClr val="1A1A1A"/>
+          </a:solidFill>
+          <a:ln>
+            <a:noFill/>
+          </a:ln>
+        </p:spPr>
+        <p:style>
+          <a:lnRef idx="1">
+            <a:schemeClr val="accent1"/>
+          </a:lnRef>
+          <a:fillRef idx="3">
+            <a:schemeClr val="accent1"/>
+          </a:fillRef>
+          <a:effectRef idx="2">
+            <a:schemeClr val="accent1"/>
+          </a:effectRef>
+          <a:fontRef idx="minor">
+            <a:schemeClr val="lt1"/>
+          </a:fontRef>
+        </p:style>
+        <p:txBody>
+          <a:bodyPr rtlCol="0" anchor="ctr"/>
+          <a:lstStyle/>
+          <a:p>
+            <a:pPr algn="ctr"/>
+          </a:p>
+        </p:txBody>
+      </p:sp>
+      <p:sp>
+        <p:nvSpPr>
+          <p:cNvPr id="50" name="TextBox 49"/>
+          <p:cNvSpPr txBox="1"/>
+          <p:nvPr/>
+        </p:nvSpPr>
+        <p:spPr>
+          <a:xfrm>
+            <a:off x="4479089" y="4224528"/>
+            <a:ext cx="1280160" cy="164592"/>
+          </a:xfrm>
+          <a:prstGeom prst="rect">
+            <a:avLst/>
+          </a:prstGeom>
+          <a:noFill/>
+        </p:spPr>
+        <p:txBody>
+          <a:bodyPr wrap="square" lIns="0" rIns="0" tIns="0" bIns="0" anchor="t">
+            <a:spAutoFit/>
+          </a:bodyPr>
+          <a:lstStyle/>
+          <a:p>
+            <a:pPr algn="l"/>
+            <a:r>
+              <a:rPr sz="700" b="0">
+                <a:solidFill>
+                  <a:srgbClr val="1A1A1A"/>
+                </a:solidFill>
+                <a:latin typeface="Calibri"/>
+              </a:rPr>
+              <a:t>Current  (13.6x)</a:t>
+            </a:r>
+          </a:p>
+        </p:txBody>
+      </p:sp>
+      <p:sp>
+        <p:nvSpPr>
+          <p:cNvPr id="51" name="Rectangle 50"/>
           <p:cNvSpPr/>
           <p:nvPr/>
         </p:nvSpPr>
@@ -9575,7 +11827,7 @@
       </p:sp>
       <p:sp>
         <p:nvSpPr>
-          <p:cNvPr id="15" name="TextBox 14"/>
+          <p:cNvPr id="52" name="TextBox 51"/>
           <p:cNvSpPr txBox="1"/>
           <p:nvPr/>
         </p:nvSpPr>
@@ -9610,7 +11862,7 @@
       </p:sp>
       <p:sp>
         <p:nvSpPr>
-          <p:cNvPr id="16" name="TextBox 15"/>
+          <p:cNvPr id="53" name="TextBox 52"/>
           <p:cNvSpPr txBox="1"/>
           <p:nvPr/>
         </p:nvSpPr>
@@ -9645,7 +11897,7 @@
       </p:sp>
       <p:sp>
         <p:nvSpPr>
-          <p:cNvPr id="17" name="TextBox 16"/>
+          <p:cNvPr id="54" name="TextBox 53"/>
           <p:cNvSpPr txBox="1"/>
           <p:nvPr/>
         </p:nvSpPr>
@@ -9680,7 +11932,7 @@
       </p:sp>
       <p:sp>
         <p:nvSpPr>
-          <p:cNvPr id="18" name="TextBox 17"/>
+          <p:cNvPr id="55" name="TextBox 54"/>
           <p:cNvSpPr txBox="1"/>
           <p:nvPr/>
         </p:nvSpPr>
@@ -9715,7 +11967,7 @@
       </p:sp>
       <p:sp>
         <p:nvSpPr>
-          <p:cNvPr id="19" name="TextBox 18"/>
+          <p:cNvPr id="56" name="TextBox 55"/>
           <p:cNvSpPr txBox="1"/>
           <p:nvPr/>
         </p:nvSpPr>
@@ -9750,7 +12002,7 @@
       </p:sp>
       <p:sp>
         <p:nvSpPr>
-          <p:cNvPr id="20" name="TextBox 19"/>
+          <p:cNvPr id="57" name="TextBox 56"/>
           <p:cNvSpPr txBox="1"/>
           <p:nvPr/>
         </p:nvSpPr>
@@ -9785,7 +12037,7 @@
       </p:sp>
       <p:sp>
         <p:nvSpPr>
-          <p:cNvPr id="21" name="TextBox 20"/>
+          <p:cNvPr id="58" name="TextBox 57"/>
           <p:cNvSpPr txBox="1"/>
           <p:nvPr/>
         </p:nvSpPr>
@@ -9820,7 +12072,7 @@
       </p:sp>
       <p:sp>
         <p:nvSpPr>
-          <p:cNvPr id="22" name="Rectangle 21"/>
+          <p:cNvPr id="59" name="Rectangle 58"/>
           <p:cNvSpPr/>
           <p:nvPr/>
         </p:nvSpPr>
@@ -9864,7 +12116,217 @@
       </p:sp>
       <p:sp>
         <p:nvSpPr>
-          <p:cNvPr id="23" name="Rectangle 22"/>
+          <p:cNvPr id="60" name="TextBox 59"/>
+          <p:cNvSpPr txBox="1"/>
+          <p:nvPr/>
+        </p:nvSpPr>
+        <p:spPr>
+          <a:xfrm>
+            <a:off x="411480" y="5093208"/>
+            <a:ext cx="1874520" cy="256032"/>
+          </a:xfrm>
+          <a:prstGeom prst="rect">
+            <a:avLst/>
+          </a:prstGeom>
+          <a:noFill/>
+        </p:spPr>
+        <p:txBody>
+          <a:bodyPr wrap="square" lIns="0" rIns="0" tIns="0" bIns="0" anchor="t">
+            <a:spAutoFit/>
+          </a:bodyPr>
+          <a:lstStyle/>
+          <a:p>
+            <a:pPr algn="l"/>
+            <a:r>
+              <a:rPr sz="1000" b="0">
+                <a:solidFill>
+                  <a:srgbClr val="1A1A1A"/>
+                </a:solidFill>
+                <a:latin typeface="Calibri"/>
+              </a:rPr>
+              <a:t>iShares MSCI India ETF</a:t>
+            </a:r>
+          </a:p>
+        </p:txBody>
+      </p:sp>
+      <p:sp>
+        <p:nvSpPr>
+          <p:cNvPr id="61" name="TextBox 60"/>
+          <p:cNvSpPr txBox="1"/>
+          <p:nvPr/>
+        </p:nvSpPr>
+        <p:spPr>
+          <a:xfrm>
+            <a:off x="2331720" y="5093208"/>
+            <a:ext cx="960120" cy="256032"/>
+          </a:xfrm>
+          <a:prstGeom prst="rect">
+            <a:avLst/>
+          </a:prstGeom>
+          <a:noFill/>
+        </p:spPr>
+        <p:txBody>
+          <a:bodyPr wrap="square" lIns="0" rIns="0" tIns="0" bIns="0" anchor="t">
+            <a:spAutoFit/>
+          </a:bodyPr>
+          <a:lstStyle/>
+          <a:p>
+            <a:pPr algn="l"/>
+            <a:r>
+              <a:rPr sz="1000" b="0">
+                <a:solidFill>
+                  <a:srgbClr val="1A1A1A"/>
+                </a:solidFill>
+                <a:latin typeface="Calibri"/>
+              </a:rPr>
+              <a:t>INDA</a:t>
+            </a:r>
+          </a:p>
+        </p:txBody>
+      </p:sp>
+      <p:sp>
+        <p:nvSpPr>
+          <p:cNvPr id="62" name="TextBox 61"/>
+          <p:cNvSpPr txBox="1"/>
+          <p:nvPr/>
+        </p:nvSpPr>
+        <p:spPr>
+          <a:xfrm>
+            <a:off x="3337560" y="5093208"/>
+            <a:ext cx="960120" cy="256032"/>
+          </a:xfrm>
+          <a:prstGeom prst="rect">
+            <a:avLst/>
+          </a:prstGeom>
+          <a:noFill/>
+        </p:spPr>
+        <p:txBody>
+          <a:bodyPr wrap="square" lIns="0" rIns="0" tIns="0" bIns="0" anchor="t">
+            <a:spAutoFit/>
+          </a:bodyPr>
+          <a:lstStyle/>
+          <a:p>
+            <a:pPr algn="r"/>
+            <a:r>
+              <a:rPr sz="1000" b="0">
+                <a:solidFill>
+                  <a:srgbClr val="1A1A1A"/>
+                </a:solidFill>
+                <a:latin typeface="Calibri"/>
+              </a:rPr>
+              <a:t>—</a:t>
+            </a:r>
+          </a:p>
+        </p:txBody>
+      </p:sp>
+      <p:sp>
+        <p:nvSpPr>
+          <p:cNvPr id="63" name="TextBox 62"/>
+          <p:cNvSpPr txBox="1"/>
+          <p:nvPr/>
+        </p:nvSpPr>
+        <p:spPr>
+          <a:xfrm>
+            <a:off x="4343400" y="5093208"/>
+            <a:ext cx="594359" cy="256032"/>
+          </a:xfrm>
+          <a:prstGeom prst="rect">
+            <a:avLst/>
+          </a:prstGeom>
+          <a:noFill/>
+        </p:spPr>
+        <p:txBody>
+          <a:bodyPr wrap="square" lIns="0" rIns="0" tIns="0" bIns="0" anchor="t">
+            <a:spAutoFit/>
+          </a:bodyPr>
+          <a:lstStyle/>
+          <a:p>
+            <a:pPr algn="r"/>
+            <a:r>
+              <a:rPr sz="1000" b="0">
+                <a:solidFill>
+                  <a:srgbClr val="1A1A1A"/>
+                </a:solidFill>
+                <a:latin typeface="Calibri"/>
+              </a:rPr>
+              <a:t>—</a:t>
+            </a:r>
+          </a:p>
+        </p:txBody>
+      </p:sp>
+      <p:sp>
+        <p:nvSpPr>
+          <p:cNvPr id="64" name="TextBox 63"/>
+          <p:cNvSpPr txBox="1"/>
+          <p:nvPr/>
+        </p:nvSpPr>
+        <p:spPr>
+          <a:xfrm>
+            <a:off x="4983480" y="5093208"/>
+            <a:ext cx="685800" cy="256032"/>
+          </a:xfrm>
+          <a:prstGeom prst="rect">
+            <a:avLst/>
+          </a:prstGeom>
+          <a:noFill/>
+        </p:spPr>
+        <p:txBody>
+          <a:bodyPr wrap="square" lIns="0" rIns="0" tIns="0" bIns="0" anchor="t">
+            <a:spAutoFit/>
+          </a:bodyPr>
+          <a:lstStyle/>
+          <a:p>
+            <a:pPr algn="r"/>
+            <a:r>
+              <a:rPr sz="1000" b="0">
+                <a:solidFill>
+                  <a:srgbClr val="1A1A1A"/>
+                </a:solidFill>
+                <a:latin typeface="Calibri"/>
+              </a:rPr>
+              <a:t>—</a:t>
+            </a:r>
+          </a:p>
+        </p:txBody>
+      </p:sp>
+      <p:sp>
+        <p:nvSpPr>
+          <p:cNvPr id="65" name="TextBox 64"/>
+          <p:cNvSpPr txBox="1"/>
+          <p:nvPr/>
+        </p:nvSpPr>
+        <p:spPr>
+          <a:xfrm>
+            <a:off x="5715000" y="5093208"/>
+            <a:ext cx="685800" cy="256032"/>
+          </a:xfrm>
+          <a:prstGeom prst="rect">
+            <a:avLst/>
+          </a:prstGeom>
+          <a:noFill/>
+        </p:spPr>
+        <p:txBody>
+          <a:bodyPr wrap="square" lIns="0" rIns="0" tIns="0" bIns="0" anchor="t">
+            <a:spAutoFit/>
+          </a:bodyPr>
+          <a:lstStyle/>
+          <a:p>
+            <a:pPr algn="r"/>
+            <a:r>
+              <a:rPr sz="1000" b="0">
+                <a:solidFill>
+                  <a:srgbClr val="1A1A1A"/>
+                </a:solidFill>
+                <a:latin typeface="Calibri"/>
+              </a:rPr>
+              <a:t>—</a:t>
+            </a:r>
+          </a:p>
+        </p:txBody>
+      </p:sp>
+      <p:sp>
+        <p:nvSpPr>
+          <p:cNvPr id="66" name="Rectangle 65"/>
           <p:cNvSpPr/>
           <p:nvPr/>
         </p:nvSpPr>
@@ -9908,7 +12370,7 @@
       </p:sp>
       <p:sp>
         <p:nvSpPr>
-          <p:cNvPr id="24" name="TextBox 23"/>
+          <p:cNvPr id="67" name="TextBox 66"/>
           <p:cNvSpPr txBox="1"/>
           <p:nvPr/>
         </p:nvSpPr>
@@ -9943,7 +12405,7 @@
       </p:sp>
       <p:sp>
         <p:nvSpPr>
-          <p:cNvPr id="25" name="Rectangle 24"/>
+          <p:cNvPr id="68" name="Rectangle 67"/>
           <p:cNvSpPr/>
           <p:nvPr/>
         </p:nvSpPr>
@@ -9989,7 +12451,7 @@
       </p:sp>
       <p:sp>
         <p:nvSpPr>
-          <p:cNvPr id="26" name="Rectangle 25"/>
+          <p:cNvPr id="69" name="Rectangle 68"/>
           <p:cNvSpPr/>
           <p:nvPr/>
         </p:nvSpPr>
@@ -10033,7 +12495,7 @@
       </p:sp>
       <p:sp>
         <p:nvSpPr>
-          <p:cNvPr id="27" name="TextBox 26"/>
+          <p:cNvPr id="70" name="TextBox 69"/>
           <p:cNvSpPr txBox="1"/>
           <p:nvPr/>
         </p:nvSpPr>
@@ -10068,7 +12530,7 @@
       </p:sp>
       <p:sp>
         <p:nvSpPr>
-          <p:cNvPr id="28" name="Rectangle 27"/>
+          <p:cNvPr id="71" name="Rectangle 70"/>
           <p:cNvSpPr/>
           <p:nvPr/>
         </p:nvSpPr>
@@ -10111,7 +12573,7 @@
       </p:sp>
       <p:sp>
         <p:nvSpPr>
-          <p:cNvPr id="29" name="Rectangle 28"/>
+          <p:cNvPr id="72" name="Rectangle 71"/>
           <p:cNvSpPr/>
           <p:nvPr/>
         </p:nvSpPr>
@@ -10154,7 +12616,7 @@
       </p:sp>
       <p:sp>
         <p:nvSpPr>
-          <p:cNvPr id="30" name="TextBox 29"/>
+          <p:cNvPr id="73" name="TextBox 72"/>
           <p:cNvSpPr txBox="1"/>
           <p:nvPr/>
         </p:nvSpPr>
@@ -10189,7 +12651,7 @@
       </p:sp>
       <p:sp>
         <p:nvSpPr>
-          <p:cNvPr id="31" name="TextBox 30"/>
+          <p:cNvPr id="74" name="TextBox 73"/>
           <p:cNvSpPr txBox="1"/>
           <p:nvPr/>
         </p:nvSpPr>
@@ -10224,7 +12686,7 @@
       </p:sp>
       <p:sp>
         <p:nvSpPr>
-          <p:cNvPr id="32" name="Rectangle 31"/>
+          <p:cNvPr id="75" name="Rectangle 74"/>
           <p:cNvSpPr/>
           <p:nvPr/>
         </p:nvSpPr>
@@ -10270,7 +12732,7 @@
       </p:sp>
       <p:sp>
         <p:nvSpPr>
-          <p:cNvPr id="33" name="Rectangle 32"/>
+          <p:cNvPr id="76" name="Rectangle 75"/>
           <p:cNvSpPr/>
           <p:nvPr/>
         </p:nvSpPr>
@@ -10314,7 +12776,7 @@
       </p:sp>
       <p:sp>
         <p:nvSpPr>
-          <p:cNvPr id="34" name="TextBox 33"/>
+          <p:cNvPr id="77" name="TextBox 76"/>
           <p:cNvSpPr txBox="1"/>
           <p:nvPr/>
         </p:nvSpPr>
@@ -10349,7 +12811,7 @@
       </p:sp>
       <p:sp>
         <p:nvSpPr>
-          <p:cNvPr id="35" name="TextBox 34"/>
+          <p:cNvPr id="78" name="TextBox 77"/>
           <p:cNvSpPr txBox="1"/>
           <p:nvPr/>
         </p:nvSpPr>
@@ -10377,14 +12839,14 @@
                 </a:solidFill>
                 <a:latin typeface="Calibri"/>
               </a:rPr>
-              <a:t> 1,669.80</a:t>
-            </a:r>
-          </a:p>
-        </p:txBody>
-      </p:sp>
-      <p:sp>
-        <p:nvSpPr>
-          <p:cNvPr id="36" name="TextBox 35"/>
+              <a:t>INR 1,669.80</a:t>
+            </a:r>
+          </a:p>
+        </p:txBody>
+      </p:sp>
+      <p:sp>
+        <p:nvSpPr>
+          <p:cNvPr id="79" name="TextBox 78"/>
           <p:cNvSpPr txBox="1"/>
           <p:nvPr/>
         </p:nvSpPr>
@@ -10412,14 +12874,49 @@
                 </a:solidFill>
                 <a:latin typeface="Calibri"/>
               </a:rPr>
-              <a:t>Range   1,500 — 1,860</a:t>
-            </a:r>
-          </a:p>
-        </p:txBody>
-      </p:sp>
-      <p:sp>
-        <p:nvSpPr>
-          <p:cNvPr id="37" name="Rectangle 36"/>
+              <a:t>Range  INR 1,500 — 1,860</a:t>
+            </a:r>
+          </a:p>
+        </p:txBody>
+      </p:sp>
+      <p:sp>
+        <p:nvSpPr>
+          <p:cNvPr id="80" name="TextBox 79"/>
+          <p:cNvSpPr txBox="1"/>
+          <p:nvPr/>
+        </p:nvSpPr>
+        <p:spPr>
+          <a:xfrm>
+            <a:off x="2593848" y="8750808"/>
+            <a:ext cx="1706879" cy="164592"/>
+          </a:xfrm>
+          <a:prstGeom prst="rect">
+            <a:avLst/>
+          </a:prstGeom>
+          <a:noFill/>
+        </p:spPr>
+        <p:txBody>
+          <a:bodyPr wrap="square" lIns="0" rIns="0" tIns="0" bIns="0" anchor="t">
+            <a:spAutoFit/>
+          </a:bodyPr>
+          <a:lstStyle/>
+          <a:p>
+            <a:pPr algn="l"/>
+            <a:r>
+              <a:rPr sz="900" b="0">
+                <a:solidFill>
+                  <a:srgbClr val="2F7D4F"/>
+                </a:solidFill>
+                <a:latin typeface="Calibri"/>
+              </a:rPr>
+              <a:t>Implied +35.2% vs last close</a:t>
+            </a:r>
+          </a:p>
+        </p:txBody>
+      </p:sp>
+      <p:sp>
+        <p:nvSpPr>
+          <p:cNvPr id="81" name="Rectangle 80"/>
           <p:cNvSpPr/>
           <p:nvPr/>
         </p:nvSpPr>
@@ -10465,7 +12962,7 @@
       </p:sp>
       <p:sp>
         <p:nvSpPr>
-          <p:cNvPr id="38" name="Rectangle 37"/>
+          <p:cNvPr id="82" name="Rectangle 81"/>
           <p:cNvSpPr/>
           <p:nvPr/>
         </p:nvSpPr>
@@ -10509,7 +13006,7 @@
       </p:sp>
       <p:sp>
         <p:nvSpPr>
-          <p:cNvPr id="39" name="TextBox 38"/>
+          <p:cNvPr id="83" name="TextBox 82"/>
           <p:cNvSpPr txBox="1"/>
           <p:nvPr/>
         </p:nvSpPr>
@@ -10544,14 +13041,14 @@
       </p:sp>
       <p:sp>
         <p:nvSpPr>
-          <p:cNvPr id="40" name="TextBox 39"/>
-          <p:cNvSpPr txBox="1"/>
-          <p:nvPr/>
-        </p:nvSpPr>
-        <p:spPr>
-          <a:xfrm>
-            <a:off x="4666488" y="8275320"/>
-            <a:ext cx="1706879" cy="182880"/>
+          <p:cNvPr id="84" name="TextBox 83"/>
+          <p:cNvSpPr txBox="1"/>
+          <p:nvPr/>
+        </p:nvSpPr>
+        <p:spPr>
+          <a:xfrm>
+            <a:off x="4666488" y="8220456"/>
+            <a:ext cx="502920" cy="182880"/>
           </a:xfrm>
           <a:prstGeom prst="rect">
             <a:avLst/>
@@ -10566,20 +13063,195 @@
           <a:p>
             <a:pPr algn="l"/>
             <a:r>
-              <a:rPr sz="900" b="0">
-                <a:solidFill>
-                  <a:srgbClr val="9A9A9A"/>
-                </a:solidFill>
-                <a:latin typeface="Calibri"/>
-              </a:rPr>
-              <a:t>No broker actions in feed</a:t>
-            </a:r>
-          </a:p>
-        </p:txBody>
-      </p:sp>
-      <p:sp>
-        <p:nvSpPr>
-          <p:cNvPr id="41" name="Rectangle 40"/>
+              <a:rPr sz="1000" b="0">
+                <a:solidFill>
+                  <a:srgbClr val="5C5C5C"/>
+                </a:solidFill>
+                <a:latin typeface="Calibri"/>
+              </a:rPr>
+              <a:t>Apr. 20</a:t>
+            </a:r>
+          </a:p>
+        </p:txBody>
+      </p:sp>
+      <p:sp>
+        <p:nvSpPr>
+          <p:cNvPr id="85" name="TextBox 84"/>
+          <p:cNvSpPr txBox="1"/>
+          <p:nvPr/>
+        </p:nvSpPr>
+        <p:spPr>
+          <a:xfrm>
+            <a:off x="5196840" y="8220456"/>
+            <a:ext cx="1176527" cy="182880"/>
+          </a:xfrm>
+          <a:prstGeom prst="rect">
+            <a:avLst/>
+          </a:prstGeom>
+          <a:noFill/>
+        </p:spPr>
+        <p:txBody>
+          <a:bodyPr wrap="square" lIns="0" rIns="0" tIns="0" bIns="0" anchor="t">
+            <a:spAutoFit/>
+          </a:bodyPr>
+          <a:lstStyle/>
+          <a:p>
+            <a:pPr algn="l"/>
+            <a:r>
+              <a:rPr sz="1000" b="0">
+                <a:solidFill>
+                  <a:srgbClr val="1A1A1A"/>
+                </a:solidFill>
+                <a:latin typeface="Calibri"/>
+              </a:rPr>
+              <a:t>Nomura Adjusts ICICI Bank's Price Target to INR1,620 From INR1,535, Keeps at Buy</a:t>
+            </a:r>
+          </a:p>
+        </p:txBody>
+      </p:sp>
+      <p:sp>
+        <p:nvSpPr>
+          <p:cNvPr id="86" name="TextBox 85"/>
+          <p:cNvSpPr txBox="1"/>
+          <p:nvPr/>
+        </p:nvSpPr>
+        <p:spPr>
+          <a:xfrm>
+            <a:off x="4666488" y="8458200"/>
+            <a:ext cx="502920" cy="182880"/>
+          </a:xfrm>
+          <a:prstGeom prst="rect">
+            <a:avLst/>
+          </a:prstGeom>
+          <a:noFill/>
+        </p:spPr>
+        <p:txBody>
+          <a:bodyPr wrap="square" lIns="0" rIns="0" tIns="0" bIns="0" anchor="t">
+            <a:spAutoFit/>
+          </a:bodyPr>
+          <a:lstStyle/>
+          <a:p>
+            <a:pPr algn="l"/>
+            <a:r>
+              <a:rPr sz="1000" b="0">
+                <a:solidFill>
+                  <a:srgbClr val="5C5C5C"/>
+                </a:solidFill>
+                <a:latin typeface="Calibri"/>
+              </a:rPr>
+              <a:t>Mar. 24</a:t>
+            </a:r>
+          </a:p>
+        </p:txBody>
+      </p:sp>
+      <p:sp>
+        <p:nvSpPr>
+          <p:cNvPr id="87" name="TextBox 86"/>
+          <p:cNvSpPr txBox="1"/>
+          <p:nvPr/>
+        </p:nvSpPr>
+        <p:spPr>
+          <a:xfrm>
+            <a:off x="5196840" y="8458200"/>
+            <a:ext cx="1176527" cy="182880"/>
+          </a:xfrm>
+          <a:prstGeom prst="rect">
+            <a:avLst/>
+          </a:prstGeom>
+          <a:noFill/>
+        </p:spPr>
+        <p:txBody>
+          <a:bodyPr wrap="square" lIns="0" rIns="0" tIns="0" bIns="0" anchor="t">
+            <a:spAutoFit/>
+          </a:bodyPr>
+          <a:lstStyle/>
+          <a:p>
+            <a:pPr algn="l"/>
+            <a:r>
+              <a:rPr sz="1000" b="0">
+                <a:solidFill>
+                  <a:srgbClr val="1A1A1A"/>
+                </a:solidFill>
+                <a:latin typeface="Calibri"/>
+              </a:rPr>
+              <a:t>Nomura Adjusts ICICI Bank's Price Target to INR1,535 From INR1,735, Keeps at Buy</a:t>
+            </a:r>
+          </a:p>
+        </p:txBody>
+      </p:sp>
+      <p:sp>
+        <p:nvSpPr>
+          <p:cNvPr id="88" name="TextBox 87"/>
+          <p:cNvSpPr txBox="1"/>
+          <p:nvPr/>
+        </p:nvSpPr>
+        <p:spPr>
+          <a:xfrm>
+            <a:off x="4666488" y="8695944"/>
+            <a:ext cx="502920" cy="182880"/>
+          </a:xfrm>
+          <a:prstGeom prst="rect">
+            <a:avLst/>
+          </a:prstGeom>
+          <a:noFill/>
+        </p:spPr>
+        <p:txBody>
+          <a:bodyPr wrap="square" lIns="0" rIns="0" tIns="0" bIns="0" anchor="t">
+            <a:spAutoFit/>
+          </a:bodyPr>
+          <a:lstStyle/>
+          <a:p>
+            <a:pPr algn="l"/>
+            <a:r>
+              <a:rPr sz="1000" b="0">
+                <a:solidFill>
+                  <a:srgbClr val="5C5C5C"/>
+                </a:solidFill>
+                <a:latin typeface="Calibri"/>
+              </a:rPr>
+              <a:t>Jan. 19</a:t>
+            </a:r>
+          </a:p>
+        </p:txBody>
+      </p:sp>
+      <p:sp>
+        <p:nvSpPr>
+          <p:cNvPr id="89" name="TextBox 88"/>
+          <p:cNvSpPr txBox="1"/>
+          <p:nvPr/>
+        </p:nvSpPr>
+        <p:spPr>
+          <a:xfrm>
+            <a:off x="5196840" y="8695944"/>
+            <a:ext cx="1176527" cy="182880"/>
+          </a:xfrm>
+          <a:prstGeom prst="rect">
+            <a:avLst/>
+          </a:prstGeom>
+          <a:noFill/>
+        </p:spPr>
+        <p:txBody>
+          <a:bodyPr wrap="square" lIns="0" rIns="0" tIns="0" bIns="0" anchor="t">
+            <a:spAutoFit/>
+          </a:bodyPr>
+          <a:lstStyle/>
+          <a:p>
+            <a:pPr algn="l"/>
+            <a:r>
+              <a:rPr sz="1000" b="0">
+                <a:solidFill>
+                  <a:srgbClr val="1A1A1A"/>
+                </a:solidFill>
+                <a:latin typeface="Calibri"/>
+              </a:rPr>
+              <a:t>Avendus Spark Upgrades ICICI Bank to Buy from Add; Price Target is INR1,627</a:t>
+            </a:r>
+          </a:p>
+        </p:txBody>
+      </p:sp>
+      <p:sp>
+        <p:nvSpPr>
+          <p:cNvPr id="90" name="Rectangle 89"/>
           <p:cNvSpPr/>
           <p:nvPr/>
         </p:nvSpPr>
@@ -10623,7 +13295,7 @@
       </p:sp>
       <p:sp>
         <p:nvSpPr>
-          <p:cNvPr id="42" name="TextBox 41"/>
+          <p:cNvPr id="91" name="TextBox 90"/>
           <p:cNvSpPr txBox="1"/>
           <p:nvPr/>
         </p:nvSpPr>
@@ -10651,14 +13323,14 @@
                 </a:solidFill>
                 <a:latin typeface="Calibri"/>
               </a:rPr>
-              <a:t>Source: investing  |  Generated 13 May 2026  |  Analyst: Jabal Research</a:t>
-            </a:r>
-          </a:p>
-        </p:txBody>
-      </p:sp>
-      <p:sp>
-        <p:nvSpPr>
-          <p:cNvPr id="43" name="TextBox 42"/>
+              <a:t>Source: investing, marketscreener, yahoo  |  Generated 13 May 2026  |  Analyst: Jabal Research</a:t>
+            </a:r>
+          </a:p>
+        </p:txBody>
+      </p:sp>
+      <p:sp>
+        <p:nvSpPr>
+          <p:cNvPr id="92" name="TextBox 91"/>
           <p:cNvSpPr txBox="1"/>
           <p:nvPr/>
         </p:nvSpPr>
@@ -10693,7 +13365,7 @@
       </p:sp>
       <p:sp>
         <p:nvSpPr>
-          <p:cNvPr id="44" name="TextBox 43"/>
+          <p:cNvPr id="93" name="TextBox 92"/>
           <p:cNvSpPr txBox="1"/>
           <p:nvPr/>
         </p:nvSpPr>
@@ -10728,7 +13400,7 @@
       </p:sp>
       <p:sp>
         <p:nvSpPr>
-          <p:cNvPr id="45" name="TextBox 44"/>
+          <p:cNvPr id="94" name="TextBox 93"/>
           <p:cNvSpPr txBox="1"/>
           <p:nvPr/>
         </p:nvSpPr>

--- a/static/decks/ICICIBANK.BO.pptx
+++ b/static/decks/ICICIBANK.BO.pptx
@@ -12214,7 +12214,7 @@
                 </a:solidFill>
                 <a:latin typeface="Calibri"/>
               </a:rPr>
-              <a:t>—</a:t>
+              <a:t>$6.7B</a:t>
             </a:r>
           </a:p>
         </p:txBody>
@@ -12284,7 +12284,7 @@
                 </a:solidFill>
                 <a:latin typeface="Calibri"/>
               </a:rPr>
-              <a:t>—</a:t>
+              <a:t>+2.5% YTD</a:t>
             </a:r>
           </a:p>
         </p:txBody>
@@ -12315,11 +12315,11 @@
             <a:r>
               <a:rPr sz="1000" b="0">
                 <a:solidFill>
-                  <a:srgbClr val="1A1A1A"/>
-                </a:solidFill>
-                <a:latin typeface="Calibri"/>
-              </a:rPr>
-              <a:t>—</a:t>
+                  <a:srgbClr val="B83227"/>
+                </a:solidFill>
+                <a:latin typeface="Calibri"/>
+              </a:rPr>
+              <a:t>-10.7%</a:t>
             </a:r>
           </a:p>
         </p:txBody>

--- a/static/decks/ICICIBANK.BO.pptx
+++ b/static/decks/ICICIBANK.BO.pptx
@@ -6447,7 +6447,7 @@
                 </a:solidFill>
                 <a:latin typeface="Calibri"/>
               </a:rPr>
-              <a:t>Source: investing, marketscreener, yahoo  |  Generated 13 May 2026  |  Analyst: Jabal Research</a:t>
+              <a:t>Source: investing, marketscreener, yahoo  |  Generated 14 May 2026  |  Analyst: Jabal Research</a:t>
             </a:r>
           </a:p>
         </p:txBody>
@@ -9801,7 +9801,7 @@
                 </a:solidFill>
                 <a:latin typeface="Calibri"/>
               </a:rPr>
-              <a:t>Source: investing, marketscreener, yahoo  |  Generated 13 May 2026  |  Analyst: Jabal Research</a:t>
+              <a:t>Source: investing, marketscreener, yahoo  |  Generated 14 May 2026  |  Analyst: Jabal Research</a:t>
             </a:r>
           </a:p>
         </p:txBody>
@@ -13323,7 +13323,7 @@
                 </a:solidFill>
                 <a:latin typeface="Calibri"/>
               </a:rPr>
-              <a:t>Source: investing, marketscreener, yahoo  |  Generated 13 May 2026  |  Analyst: Jabal Research</a:t>
+              <a:t>Source: investing, marketscreener, yahoo  |  Generated 14 May 2026  |  Analyst: Jabal Research</a:t>
             </a:r>
           </a:p>
         </p:txBody>

--- a/static/decks/ICICIBANK.BO.pptx
+++ b/static/decks/ICICIBANK.BO.pptx
@@ -148,154 +148,154 @@
               <c:strCache>
                 <c:ptCount val="50"/>
                 <c:pt idx="0">
-                  <c:v>05-13</c:v>
+                  <c:v>05-15</c:v>
                 </c:pt>
                 <c:pt idx="1">
-                  <c:v>05-20</c:v>
+                  <c:v>05-22</c:v>
                 </c:pt>
                 <c:pt idx="2">
-                  <c:v>05-27</c:v>
+                  <c:v>05-29</c:v>
                 </c:pt>
                 <c:pt idx="3">
-                  <c:v>06-03</c:v>
+                  <c:v>06-05</c:v>
                 </c:pt>
                 <c:pt idx="4">
-                  <c:v>06-10</c:v>
+                  <c:v>06-12</c:v>
                 </c:pt>
                 <c:pt idx="5">
-                  <c:v>06-17</c:v>
+                  <c:v>06-19</c:v>
                 </c:pt>
                 <c:pt idx="6">
-                  <c:v>06-24</c:v>
+                  <c:v>06-26</c:v>
                 </c:pt>
                 <c:pt idx="7">
-                  <c:v>07-01</c:v>
+                  <c:v>07-03</c:v>
                 </c:pt>
                 <c:pt idx="8">
-                  <c:v>07-08</c:v>
+                  <c:v>07-10</c:v>
                 </c:pt>
                 <c:pt idx="9">
-                  <c:v>07-15</c:v>
+                  <c:v>07-17</c:v>
                 </c:pt>
                 <c:pt idx="10">
-                  <c:v>07-22</c:v>
+                  <c:v>07-24</c:v>
                 </c:pt>
                 <c:pt idx="11">
-                  <c:v>07-29</c:v>
+                  <c:v>07-31</c:v>
                 </c:pt>
                 <c:pt idx="12">
-                  <c:v>08-05</c:v>
+                  <c:v>08-07</c:v>
                 </c:pt>
                 <c:pt idx="13">
-                  <c:v>08-12</c:v>
+                  <c:v>08-14</c:v>
                 </c:pt>
                 <c:pt idx="14">
-                  <c:v>08-20</c:v>
+                  <c:v>08-22</c:v>
                 </c:pt>
                 <c:pt idx="15">
-                  <c:v>08-28</c:v>
+                  <c:v>09-01</c:v>
                 </c:pt>
                 <c:pt idx="16">
-                  <c:v>09-04</c:v>
+                  <c:v>09-08</c:v>
                 </c:pt>
                 <c:pt idx="17">
-                  <c:v>09-11</c:v>
+                  <c:v>09-15</c:v>
                 </c:pt>
                 <c:pt idx="18">
-                  <c:v>09-18</c:v>
+                  <c:v>09-22</c:v>
                 </c:pt>
                 <c:pt idx="19">
-                  <c:v>09-25</c:v>
+                  <c:v>09-29</c:v>
                 </c:pt>
                 <c:pt idx="20">
-                  <c:v>10-03</c:v>
+                  <c:v>10-07</c:v>
                 </c:pt>
                 <c:pt idx="21">
-                  <c:v>10-10</c:v>
+                  <c:v>10-14</c:v>
                 </c:pt>
                 <c:pt idx="22">
-                  <c:v>10-17</c:v>
+                  <c:v>10-21</c:v>
                 </c:pt>
                 <c:pt idx="23">
-                  <c:v>10-27</c:v>
+                  <c:v>10-29</c:v>
                 </c:pt>
                 <c:pt idx="24">
-                  <c:v>11-03</c:v>
+                  <c:v>11-06</c:v>
                 </c:pt>
                 <c:pt idx="25">
-                  <c:v>11-11</c:v>
+                  <c:v>11-13</c:v>
                 </c:pt>
                 <c:pt idx="26">
-                  <c:v>11-18</c:v>
+                  <c:v>11-20</c:v>
                 </c:pt>
                 <c:pt idx="27">
-                  <c:v>11-25</c:v>
+                  <c:v>11-27</c:v>
                 </c:pt>
                 <c:pt idx="28">
-                  <c:v>12-02</c:v>
+                  <c:v>12-04</c:v>
                 </c:pt>
                 <c:pt idx="29">
-                  <c:v>12-09</c:v>
+                  <c:v>12-11</c:v>
                 </c:pt>
                 <c:pt idx="30">
-                  <c:v>12-16</c:v>
+                  <c:v>12-18</c:v>
                 </c:pt>
                 <c:pt idx="31">
-                  <c:v>12-23</c:v>
+                  <c:v>12-26</c:v>
                 </c:pt>
                 <c:pt idx="32">
-                  <c:v>12-31</c:v>
+                  <c:v>01-02</c:v>
                 </c:pt>
                 <c:pt idx="33">
-                  <c:v>01-07</c:v>
+                  <c:v>01-09</c:v>
                 </c:pt>
                 <c:pt idx="34">
-                  <c:v>01-14</c:v>
+                  <c:v>01-19</c:v>
                 </c:pt>
                 <c:pt idx="35">
-                  <c:v>01-22</c:v>
+                  <c:v>01-27</c:v>
                 </c:pt>
                 <c:pt idx="36">
-                  <c:v>01-30</c:v>
+                  <c:v>02-03</c:v>
                 </c:pt>
                 <c:pt idx="37">
-                  <c:v>02-06</c:v>
+                  <c:v>02-10</c:v>
                 </c:pt>
                 <c:pt idx="38">
-                  <c:v>02-13</c:v>
+                  <c:v>02-17</c:v>
                 </c:pt>
                 <c:pt idx="39">
-                  <c:v>02-20</c:v>
+                  <c:v>02-24</c:v>
                 </c:pt>
                 <c:pt idx="40">
-                  <c:v>02-27</c:v>
+                  <c:v>03-04</c:v>
                 </c:pt>
                 <c:pt idx="41">
-                  <c:v>03-09</c:v>
+                  <c:v>03-11</c:v>
                 </c:pt>
                 <c:pt idx="42">
-                  <c:v>03-16</c:v>
+                  <c:v>03-18</c:v>
                 </c:pt>
                 <c:pt idx="43">
-                  <c:v>03-23</c:v>
+                  <c:v>03-25</c:v>
                 </c:pt>
                 <c:pt idx="44">
-                  <c:v>04-01</c:v>
+                  <c:v>04-06</c:v>
                 </c:pt>
                 <c:pt idx="45">
-                  <c:v>04-09</c:v>
+                  <c:v>04-13</c:v>
                 </c:pt>
                 <c:pt idx="46">
-                  <c:v>04-17</c:v>
+                  <c:v>04-21</c:v>
                 </c:pt>
                 <c:pt idx="47">
-                  <c:v>04-24</c:v>
+                  <c:v>04-28</c:v>
                 </c:pt>
                 <c:pt idx="48">
-                  <c:v>05-04</c:v>
+                  <c:v>05-06</c:v>
                 </c:pt>
                 <c:pt idx="49">
-                  <c:v>05-11</c:v>
+                  <c:v>05-13</c:v>
                 </c:pt>
               </c:strCache>
             </c:strRef>
@@ -307,154 +307,154 @@
                 <c:formatCode>General</c:formatCode>
                 <c:ptCount val="50"/>
                 <c:pt idx="0">
-                  <c:v>1431.0999755859375</c:v>
+                  <c:v>1450.8499755859375</c:v>
                 </c:pt>
                 <c:pt idx="1">
-                  <c:v>1437.550048828125</c:v>
+                  <c:v>1442.0</c:v>
                 </c:pt>
                 <c:pt idx="2">
-                  <c:v>1447.050048828125</c:v>
+                  <c:v>1456.6500244140625</c:v>
                 </c:pt>
                 <c:pt idx="3">
-                  <c:v>1438.0</c:v>
+                  <c:v>1454.75</c:v>
                 </c:pt>
                 <c:pt idx="4">
-                  <c:v>1422.9000244140625</c:v>
+                  <c:v>1425.300048828125</c:v>
                 </c:pt>
                 <c:pt idx="5">
-                  <c:v>1423.050048828125</c:v>
+                  <c:v>1411.3499755859375</c:v>
                 </c:pt>
                 <c:pt idx="6">
-                  <c:v>1423.9000244140625</c:v>
+                  <c:v>1439.25</c:v>
                 </c:pt>
                 <c:pt idx="7">
-                  <c:v>1432.0</c:v>
+                  <c:v>1426.199951171875</c:v>
                 </c:pt>
                 <c:pt idx="8">
-                  <c:v>1442.1500244140625</c:v>
+                  <c:v>1424.5</c:v>
                 </c:pt>
                 <c:pt idx="9">
-                  <c:v>1431.449951171875</c:v>
+                  <c:v>1419.050048828125</c:v>
                 </c:pt>
                 <c:pt idx="10">
-                  <c:v>1473.550048828125</c:v>
+                  <c:v>1482.699951171875</c:v>
                 </c:pt>
                 <c:pt idx="11">
-                  <c:v>1486.25</c:v>
+                  <c:v>1481.5999755859375</c:v>
                 </c:pt>
                 <c:pt idx="12">
-                  <c:v>1444.300048828125</c:v>
+                  <c:v>1440.050048828125</c:v>
                 </c:pt>
                 <c:pt idx="13">
-                  <c:v>1422.0999755859375</c:v>
+                  <c:v>1427.300048828125</c:v>
                 </c:pt>
                 <c:pt idx="14">
-                  <c:v>1430.25</c:v>
+                  <c:v>1436.199951171875</c:v>
                 </c:pt>
                 <c:pt idx="15">
-                  <c:v>1398.800048828125</c:v>
+                  <c:v>1410.699951171875</c:v>
                 </c:pt>
                 <c:pt idx="16">
-                  <c:v>1405.6500244140625</c:v>
+                  <c:v>1402.3499755859375</c:v>
                 </c:pt>
                 <c:pt idx="17">
-                  <c:v>1401.800048828125</c:v>
+                  <c:v>1419.5</c:v>
                 </c:pt>
                 <c:pt idx="18">
-                  <c:v>1421.8499755859375</c:v>
+                  <c:v>1401.4000244140625</c:v>
                 </c:pt>
                 <c:pt idx="19">
-                  <c:v>1375.5</c:v>
+                  <c:v>1347.050048828125</c:v>
                 </c:pt>
                 <c:pt idx="20">
-                  <c:v>1365.0</c:v>
+                  <c:v>1376.0999755859375</c:v>
                 </c:pt>
                 <c:pt idx="21">
-                  <c:v>1380.6500244140625</c:v>
+                  <c:v>1384.0999755859375</c:v>
                 </c:pt>
                 <c:pt idx="22">
-                  <c:v>1436.699951171875</c:v>
+                  <c:v>1382.199951171875</c:v>
                 </c:pt>
                 <c:pt idx="23">
-                  <c:v>1377.699951171875</c:v>
+                  <c:v>1370.550048828125</c:v>
                 </c:pt>
                 <c:pt idx="24">
-                  <c:v>1345.5999755859375</c:v>
+                  <c:v>1320.4000244140625</c:v>
                 </c:pt>
                 <c:pt idx="25">
-                  <c:v>1358.4000244140625</c:v>
+                  <c:v>1385.949951171875</c:v>
                 </c:pt>
                 <c:pt idx="26">
-                  <c:v>1371.9000244140625</c:v>
+                  <c:v>1382.9000244140625</c:v>
                 </c:pt>
                 <c:pt idx="27">
-                  <c:v>1358.050048828125</c:v>
+                  <c:v>1392.050048828125</c:v>
                 </c:pt>
                 <c:pt idx="28">
-                  <c:v>1372.6500244140625</c:v>
+                  <c:v>1386.5</c:v>
                 </c:pt>
                 <c:pt idx="29">
-                  <c:v>1374.9000244140625</c:v>
+                  <c:v>1359.949951171875</c:v>
                 </c:pt>
                 <c:pt idx="30">
-                  <c:v>1366.0</c:v>
+                  <c:v>1356.9000244140625</c:v>
                 </c:pt>
                 <c:pt idx="31">
-                  <c:v>1363.050048828125</c:v>
+                  <c:v>1350.550048828125</c:v>
                 </c:pt>
                 <c:pt idx="32">
-                  <c:v>1342.9000244140625</c:v>
+                  <c:v>1354.800048828125</c:v>
                 </c:pt>
                 <c:pt idx="33">
-                  <c:v>1428.449951171875</c:v>
+                  <c:v>1403.550048828125</c:v>
                 </c:pt>
                 <c:pt idx="34">
-                  <c:v>1418.1500244140625</c:v>
+                  <c:v>1379.800048828125</c:v>
                 </c:pt>
                 <c:pt idx="35">
-                  <c:v>1345.6500244140625</c:v>
+                  <c:v>1363.3499755859375</c:v>
                 </c:pt>
                 <c:pt idx="36">
-                  <c:v>1355.050048828125</c:v>
+                  <c:v>1389.5999755859375</c:v>
                 </c:pt>
                 <c:pt idx="37">
-                  <c:v>1406.6500244140625</c:v>
+                  <c:v>1405.5</c:v>
                 </c:pt>
                 <c:pt idx="38">
-                  <c:v>1414.3499755859375</c:v>
+                  <c:v>1407.1500244140625</c:v>
                 </c:pt>
                 <c:pt idx="39">
-                  <c:v>1393.550048828125</c:v>
+                  <c:v>1384.800048828125</c:v>
                 </c:pt>
                 <c:pt idx="40">
-                  <c:v>1379.0</c:v>
+                  <c:v>1364.5</c:v>
                 </c:pt>
                 <c:pt idx="41">
-                  <c:v>1277.4000244140625</c:v>
+                  <c:v>1294.449951171875</c:v>
                 </c:pt>
                 <c:pt idx="42">
-                  <c:v>1273.0</c:v>
+                  <c:v>1289.949951171875</c:v>
                 </c:pt>
                 <c:pt idx="43">
-                  <c:v>1222.6500244140625</c:v>
+                  <c:v>1259.800048828125</c:v>
                 </c:pt>
                 <c:pt idx="44">
-                  <c:v>1212.550048828125</c:v>
+                  <c:v>1231.300048828125</c:v>
                 </c:pt>
                 <c:pt idx="45">
-                  <c:v>1280.75</c:v>
+                  <c:v>1350.550048828125</c:v>
                 </c:pt>
                 <c:pt idx="46">
-                  <c:v>1347.5</c:v>
+                  <c:v>1388.6500244140625</c:v>
                 </c:pt>
                 <c:pt idx="47">
-                  <c:v>1326.300048828125</c:v>
+                  <c:v>1291.75</c:v>
                 </c:pt>
                 <c:pt idx="48">
-                  <c:v>1270.949951171875</c:v>
+                  <c:v>1279.449951171875</c:v>
                 </c:pt>
                 <c:pt idx="49">
-                  <c:v>1266.1500244140625</c:v>
+                  <c:v>1236.0999755859375</c:v>
                 </c:pt>
               </c:numCache>
             </c:numRef>
@@ -3784,7 +3784,7 @@
                 </a:solidFill>
                 <a:latin typeface="Georgia"/>
               </a:rPr>
-              <a:t>ICICI Bank Limited</a:t>
+              <a:t>ICICI BANK LTD.</a:t>
             </a:r>
           </a:p>
         </p:txBody>
@@ -3819,7 +3819,7 @@
                 </a:solidFill>
                 <a:latin typeface="Calibri"/>
               </a:rPr>
-              <a:t>ICICIBANK.BO  ·  Financials  ·  Banks—Diversified  ·  —</a:t>
+              <a:t>ICICIBANK.BO  ·  Financial Services  ·  Banks - Regional  ·  BSE (India)</a:t>
             </a:r>
           </a:p>
         </p:txBody>
@@ -4093,7 +4093,7 @@
                 </a:solidFill>
                 <a:latin typeface="Calibri"/>
               </a:rPr>
-              <a:t>BUY</a:t>
+              <a:t>STRONG BUY</a:t>
             </a:r>
           </a:p>
         </p:txBody>
@@ -4413,7 +4413,7 @@
                 </a:solidFill>
                 <a:latin typeface="Calibri"/>
               </a:rPr>
-              <a:t>+35.2%</a:t>
+              <a:t>+34.2%</a:t>
             </a:r>
           </a:p>
         </p:txBody>
@@ -4562,7 +4562,7 @@
                 </a:solidFill>
                 <a:latin typeface="Calibri"/>
               </a:rPr>
-              <a:t>INR 1,235.10</a:t>
+              <a:t>INR 1,244.50</a:t>
             </a:r>
           </a:p>
         </p:txBody>
@@ -4632,7 +4632,7 @@
                 </a:solidFill>
                 <a:latin typeface="Calibri"/>
               </a:rPr>
-              <a:t>INR 8.89T</a:t>
+              <a:t>INR 8.92T</a:t>
             </a:r>
           </a:p>
         </p:txBody>
@@ -4772,7 +4772,7 @@
                 </a:solidFill>
                 <a:latin typeface="Calibri"/>
               </a:rPr>
-              <a:t>13.6x</a:t>
+              <a:t>—</a:t>
             </a:r>
           </a:p>
         </p:txBody>
@@ -4842,7 +4842,7 @@
                 </a:solidFill>
                 <a:latin typeface="Calibri"/>
               </a:rPr>
-              <a:t>1.24%</a:t>
+              <a:t>0.88%</a:t>
             </a:r>
           </a:p>
         </p:txBody>
@@ -5061,7 +5061,7 @@
                 </a:solidFill>
                 <a:latin typeface="Calibri"/>
               </a:rPr>
-              <a:t>-0.4%</a:t>
+              <a:t>-0.1%</a:t>
             </a:r>
           </a:p>
         </p:txBody>
@@ -5131,7 +5131,7 @@
                 </a:solidFill>
                 <a:latin typeface="Calibri"/>
               </a:rPr>
-              <a:t>-3.5%</a:t>
+              <a:t>-1.6%</a:t>
             </a:r>
           </a:p>
         </p:txBody>
@@ -5201,7 +5201,7 @@
                 </a:solidFill>
                 <a:latin typeface="Calibri"/>
               </a:rPr>
-              <a:t>-6.6%</a:t>
+              <a:t>-7.7%</a:t>
             </a:r>
           </a:p>
         </p:txBody>
@@ -5271,7 +5271,7 @@
                 </a:solidFill>
                 <a:latin typeface="Calibri"/>
               </a:rPr>
-              <a:t>-11.5%</a:t>
+              <a:t>-10.9%</a:t>
             </a:r>
           </a:p>
         </p:txBody>
@@ -5341,7 +5341,7 @@
                 </a:solidFill>
                 <a:latin typeface="Calibri"/>
               </a:rPr>
-              <a:t>-7.6%</a:t>
+              <a:t>-7.3%</a:t>
             </a:r>
           </a:p>
         </p:txBody>
@@ -5411,7 +5411,7 @@
                 </a:solidFill>
                 <a:latin typeface="Calibri"/>
               </a:rPr>
-              <a:t>-7.7%</a:t>
+              <a:t>-6.9%</a:t>
             </a:r>
           </a:p>
         </p:txBody>
@@ -5617,7 +5617,7 @@
         <p:spPr>
           <a:xfrm>
             <a:off x="1280160" y="6400799"/>
-            <a:ext cx="453345" cy="54864"/>
+            <a:ext cx="595868" cy="54864"/>
           </a:xfrm>
           <a:prstGeom prst="rect">
             <a:avLst/>
@@ -5659,7 +5659,7 @@
         </p:nvSpPr>
         <p:spPr>
           <a:xfrm>
-            <a:off x="1651209" y="6345936"/>
+            <a:off x="1793732" y="6345936"/>
             <a:ext cx="164592" cy="164592"/>
           </a:xfrm>
           <a:prstGeom prst="diamond">
@@ -5702,7 +5702,7 @@
         </p:nvSpPr>
         <p:spPr>
           <a:xfrm>
-            <a:off x="1093425" y="6565392"/>
+            <a:off x="1235948" y="6565392"/>
             <a:ext cx="1280160" cy="182880"/>
           </a:xfrm>
           <a:prstGeom prst="rect">
@@ -5724,7 +5724,7 @@
                 </a:solidFill>
                 <a:latin typeface="Calibri"/>
               </a:rPr>
-              <a:t>Current  INR 1,235.10</a:t>
+              <a:t>Current  INR 1,244.50</a:t>
             </a:r>
           </a:p>
         </p:txBody>
@@ -5916,7 +5916,7 @@
                 </a:solidFill>
                 <a:latin typeface="Calibri"/>
               </a:rPr>
-              <a:t>Awaiting next print; consensus updates trickling in.</a:t>
+              <a:t>Consensus Strong Buy from 40 analysts covering.</a:t>
             </a:r>
           </a:p>
         </p:txBody>
@@ -6029,7 +6029,7 @@
                 </a:solidFill>
                 <a:latin typeface="Calibri"/>
               </a:rPr>
-              <a:t>Multiple sits in mid-range vs. 5-year history.</a:t>
+              <a:t>Market cap INR 8.92T — index-eligible scale.</a:t>
             </a:r>
           </a:p>
         </p:txBody>
@@ -6142,7 +6142,7 @@
                 </a:solidFill>
                 <a:latin typeface="Calibri"/>
               </a:rPr>
-              <a:t>Dividend yield in line with sector peers.</a:t>
+              <a:t>Dividend yield 0.88% supports income mandate fit.</a:t>
             </a:r>
           </a:p>
         </p:txBody>
@@ -6255,7 +6255,7 @@
                 </a:solidFill>
                 <a:latin typeface="Calibri"/>
               </a:rPr>
-              <a:t>Management commentary on forward demand is key.</a:t>
+              <a:t>Target INR 1,669.80 (+34.2% vs last close).</a:t>
             </a:r>
           </a:p>
         </p:txBody>
@@ -6368,7 +6368,7 @@
                 </a:solidFill>
                 <a:latin typeface="Calibri"/>
               </a:rPr>
-              <a:t>Macro and feedstock-cost volatility remain top risks.</a:t>
+              <a:t>Crowded long — 38/40 buy ratings raise the expectations bar.</a:t>
             </a:r>
           </a:p>
         </p:txBody>
@@ -6447,7 +6447,7 @@
                 </a:solidFill>
                 <a:latin typeface="Calibri"/>
               </a:rPr>
-              <a:t>Source: investing, marketscreener, yahoo  |  Generated 14 May 2026  |  Analyst: Jabal Research</a:t>
+              <a:t>Source: Investing.com, Yahoo Finance, MarketScreener, World Bank / IMF, iShares  |  Generated 17 May 2026  |  Analyst: Jabal Research</a:t>
             </a:r>
           </a:p>
         </p:txBody>
@@ -6993,7 +6993,7 @@
                 </a:solidFill>
                 <a:latin typeface="Calibri"/>
               </a:rPr>
-              <a:t>Jabal maintains a constructive view into the upcoming print. ICICI Bank Limited sits in the Financials sector (Banks—Diversified). Street consensus is buy (40 analysts covering); consensus target 1669.80. The shares trade at a P/E around 13.6x trailing earnings. Macro context: local-economy GDP growth recently at 6.5%. The thesis hinges on three factors: demand trajectory through H2, feedstock/input-cost discipline, and management's tone on guidance during the call. We expect the print itself to be within consensus bounds; the read on forward commentary is the swing factor.</a:t>
+              <a:t>Jabal maintains a constructive view into the upcoming print. ICICI BANK LTD. sits in the Financial Services sector (Banks - Regional). Street consensus is Strong Buy (40 analysts covering); consensus target 1669.80. Macro context: local-economy GDP growth recently at 6.5%. The thesis hinges on three factors: demand trajectory through H2, feedstock/input-cost discipline, and management's tone on guidance during the call. We expect the print itself to be within consensus bounds; the read on forward commentary is the swing factor.</a:t>
             </a:r>
           </a:p>
         </p:txBody>
@@ -7107,7 +7107,7 @@
                 </a:solidFill>
                 <a:latin typeface="Calibri"/>
               </a:rPr>
-              <a:t>Jabal estimates vs. consensus  ·  Local currency unless stated</a:t>
+              <a:t>Jabal estimates vs. consensus  ·  INR units unless stated</a:t>
             </a:r>
           </a:p>
         </p:txBody>
@@ -7121,7 +7121,7 @@
         <p:spPr>
           <a:xfrm>
             <a:off x="411480" y="4096512"/>
-            <a:ext cx="2148840" cy="274320"/>
+            <a:ext cx="1965960" cy="274320"/>
           </a:xfrm>
           <a:prstGeom prst="rect">
             <a:avLst/>
@@ -7155,7 +7155,7 @@
         </p:nvSpPr>
         <p:spPr>
           <a:xfrm>
-            <a:off x="2606040" y="4096512"/>
+            <a:off x="2423160" y="4096512"/>
             <a:ext cx="960120" cy="274320"/>
           </a:xfrm>
           <a:prstGeom prst="rect">
@@ -7177,7 +7177,7 @@
                 </a:solidFill>
                 <a:latin typeface="Calibri"/>
               </a:rPr>
-              <a:t>JABAL EST.</a:t>
+              <a:t>Q2 2026E</a:t>
             </a:r>
           </a:p>
         </p:txBody>
@@ -7190,8 +7190,8 @@
         </p:nvSpPr>
         <p:spPr>
           <a:xfrm>
-            <a:off x="3611880" y="4096512"/>
-            <a:ext cx="960120" cy="274320"/>
+            <a:off x="3429000" y="4096512"/>
+            <a:ext cx="868680" cy="274320"/>
           </a:xfrm>
           <a:prstGeom prst="rect">
             <a:avLst/>
@@ -7212,77 +7212,77 @@
                 </a:solidFill>
                 <a:latin typeface="Calibri"/>
               </a:rPr>
+              <a:t>YOY</a:t>
+            </a:r>
+          </a:p>
+        </p:txBody>
+      </p:sp>
+      <p:sp>
+        <p:nvSpPr>
+          <p:cNvPr id="19" name="TextBox 18"/>
+          <p:cNvSpPr txBox="1"/>
+          <p:nvPr/>
+        </p:nvSpPr>
+        <p:spPr>
+          <a:xfrm>
+            <a:off x="4343400" y="4096512"/>
+            <a:ext cx="868680" cy="274320"/>
+          </a:xfrm>
+          <a:prstGeom prst="rect">
+            <a:avLst/>
+          </a:prstGeom>
+          <a:noFill/>
+        </p:spPr>
+        <p:txBody>
+          <a:bodyPr wrap="square" lIns="0" rIns="0" tIns="0" bIns="0" anchor="t">
+            <a:spAutoFit/>
+          </a:bodyPr>
+          <a:lstStyle/>
+          <a:p>
+            <a:pPr algn="r"/>
+            <a:r>
+              <a:rPr sz="850" b="0">
+                <a:solidFill>
+                  <a:srgbClr val="9A9A9A"/>
+                </a:solidFill>
+                <a:latin typeface="Calibri"/>
+              </a:rPr>
+              <a:t>QOQ</a:t>
+            </a:r>
+          </a:p>
+        </p:txBody>
+      </p:sp>
+      <p:sp>
+        <p:nvSpPr>
+          <p:cNvPr id="20" name="TextBox 19"/>
+          <p:cNvSpPr txBox="1"/>
+          <p:nvPr/>
+        </p:nvSpPr>
+        <p:spPr>
+          <a:xfrm>
+            <a:off x="5257800" y="4096512"/>
+            <a:ext cx="1143000" cy="274320"/>
+          </a:xfrm>
+          <a:prstGeom prst="rect">
+            <a:avLst/>
+          </a:prstGeom>
+          <a:noFill/>
+        </p:spPr>
+        <p:txBody>
+          <a:bodyPr wrap="square" lIns="0" rIns="0" tIns="0" bIns="0" anchor="t">
+            <a:spAutoFit/>
+          </a:bodyPr>
+          <a:lstStyle/>
+          <a:p>
+            <a:pPr algn="r"/>
+            <a:r>
+              <a:rPr sz="850" b="0">
+                <a:solidFill>
+                  <a:srgbClr val="9A9A9A"/>
+                </a:solidFill>
+                <a:latin typeface="Calibri"/>
+              </a:rPr>
               <a:t>CONSENSUS</a:t>
-            </a:r>
-          </a:p>
-        </p:txBody>
-      </p:sp>
-      <p:sp>
-        <p:nvSpPr>
-          <p:cNvPr id="19" name="TextBox 18"/>
-          <p:cNvSpPr txBox="1"/>
-          <p:nvPr/>
-        </p:nvSpPr>
-        <p:spPr>
-          <a:xfrm>
-            <a:off x="4617720" y="4096512"/>
-            <a:ext cx="960120" cy="274320"/>
-          </a:xfrm>
-          <a:prstGeom prst="rect">
-            <a:avLst/>
-          </a:prstGeom>
-          <a:noFill/>
-        </p:spPr>
-        <p:txBody>
-          <a:bodyPr wrap="square" lIns="0" rIns="0" tIns="0" bIns="0" anchor="t">
-            <a:spAutoFit/>
-          </a:bodyPr>
-          <a:lstStyle/>
-          <a:p>
-            <a:pPr algn="r"/>
-            <a:r>
-              <a:rPr sz="850" b="0">
-                <a:solidFill>
-                  <a:srgbClr val="9A9A9A"/>
-                </a:solidFill>
-                <a:latin typeface="Calibri"/>
-              </a:rPr>
-              <a:t>Δ VS CONSENSUS</a:t>
-            </a:r>
-          </a:p>
-        </p:txBody>
-      </p:sp>
-      <p:sp>
-        <p:nvSpPr>
-          <p:cNvPr id="20" name="TextBox 19"/>
-          <p:cNvSpPr txBox="1"/>
-          <p:nvPr/>
-        </p:nvSpPr>
-        <p:spPr>
-          <a:xfrm>
-            <a:off x="5623560" y="4096512"/>
-            <a:ext cx="777240" cy="274320"/>
-          </a:xfrm>
-          <a:prstGeom prst="rect">
-            <a:avLst/>
-          </a:prstGeom>
-          <a:noFill/>
-        </p:spPr>
-        <p:txBody>
-          <a:bodyPr wrap="square" lIns="0" rIns="0" tIns="0" bIns="0" anchor="t">
-            <a:spAutoFit/>
-          </a:bodyPr>
-          <a:lstStyle/>
-          <a:p>
-            <a:pPr algn="r"/>
-            <a:r>
-              <a:rPr sz="850" b="0">
-                <a:solidFill>
-                  <a:srgbClr val="9A9A9A"/>
-                </a:solidFill>
-                <a:latin typeface="Calibri"/>
-              </a:rPr>
-              <a:t>YOY</a:t>
             </a:r>
           </a:p>
         </p:txBody>
@@ -7340,7 +7340,7 @@
         <p:spPr>
           <a:xfrm>
             <a:off x="411480" y="4370832"/>
-            <a:ext cx="2148840" cy="274320"/>
+            <a:ext cx="1965960" cy="274320"/>
           </a:xfrm>
           <a:prstGeom prst="rect">
             <a:avLst/>
@@ -7361,7 +7361,7 @@
                 </a:solidFill>
                 <a:latin typeface="Calibri"/>
               </a:rPr>
-              <a:t>EPS — Next Q</a:t>
+              <a:t>Operating Income (INR)</a:t>
             </a:r>
           </a:p>
         </p:txBody>
@@ -7374,7 +7374,7 @@
         </p:nvSpPr>
         <p:spPr>
           <a:xfrm>
-            <a:off x="2606040" y="4370832"/>
+            <a:off x="2423160" y="4370832"/>
             <a:ext cx="960120" cy="274320"/>
           </a:xfrm>
           <a:prstGeom prst="rect">
@@ -7409,8 +7409,8 @@
         </p:nvSpPr>
         <p:spPr>
           <a:xfrm>
-            <a:off x="3611880" y="4370832"/>
-            <a:ext cx="960120" cy="274320"/>
+            <a:off x="3429000" y="4370832"/>
+            <a:ext cx="868680" cy="274320"/>
           </a:xfrm>
           <a:prstGeom prst="rect">
             <a:avLst/>
@@ -7431,7 +7431,7 @@
                 </a:solidFill>
                 <a:latin typeface="Calibri"/>
               </a:rPr>
-              <a:t>19.350</a:t>
+              <a:t>—</a:t>
             </a:r>
           </a:p>
         </p:txBody>
@@ -7444,8 +7444,8 @@
         </p:nvSpPr>
         <p:spPr>
           <a:xfrm>
-            <a:off x="4617720" y="4370832"/>
-            <a:ext cx="960120" cy="274320"/>
+            <a:off x="4343400" y="4370832"/>
+            <a:ext cx="868680" cy="274320"/>
           </a:xfrm>
           <a:prstGeom prst="rect">
             <a:avLst/>
@@ -7479,8 +7479,8 @@
         </p:nvSpPr>
         <p:spPr>
           <a:xfrm>
-            <a:off x="5623560" y="4370832"/>
-            <a:ext cx="777240" cy="274320"/>
+            <a:off x="5257800" y="4370832"/>
+            <a:ext cx="1143000" cy="274320"/>
           </a:xfrm>
           <a:prstGeom prst="rect">
             <a:avLst/>
@@ -7501,7 +7501,7 @@
                 </a:solidFill>
                 <a:latin typeface="Calibri"/>
               </a:rPr>
-              <a:t>—</a:t>
+              <a:t>0.00</a:t>
             </a:r>
           </a:p>
         </p:txBody>
@@ -7558,7 +7558,7 @@
         <p:spPr>
           <a:xfrm>
             <a:off x="411480" y="4645152"/>
-            <a:ext cx="2148840" cy="274320"/>
+            <a:ext cx="1965960" cy="274320"/>
           </a:xfrm>
           <a:prstGeom prst="rect">
             <a:avLst/>
@@ -7579,7 +7579,7 @@
                 </a:solidFill>
                 <a:latin typeface="Calibri"/>
               </a:rPr>
-              <a:t>Revenue — Next Q</a:t>
+              <a:t>Net Income (INR)</a:t>
             </a:r>
           </a:p>
         </p:txBody>
@@ -7592,7 +7592,7 @@
         </p:nvSpPr>
         <p:spPr>
           <a:xfrm>
-            <a:off x="2606040" y="4645152"/>
+            <a:off x="2423160" y="4645152"/>
             <a:ext cx="960120" cy="274320"/>
           </a:xfrm>
           <a:prstGeom prst="rect">
@@ -7627,7 +7627,147 @@
         </p:nvSpPr>
         <p:spPr>
           <a:xfrm>
-            <a:off x="3611880" y="4645152"/>
+            <a:off x="3429000" y="4645152"/>
+            <a:ext cx="868680" cy="274320"/>
+          </a:xfrm>
+          <a:prstGeom prst="rect">
+            <a:avLst/>
+          </a:prstGeom>
+          <a:noFill/>
+        </p:spPr>
+        <p:txBody>
+          <a:bodyPr wrap="square" lIns="0" rIns="0" tIns="0" bIns="0" anchor="t">
+            <a:spAutoFit/>
+          </a:bodyPr>
+          <a:lstStyle/>
+          <a:p>
+            <a:pPr algn="r"/>
+            <a:r>
+              <a:rPr sz="1000" b="0">
+                <a:solidFill>
+                  <a:srgbClr val="1A1A1A"/>
+                </a:solidFill>
+                <a:latin typeface="Calibri"/>
+              </a:rPr>
+              <a:t>—</a:t>
+            </a:r>
+          </a:p>
+        </p:txBody>
+      </p:sp>
+      <p:sp>
+        <p:nvSpPr>
+          <p:cNvPr id="31" name="TextBox 30"/>
+          <p:cNvSpPr txBox="1"/>
+          <p:nvPr/>
+        </p:nvSpPr>
+        <p:spPr>
+          <a:xfrm>
+            <a:off x="4343400" y="4645152"/>
+            <a:ext cx="868680" cy="274320"/>
+          </a:xfrm>
+          <a:prstGeom prst="rect">
+            <a:avLst/>
+          </a:prstGeom>
+          <a:noFill/>
+        </p:spPr>
+        <p:txBody>
+          <a:bodyPr wrap="square" lIns="0" rIns="0" tIns="0" bIns="0" anchor="t">
+            <a:spAutoFit/>
+          </a:bodyPr>
+          <a:lstStyle/>
+          <a:p>
+            <a:pPr algn="r"/>
+            <a:r>
+              <a:rPr sz="1000" b="0">
+                <a:solidFill>
+                  <a:srgbClr val="1A1A1A"/>
+                </a:solidFill>
+                <a:latin typeface="Calibri"/>
+              </a:rPr>
+              <a:t>—</a:t>
+            </a:r>
+          </a:p>
+        </p:txBody>
+      </p:sp>
+      <p:sp>
+        <p:nvSpPr>
+          <p:cNvPr id="32" name="TextBox 31"/>
+          <p:cNvSpPr txBox="1"/>
+          <p:nvPr/>
+        </p:nvSpPr>
+        <p:spPr>
+          <a:xfrm>
+            <a:off x="5257800" y="4645152"/>
+            <a:ext cx="1143000" cy="274320"/>
+          </a:xfrm>
+          <a:prstGeom prst="rect">
+            <a:avLst/>
+          </a:prstGeom>
+          <a:noFill/>
+        </p:spPr>
+        <p:txBody>
+          <a:bodyPr wrap="square" lIns="0" rIns="0" tIns="0" bIns="0" anchor="t">
+            <a:spAutoFit/>
+          </a:bodyPr>
+          <a:lstStyle/>
+          <a:p>
+            <a:pPr algn="r"/>
+            <a:r>
+              <a:rPr sz="1000" b="0">
+                <a:solidFill>
+                  <a:srgbClr val="1A1A1A"/>
+                </a:solidFill>
+                <a:latin typeface="Calibri"/>
+              </a:rPr>
+              <a:t>—</a:t>
+            </a:r>
+          </a:p>
+        </p:txBody>
+      </p:sp>
+      <p:sp>
+        <p:nvSpPr>
+          <p:cNvPr id="33" name="TextBox 32"/>
+          <p:cNvSpPr txBox="1"/>
+          <p:nvPr/>
+        </p:nvSpPr>
+        <p:spPr>
+          <a:xfrm>
+            <a:off x="411480" y="4919472"/>
+            <a:ext cx="1965960" cy="274320"/>
+          </a:xfrm>
+          <a:prstGeom prst="rect">
+            <a:avLst/>
+          </a:prstGeom>
+          <a:noFill/>
+        </p:spPr>
+        <p:txBody>
+          <a:bodyPr wrap="square" lIns="0" rIns="0" tIns="0" bIns="0" anchor="t">
+            <a:spAutoFit/>
+          </a:bodyPr>
+          <a:lstStyle/>
+          <a:p>
+            <a:pPr algn="l"/>
+            <a:r>
+              <a:rPr sz="1000" b="0">
+                <a:solidFill>
+                  <a:srgbClr val="1A1A1A"/>
+                </a:solidFill>
+                <a:latin typeface="Calibri"/>
+              </a:rPr>
+              <a:t>EPS (INR)</a:t>
+            </a:r>
+          </a:p>
+        </p:txBody>
+      </p:sp>
+      <p:sp>
+        <p:nvSpPr>
+          <p:cNvPr id="34" name="TextBox 33"/>
+          <p:cNvSpPr txBox="1"/>
+          <p:nvPr/>
+        </p:nvSpPr>
+        <p:spPr>
+          <a:xfrm>
+            <a:off x="2423160" y="4919472"/>
             <a:ext cx="960120" cy="274320"/>
           </a:xfrm>
           <a:prstGeom prst="rect">
@@ -7649,21 +7789,21 @@
                 </a:solidFill>
                 <a:latin typeface="Calibri"/>
               </a:rPr>
-              <a:t>0</a:t>
-            </a:r>
-          </a:p>
-        </p:txBody>
-      </p:sp>
-      <p:sp>
-        <p:nvSpPr>
-          <p:cNvPr id="31" name="TextBox 30"/>
-          <p:cNvSpPr txBox="1"/>
-          <p:nvPr/>
-        </p:nvSpPr>
-        <p:spPr>
-          <a:xfrm>
-            <a:off x="4617720" y="4645152"/>
-            <a:ext cx="960120" cy="274320"/>
+              <a:t>—</a:t>
+            </a:r>
+          </a:p>
+        </p:txBody>
+      </p:sp>
+      <p:sp>
+        <p:nvSpPr>
+          <p:cNvPr id="35" name="TextBox 34"/>
+          <p:cNvSpPr txBox="1"/>
+          <p:nvPr/>
+        </p:nvSpPr>
+        <p:spPr>
+          <a:xfrm>
+            <a:off x="3429000" y="4919472"/>
+            <a:ext cx="868680" cy="274320"/>
           </a:xfrm>
           <a:prstGeom prst="rect">
             <a:avLst/>
@@ -7680,6 +7820,41 @@
             <a:r>
               <a:rPr sz="1000" b="0">
                 <a:solidFill>
+                  <a:srgbClr val="2F7D4F"/>
+                </a:solidFill>
+                <a:latin typeface="Calibri"/>
+              </a:rPr>
+              <a:t>+7.8%</a:t>
+            </a:r>
+          </a:p>
+        </p:txBody>
+      </p:sp>
+      <p:sp>
+        <p:nvSpPr>
+          <p:cNvPr id="36" name="TextBox 35"/>
+          <p:cNvSpPr txBox="1"/>
+          <p:nvPr/>
+        </p:nvSpPr>
+        <p:spPr>
+          <a:xfrm>
+            <a:off x="4343400" y="4919472"/>
+            <a:ext cx="868680" cy="274320"/>
+          </a:xfrm>
+          <a:prstGeom prst="rect">
+            <a:avLst/>
+          </a:prstGeom>
+          <a:noFill/>
+        </p:spPr>
+        <p:txBody>
+          <a:bodyPr wrap="square" lIns="0" rIns="0" tIns="0" bIns="0" anchor="t">
+            <a:spAutoFit/>
+          </a:bodyPr>
+          <a:lstStyle/>
+          <a:p>
+            <a:pPr algn="r"/>
+            <a:r>
+              <a:rPr sz="1000" b="0">
+                <a:solidFill>
                   <a:srgbClr val="1A1A1A"/>
                 </a:solidFill>
                 <a:latin typeface="Calibri"/>
@@ -7691,14 +7866,14 @@
       </p:sp>
       <p:sp>
         <p:nvSpPr>
-          <p:cNvPr id="32" name="TextBox 31"/>
-          <p:cNvSpPr txBox="1"/>
-          <p:nvPr/>
-        </p:nvSpPr>
-        <p:spPr>
-          <a:xfrm>
-            <a:off x="5623560" y="4645152"/>
-            <a:ext cx="777240" cy="274320"/>
+          <p:cNvPr id="37" name="TextBox 36"/>
+          <p:cNvSpPr txBox="1"/>
+          <p:nvPr/>
+        </p:nvSpPr>
+        <p:spPr>
+          <a:xfrm>
+            <a:off x="5257800" y="4919472"/>
+            <a:ext cx="1143000" cy="274320"/>
           </a:xfrm>
           <a:prstGeom prst="rect">
             <a:avLst/>
@@ -7719,975 +7894,14 @@
                 </a:solidFill>
                 <a:latin typeface="Calibri"/>
               </a:rPr>
-              <a:t>—</a:t>
-            </a:r>
-          </a:p>
-        </p:txBody>
-      </p:sp>
-      <p:sp>
-        <p:nvSpPr>
-          <p:cNvPr id="33" name="TextBox 32"/>
-          <p:cNvSpPr txBox="1"/>
-          <p:nvPr/>
-        </p:nvSpPr>
-        <p:spPr>
-          <a:xfrm>
-            <a:off x="411480" y="4919472"/>
-            <a:ext cx="2148840" cy="274320"/>
-          </a:xfrm>
-          <a:prstGeom prst="rect">
-            <a:avLst/>
-          </a:prstGeom>
-          <a:noFill/>
-        </p:spPr>
-        <p:txBody>
-          <a:bodyPr wrap="square" lIns="0" rIns="0" tIns="0" bIns="0" anchor="t">
-            <a:spAutoFit/>
-          </a:bodyPr>
-          <a:lstStyle/>
-          <a:p>
-            <a:pPr algn="l"/>
-            <a:r>
-              <a:rPr sz="1000" b="0">
-                <a:solidFill>
-                  <a:srgbClr val="1A1A1A"/>
-                </a:solidFill>
-                <a:latin typeface="Calibri"/>
-              </a:rPr>
-              <a:t>EPS (FY est.)</a:t>
-            </a:r>
-          </a:p>
-        </p:txBody>
-      </p:sp>
-      <p:sp>
-        <p:nvSpPr>
-          <p:cNvPr id="34" name="TextBox 33"/>
-          <p:cNvSpPr txBox="1"/>
-          <p:nvPr/>
-        </p:nvSpPr>
-        <p:spPr>
-          <a:xfrm>
-            <a:off x="2606040" y="4919472"/>
-            <a:ext cx="960120" cy="274320"/>
-          </a:xfrm>
-          <a:prstGeom prst="rect">
-            <a:avLst/>
-          </a:prstGeom>
-          <a:noFill/>
-        </p:spPr>
-        <p:txBody>
-          <a:bodyPr wrap="square" lIns="0" rIns="0" tIns="0" bIns="0" anchor="t">
-            <a:spAutoFit/>
-          </a:bodyPr>
-          <a:lstStyle/>
-          <a:p>
-            <a:pPr algn="r"/>
-            <a:r>
-              <a:rPr sz="1000" b="0">
-                <a:solidFill>
-                  <a:srgbClr val="1A1A1A"/>
-                </a:solidFill>
-                <a:latin typeface="Calibri"/>
-              </a:rPr>
-              <a:t>—</a:t>
-            </a:r>
-          </a:p>
-        </p:txBody>
-      </p:sp>
-      <p:sp>
-        <p:nvSpPr>
-          <p:cNvPr id="35" name="TextBox 34"/>
-          <p:cNvSpPr txBox="1"/>
-          <p:nvPr/>
-        </p:nvSpPr>
-        <p:spPr>
-          <a:xfrm>
-            <a:off x="3611880" y="4919472"/>
-            <a:ext cx="960120" cy="274320"/>
-          </a:xfrm>
-          <a:prstGeom prst="rect">
-            <a:avLst/>
-          </a:prstGeom>
-          <a:noFill/>
-        </p:spPr>
-        <p:txBody>
-          <a:bodyPr wrap="square" lIns="0" rIns="0" tIns="0" bIns="0" anchor="t">
-            <a:spAutoFit/>
-          </a:bodyPr>
-          <a:lstStyle/>
-          <a:p>
-            <a:pPr algn="r"/>
-            <a:r>
-              <a:rPr sz="1000" b="0">
-                <a:solidFill>
-                  <a:srgbClr val="1A1A1A"/>
-                </a:solidFill>
-                <a:latin typeface="Calibri"/>
-              </a:rPr>
-              <a:t>69.725</a:t>
-            </a:r>
-          </a:p>
-        </p:txBody>
-      </p:sp>
-      <p:sp>
-        <p:nvSpPr>
-          <p:cNvPr id="36" name="TextBox 35"/>
-          <p:cNvSpPr txBox="1"/>
-          <p:nvPr/>
-        </p:nvSpPr>
-        <p:spPr>
-          <a:xfrm>
-            <a:off x="4617720" y="4919472"/>
-            <a:ext cx="960120" cy="274320"/>
-          </a:xfrm>
-          <a:prstGeom prst="rect">
-            <a:avLst/>
-          </a:prstGeom>
-          <a:noFill/>
-        </p:spPr>
-        <p:txBody>
-          <a:bodyPr wrap="square" lIns="0" rIns="0" tIns="0" bIns="0" anchor="t">
-            <a:spAutoFit/>
-          </a:bodyPr>
-          <a:lstStyle/>
-          <a:p>
-            <a:pPr algn="r"/>
-            <a:r>
-              <a:rPr sz="1000" b="0">
-                <a:solidFill>
-                  <a:srgbClr val="1A1A1A"/>
-                </a:solidFill>
-                <a:latin typeface="Calibri"/>
-              </a:rPr>
-              <a:t>—</a:t>
-            </a:r>
-          </a:p>
-        </p:txBody>
-      </p:sp>
-      <p:sp>
-        <p:nvSpPr>
-          <p:cNvPr id="37" name="TextBox 36"/>
-          <p:cNvSpPr txBox="1"/>
-          <p:nvPr/>
-        </p:nvSpPr>
-        <p:spPr>
-          <a:xfrm>
-            <a:off x="5623560" y="4919472"/>
-            <a:ext cx="777240" cy="274320"/>
-          </a:xfrm>
-          <a:prstGeom prst="rect">
-            <a:avLst/>
-          </a:prstGeom>
-          <a:noFill/>
-        </p:spPr>
-        <p:txBody>
-          <a:bodyPr wrap="square" lIns="0" rIns="0" tIns="0" bIns="0" anchor="t">
-            <a:spAutoFit/>
-          </a:bodyPr>
-          <a:lstStyle/>
-          <a:p>
-            <a:pPr algn="r"/>
-            <a:r>
-              <a:rPr sz="1000" b="0">
-                <a:solidFill>
-                  <a:srgbClr val="1A1A1A"/>
-                </a:solidFill>
-                <a:latin typeface="Calibri"/>
-              </a:rPr>
-              <a:t>—</a:t>
-            </a:r>
-          </a:p>
-        </p:txBody>
-      </p:sp>
-      <p:sp>
-        <p:nvSpPr>
-          <p:cNvPr id="38" name="Rectangle 37"/>
-          <p:cNvSpPr/>
-          <p:nvPr/>
-        </p:nvSpPr>
-        <p:spPr>
-          <a:xfrm>
-            <a:off x="411480" y="5175504"/>
-            <a:ext cx="6035040" cy="274320"/>
-          </a:xfrm>
-          <a:prstGeom prst="rect">
-            <a:avLst/>
-          </a:prstGeom>
-          <a:solidFill>
-            <a:srgbClr val="EFE8DC"/>
-          </a:solidFill>
-          <a:ln>
-            <a:noFill/>
-          </a:ln>
-        </p:spPr>
-        <p:style>
-          <a:lnRef idx="1">
-            <a:schemeClr val="accent1"/>
-          </a:lnRef>
-          <a:fillRef idx="3">
-            <a:schemeClr val="accent1"/>
-          </a:fillRef>
-          <a:effectRef idx="2">
-            <a:schemeClr val="accent1"/>
-          </a:effectRef>
-          <a:fontRef idx="minor">
-            <a:schemeClr val="lt1"/>
-          </a:fontRef>
-        </p:style>
-        <p:txBody>
-          <a:bodyPr rtlCol="0" anchor="ctr"/>
-          <a:lstStyle/>
-          <a:p>
-            <a:pPr algn="ctr"/>
-          </a:p>
-        </p:txBody>
-      </p:sp>
-      <p:sp>
-        <p:nvSpPr>
-          <p:cNvPr id="39" name="TextBox 38"/>
-          <p:cNvSpPr txBox="1"/>
-          <p:nvPr/>
-        </p:nvSpPr>
-        <p:spPr>
-          <a:xfrm>
-            <a:off x="411480" y="5193792"/>
-            <a:ext cx="2148840" cy="274320"/>
-          </a:xfrm>
-          <a:prstGeom prst="rect">
-            <a:avLst/>
-          </a:prstGeom>
-          <a:noFill/>
-        </p:spPr>
-        <p:txBody>
-          <a:bodyPr wrap="square" lIns="0" rIns="0" tIns="0" bIns="0" anchor="t">
-            <a:spAutoFit/>
-          </a:bodyPr>
-          <a:lstStyle/>
-          <a:p>
-            <a:pPr algn="l"/>
-            <a:r>
-              <a:rPr sz="1000" b="0">
-                <a:solidFill>
-                  <a:srgbClr val="1A1A1A"/>
-                </a:solidFill>
-                <a:latin typeface="Calibri"/>
-              </a:rPr>
-              <a:t>Revenue (FY est.)</a:t>
-            </a:r>
-          </a:p>
-        </p:txBody>
-      </p:sp>
-      <p:sp>
-        <p:nvSpPr>
-          <p:cNvPr id="40" name="TextBox 39"/>
-          <p:cNvSpPr txBox="1"/>
-          <p:nvPr/>
-        </p:nvSpPr>
-        <p:spPr>
-          <a:xfrm>
-            <a:off x="2606040" y="5193792"/>
-            <a:ext cx="960120" cy="274320"/>
-          </a:xfrm>
-          <a:prstGeom prst="rect">
-            <a:avLst/>
-          </a:prstGeom>
-          <a:noFill/>
-        </p:spPr>
-        <p:txBody>
-          <a:bodyPr wrap="square" lIns="0" rIns="0" tIns="0" bIns="0" anchor="t">
-            <a:spAutoFit/>
-          </a:bodyPr>
-          <a:lstStyle/>
-          <a:p>
-            <a:pPr algn="r"/>
-            <a:r>
-              <a:rPr sz="1000" b="0">
-                <a:solidFill>
-                  <a:srgbClr val="1A1A1A"/>
-                </a:solidFill>
-                <a:latin typeface="Calibri"/>
-              </a:rPr>
-              <a:t>—</a:t>
-            </a:r>
-          </a:p>
-        </p:txBody>
-      </p:sp>
-      <p:sp>
-        <p:nvSpPr>
-          <p:cNvPr id="41" name="TextBox 40"/>
-          <p:cNvSpPr txBox="1"/>
-          <p:nvPr/>
-        </p:nvSpPr>
-        <p:spPr>
-          <a:xfrm>
-            <a:off x="3611880" y="5193792"/>
-            <a:ext cx="960120" cy="274320"/>
-          </a:xfrm>
-          <a:prstGeom prst="rect">
-            <a:avLst/>
-          </a:prstGeom>
-          <a:noFill/>
-        </p:spPr>
-        <p:txBody>
-          <a:bodyPr wrap="square" lIns="0" rIns="0" tIns="0" bIns="0" anchor="t">
-            <a:spAutoFit/>
-          </a:bodyPr>
-          <a:lstStyle/>
-          <a:p>
-            <a:pPr algn="r"/>
-            <a:r>
-              <a:rPr sz="1000" b="0">
-                <a:solidFill>
-                  <a:srgbClr val="1A1A1A"/>
-                </a:solidFill>
-                <a:latin typeface="Calibri"/>
-              </a:rPr>
-              <a:t>1.20T</a:t>
-            </a:r>
-          </a:p>
-        </p:txBody>
-      </p:sp>
-      <p:sp>
-        <p:nvSpPr>
-          <p:cNvPr id="42" name="TextBox 41"/>
-          <p:cNvSpPr txBox="1"/>
-          <p:nvPr/>
-        </p:nvSpPr>
-        <p:spPr>
-          <a:xfrm>
-            <a:off x="4617720" y="5193792"/>
-            <a:ext cx="960120" cy="274320"/>
-          </a:xfrm>
-          <a:prstGeom prst="rect">
-            <a:avLst/>
-          </a:prstGeom>
-          <a:noFill/>
-        </p:spPr>
-        <p:txBody>
-          <a:bodyPr wrap="square" lIns="0" rIns="0" tIns="0" bIns="0" anchor="t">
-            <a:spAutoFit/>
-          </a:bodyPr>
-          <a:lstStyle/>
-          <a:p>
-            <a:pPr algn="r"/>
-            <a:r>
-              <a:rPr sz="1000" b="0">
-                <a:solidFill>
-                  <a:srgbClr val="1A1A1A"/>
-                </a:solidFill>
-                <a:latin typeface="Calibri"/>
-              </a:rPr>
-              <a:t>—</a:t>
-            </a:r>
-          </a:p>
-        </p:txBody>
-      </p:sp>
-      <p:sp>
-        <p:nvSpPr>
-          <p:cNvPr id="43" name="TextBox 42"/>
-          <p:cNvSpPr txBox="1"/>
-          <p:nvPr/>
-        </p:nvSpPr>
-        <p:spPr>
-          <a:xfrm>
-            <a:off x="5623560" y="5193792"/>
-            <a:ext cx="777240" cy="274320"/>
-          </a:xfrm>
-          <a:prstGeom prst="rect">
-            <a:avLst/>
-          </a:prstGeom>
-          <a:noFill/>
-        </p:spPr>
-        <p:txBody>
-          <a:bodyPr wrap="square" lIns="0" rIns="0" tIns="0" bIns="0" anchor="t">
-            <a:spAutoFit/>
-          </a:bodyPr>
-          <a:lstStyle/>
-          <a:p>
-            <a:pPr algn="r"/>
-            <a:r>
-              <a:rPr sz="1000" b="0">
-                <a:solidFill>
-                  <a:srgbClr val="1A1A1A"/>
-                </a:solidFill>
-                <a:latin typeface="Calibri"/>
-              </a:rPr>
-              <a:t>—</a:t>
-            </a:r>
-          </a:p>
-        </p:txBody>
-      </p:sp>
-      <p:sp>
-        <p:nvSpPr>
-          <p:cNvPr id="44" name="TextBox 43"/>
-          <p:cNvSpPr txBox="1"/>
-          <p:nvPr/>
-        </p:nvSpPr>
-        <p:spPr>
-          <a:xfrm>
-            <a:off x="411480" y="5468112"/>
-            <a:ext cx="2148840" cy="274320"/>
-          </a:xfrm>
-          <a:prstGeom prst="rect">
-            <a:avLst/>
-          </a:prstGeom>
-          <a:noFill/>
-        </p:spPr>
-        <p:txBody>
-          <a:bodyPr wrap="square" lIns="0" rIns="0" tIns="0" bIns="0" anchor="t">
-            <a:spAutoFit/>
-          </a:bodyPr>
-          <a:lstStyle/>
-          <a:p>
-            <a:pPr algn="l"/>
-            <a:r>
-              <a:rPr sz="1000" b="0">
-                <a:solidFill>
-                  <a:srgbClr val="1A1A1A"/>
-                </a:solidFill>
-                <a:latin typeface="Calibri"/>
-              </a:rPr>
-              <a:t>EPS (FY+1 est.)</a:t>
-            </a:r>
-          </a:p>
-        </p:txBody>
-      </p:sp>
-      <p:sp>
-        <p:nvSpPr>
-          <p:cNvPr id="45" name="TextBox 44"/>
-          <p:cNvSpPr txBox="1"/>
-          <p:nvPr/>
-        </p:nvSpPr>
-        <p:spPr>
-          <a:xfrm>
-            <a:off x="2606040" y="5468112"/>
-            <a:ext cx="960120" cy="274320"/>
-          </a:xfrm>
-          <a:prstGeom prst="rect">
-            <a:avLst/>
-          </a:prstGeom>
-          <a:noFill/>
-        </p:spPr>
-        <p:txBody>
-          <a:bodyPr wrap="square" lIns="0" rIns="0" tIns="0" bIns="0" anchor="t">
-            <a:spAutoFit/>
-          </a:bodyPr>
-          <a:lstStyle/>
-          <a:p>
-            <a:pPr algn="r"/>
-            <a:r>
-              <a:rPr sz="1000" b="0">
-                <a:solidFill>
-                  <a:srgbClr val="1A1A1A"/>
-                </a:solidFill>
-                <a:latin typeface="Calibri"/>
-              </a:rPr>
-              <a:t>—</a:t>
-            </a:r>
-          </a:p>
-        </p:txBody>
-      </p:sp>
-      <p:sp>
-        <p:nvSpPr>
-          <p:cNvPr id="46" name="TextBox 45"/>
-          <p:cNvSpPr txBox="1"/>
-          <p:nvPr/>
-        </p:nvSpPr>
-        <p:spPr>
-          <a:xfrm>
-            <a:off x="3611880" y="5468112"/>
-            <a:ext cx="960120" cy="274320"/>
-          </a:xfrm>
-          <a:prstGeom prst="rect">
-            <a:avLst/>
-          </a:prstGeom>
-          <a:noFill/>
-        </p:spPr>
-        <p:txBody>
-          <a:bodyPr wrap="square" lIns="0" rIns="0" tIns="0" bIns="0" anchor="t">
-            <a:spAutoFit/>
-          </a:bodyPr>
-          <a:lstStyle/>
-          <a:p>
-            <a:pPr algn="r"/>
-            <a:r>
-              <a:rPr sz="1000" b="0">
-                <a:solidFill>
-                  <a:srgbClr val="1A1A1A"/>
-                </a:solidFill>
-                <a:latin typeface="Calibri"/>
-              </a:rPr>
-              <a:t>79.415</a:t>
-            </a:r>
-          </a:p>
-        </p:txBody>
-      </p:sp>
-      <p:sp>
-        <p:nvSpPr>
-          <p:cNvPr id="47" name="TextBox 46"/>
-          <p:cNvSpPr txBox="1"/>
-          <p:nvPr/>
-        </p:nvSpPr>
-        <p:spPr>
-          <a:xfrm>
-            <a:off x="4617720" y="5468112"/>
-            <a:ext cx="960120" cy="274320"/>
-          </a:xfrm>
-          <a:prstGeom prst="rect">
-            <a:avLst/>
-          </a:prstGeom>
-          <a:noFill/>
-        </p:spPr>
-        <p:txBody>
-          <a:bodyPr wrap="square" lIns="0" rIns="0" tIns="0" bIns="0" anchor="t">
-            <a:spAutoFit/>
-          </a:bodyPr>
-          <a:lstStyle/>
-          <a:p>
-            <a:pPr algn="r"/>
-            <a:r>
-              <a:rPr sz="1000" b="0">
-                <a:solidFill>
-                  <a:srgbClr val="1A1A1A"/>
-                </a:solidFill>
-                <a:latin typeface="Calibri"/>
-              </a:rPr>
-              <a:t>—</a:t>
-            </a:r>
-          </a:p>
-        </p:txBody>
-      </p:sp>
-      <p:sp>
-        <p:nvSpPr>
-          <p:cNvPr id="48" name="TextBox 47"/>
-          <p:cNvSpPr txBox="1"/>
-          <p:nvPr/>
-        </p:nvSpPr>
-        <p:spPr>
-          <a:xfrm>
-            <a:off x="5623560" y="5468112"/>
-            <a:ext cx="777240" cy="274320"/>
-          </a:xfrm>
-          <a:prstGeom prst="rect">
-            <a:avLst/>
-          </a:prstGeom>
-          <a:noFill/>
-        </p:spPr>
-        <p:txBody>
-          <a:bodyPr wrap="square" lIns="0" rIns="0" tIns="0" bIns="0" anchor="t">
-            <a:spAutoFit/>
-          </a:bodyPr>
-          <a:lstStyle/>
-          <a:p>
-            <a:pPr algn="r"/>
-            <a:r>
-              <a:rPr sz="1000" b="0">
-                <a:solidFill>
-                  <a:srgbClr val="1A1A1A"/>
-                </a:solidFill>
-                <a:latin typeface="Calibri"/>
-              </a:rPr>
-              <a:t>—</a:t>
-            </a:r>
-          </a:p>
-        </p:txBody>
-      </p:sp>
-      <p:sp>
-        <p:nvSpPr>
-          <p:cNvPr id="49" name="Rectangle 48"/>
-          <p:cNvSpPr/>
-          <p:nvPr/>
-        </p:nvSpPr>
-        <p:spPr>
-          <a:xfrm>
-            <a:off x="411480" y="5724144"/>
-            <a:ext cx="6035040" cy="274320"/>
-          </a:xfrm>
-          <a:prstGeom prst="rect">
-            <a:avLst/>
-          </a:prstGeom>
-          <a:solidFill>
-            <a:srgbClr val="EFE8DC"/>
-          </a:solidFill>
-          <a:ln>
-            <a:noFill/>
-          </a:ln>
-        </p:spPr>
-        <p:style>
-          <a:lnRef idx="1">
-            <a:schemeClr val="accent1"/>
-          </a:lnRef>
-          <a:fillRef idx="3">
-            <a:schemeClr val="accent1"/>
-          </a:fillRef>
-          <a:effectRef idx="2">
-            <a:schemeClr val="accent1"/>
-          </a:effectRef>
-          <a:fontRef idx="minor">
-            <a:schemeClr val="lt1"/>
-          </a:fontRef>
-        </p:style>
-        <p:txBody>
-          <a:bodyPr rtlCol="0" anchor="ctr"/>
-          <a:lstStyle/>
-          <a:p>
-            <a:pPr algn="ctr"/>
-          </a:p>
-        </p:txBody>
-      </p:sp>
-      <p:sp>
-        <p:nvSpPr>
-          <p:cNvPr id="50" name="TextBox 49"/>
-          <p:cNvSpPr txBox="1"/>
-          <p:nvPr/>
-        </p:nvSpPr>
-        <p:spPr>
-          <a:xfrm>
-            <a:off x="411480" y="5742432"/>
-            <a:ext cx="2148840" cy="274320"/>
-          </a:xfrm>
-          <a:prstGeom prst="rect">
-            <a:avLst/>
-          </a:prstGeom>
-          <a:noFill/>
-        </p:spPr>
-        <p:txBody>
-          <a:bodyPr wrap="square" lIns="0" rIns="0" tIns="0" bIns="0" anchor="t">
-            <a:spAutoFit/>
-          </a:bodyPr>
-          <a:lstStyle/>
-          <a:p>
-            <a:pPr algn="l"/>
-            <a:r>
-              <a:rPr sz="1000" b="0">
-                <a:solidFill>
-                  <a:srgbClr val="1A1A1A"/>
-                </a:solidFill>
-                <a:latin typeface="Calibri"/>
-              </a:rPr>
-              <a:t>Revenue (FY+1)</a:t>
-            </a:r>
-          </a:p>
-        </p:txBody>
-      </p:sp>
-      <p:sp>
-        <p:nvSpPr>
-          <p:cNvPr id="51" name="TextBox 50"/>
-          <p:cNvSpPr txBox="1"/>
-          <p:nvPr/>
-        </p:nvSpPr>
-        <p:spPr>
-          <a:xfrm>
-            <a:off x="2606040" y="5742432"/>
-            <a:ext cx="960120" cy="274320"/>
-          </a:xfrm>
-          <a:prstGeom prst="rect">
-            <a:avLst/>
-          </a:prstGeom>
-          <a:noFill/>
-        </p:spPr>
-        <p:txBody>
-          <a:bodyPr wrap="square" lIns="0" rIns="0" tIns="0" bIns="0" anchor="t">
-            <a:spAutoFit/>
-          </a:bodyPr>
-          <a:lstStyle/>
-          <a:p>
-            <a:pPr algn="r"/>
-            <a:r>
-              <a:rPr sz="1000" b="0">
-                <a:solidFill>
-                  <a:srgbClr val="1A1A1A"/>
-                </a:solidFill>
-                <a:latin typeface="Calibri"/>
-              </a:rPr>
-              <a:t>—</a:t>
-            </a:r>
-          </a:p>
-        </p:txBody>
-      </p:sp>
-      <p:sp>
-        <p:nvSpPr>
-          <p:cNvPr id="52" name="TextBox 51"/>
-          <p:cNvSpPr txBox="1"/>
-          <p:nvPr/>
-        </p:nvSpPr>
-        <p:spPr>
-          <a:xfrm>
-            <a:off x="3611880" y="5742432"/>
-            <a:ext cx="960120" cy="274320"/>
-          </a:xfrm>
-          <a:prstGeom prst="rect">
-            <a:avLst/>
-          </a:prstGeom>
-          <a:noFill/>
-        </p:spPr>
-        <p:txBody>
-          <a:bodyPr wrap="square" lIns="0" rIns="0" tIns="0" bIns="0" anchor="t">
-            <a:spAutoFit/>
-          </a:bodyPr>
-          <a:lstStyle/>
-          <a:p>
-            <a:pPr algn="r"/>
-            <a:r>
-              <a:rPr sz="1000" b="0">
-                <a:solidFill>
-                  <a:srgbClr val="1A1A1A"/>
-                </a:solidFill>
-                <a:latin typeface="Calibri"/>
-              </a:rPr>
-              <a:t>1.36T</a:t>
-            </a:r>
-          </a:p>
-        </p:txBody>
-      </p:sp>
-      <p:sp>
-        <p:nvSpPr>
-          <p:cNvPr id="53" name="TextBox 52"/>
-          <p:cNvSpPr txBox="1"/>
-          <p:nvPr/>
-        </p:nvSpPr>
-        <p:spPr>
-          <a:xfrm>
-            <a:off x="4617720" y="5742432"/>
-            <a:ext cx="960120" cy="274320"/>
-          </a:xfrm>
-          <a:prstGeom prst="rect">
-            <a:avLst/>
-          </a:prstGeom>
-          <a:noFill/>
-        </p:spPr>
-        <p:txBody>
-          <a:bodyPr wrap="square" lIns="0" rIns="0" tIns="0" bIns="0" anchor="t">
-            <a:spAutoFit/>
-          </a:bodyPr>
-          <a:lstStyle/>
-          <a:p>
-            <a:pPr algn="r"/>
-            <a:r>
-              <a:rPr sz="1000" b="0">
-                <a:solidFill>
-                  <a:srgbClr val="1A1A1A"/>
-                </a:solidFill>
-                <a:latin typeface="Calibri"/>
-              </a:rPr>
-              <a:t>—</a:t>
-            </a:r>
-          </a:p>
-        </p:txBody>
-      </p:sp>
-      <p:sp>
-        <p:nvSpPr>
-          <p:cNvPr id="54" name="TextBox 53"/>
-          <p:cNvSpPr txBox="1"/>
-          <p:nvPr/>
-        </p:nvSpPr>
-        <p:spPr>
-          <a:xfrm>
-            <a:off x="5623560" y="5742432"/>
-            <a:ext cx="777240" cy="274320"/>
-          </a:xfrm>
-          <a:prstGeom prst="rect">
-            <a:avLst/>
-          </a:prstGeom>
-          <a:noFill/>
-        </p:spPr>
-        <p:txBody>
-          <a:bodyPr wrap="square" lIns="0" rIns="0" tIns="0" bIns="0" anchor="t">
-            <a:spAutoFit/>
-          </a:bodyPr>
-          <a:lstStyle/>
-          <a:p>
-            <a:pPr algn="r"/>
-            <a:r>
-              <a:rPr sz="1000" b="0">
-                <a:solidFill>
-                  <a:srgbClr val="1A1A1A"/>
-                </a:solidFill>
-                <a:latin typeface="Calibri"/>
-              </a:rPr>
-              <a:t>—</a:t>
-            </a:r>
-          </a:p>
-        </p:txBody>
-      </p:sp>
-      <p:sp>
-        <p:nvSpPr>
-          <p:cNvPr id="55" name="TextBox 54"/>
-          <p:cNvSpPr txBox="1"/>
-          <p:nvPr/>
-        </p:nvSpPr>
-        <p:spPr>
-          <a:xfrm>
-            <a:off x="411480" y="6016752"/>
-            <a:ext cx="2148840" cy="274320"/>
-          </a:xfrm>
-          <a:prstGeom prst="rect">
-            <a:avLst/>
-          </a:prstGeom>
-          <a:noFill/>
-        </p:spPr>
-        <p:txBody>
-          <a:bodyPr wrap="square" lIns="0" rIns="0" tIns="0" bIns="0" anchor="t">
-            <a:spAutoFit/>
-          </a:bodyPr>
-          <a:lstStyle/>
-          <a:p>
-            <a:pPr algn="l"/>
-            <a:r>
-              <a:rPr sz="1000" b="0">
-                <a:solidFill>
-                  <a:srgbClr val="1A1A1A"/>
-                </a:solidFill>
-                <a:latin typeface="Calibri"/>
-              </a:rPr>
-              <a:t>Dividend yield (TTM)</a:t>
-            </a:r>
-          </a:p>
-        </p:txBody>
-      </p:sp>
-      <p:sp>
-        <p:nvSpPr>
-          <p:cNvPr id="56" name="TextBox 55"/>
-          <p:cNvSpPr txBox="1"/>
-          <p:nvPr/>
-        </p:nvSpPr>
-        <p:spPr>
-          <a:xfrm>
-            <a:off x="2606040" y="6016752"/>
-            <a:ext cx="960120" cy="274320"/>
-          </a:xfrm>
-          <a:prstGeom prst="rect">
-            <a:avLst/>
-          </a:prstGeom>
-          <a:noFill/>
-        </p:spPr>
-        <p:txBody>
-          <a:bodyPr wrap="square" lIns="0" rIns="0" tIns="0" bIns="0" anchor="t">
-            <a:spAutoFit/>
-          </a:bodyPr>
-          <a:lstStyle/>
-          <a:p>
-            <a:pPr algn="r"/>
-            <a:r>
-              <a:rPr sz="1000" b="0">
-                <a:solidFill>
-                  <a:srgbClr val="1A1A1A"/>
-                </a:solidFill>
-                <a:latin typeface="Calibri"/>
-              </a:rPr>
-              <a:t>—</a:t>
-            </a:r>
-          </a:p>
-        </p:txBody>
-      </p:sp>
-      <p:sp>
-        <p:nvSpPr>
-          <p:cNvPr id="57" name="TextBox 56"/>
-          <p:cNvSpPr txBox="1"/>
-          <p:nvPr/>
-        </p:nvSpPr>
-        <p:spPr>
-          <a:xfrm>
-            <a:off x="3611880" y="6016752"/>
-            <a:ext cx="960120" cy="274320"/>
-          </a:xfrm>
-          <a:prstGeom prst="rect">
-            <a:avLst/>
-          </a:prstGeom>
-          <a:noFill/>
-        </p:spPr>
-        <p:txBody>
-          <a:bodyPr wrap="square" lIns="0" rIns="0" tIns="0" bIns="0" anchor="t">
-            <a:spAutoFit/>
-          </a:bodyPr>
-          <a:lstStyle/>
-          <a:p>
-            <a:pPr algn="r"/>
-            <a:r>
-              <a:rPr sz="1000" b="0">
-                <a:solidFill>
-                  <a:srgbClr val="1A1A1A"/>
-                </a:solidFill>
-                <a:latin typeface="Calibri"/>
-              </a:rPr>
-              <a:t>1.24%</a:t>
-            </a:r>
-          </a:p>
-        </p:txBody>
-      </p:sp>
-      <p:sp>
-        <p:nvSpPr>
-          <p:cNvPr id="58" name="TextBox 57"/>
-          <p:cNvSpPr txBox="1"/>
-          <p:nvPr/>
-        </p:nvSpPr>
-        <p:spPr>
-          <a:xfrm>
-            <a:off x="4617720" y="6016752"/>
-            <a:ext cx="960120" cy="274320"/>
-          </a:xfrm>
-          <a:prstGeom prst="rect">
-            <a:avLst/>
-          </a:prstGeom>
-          <a:noFill/>
-        </p:spPr>
-        <p:txBody>
-          <a:bodyPr wrap="square" lIns="0" rIns="0" tIns="0" bIns="0" anchor="t">
-            <a:spAutoFit/>
-          </a:bodyPr>
-          <a:lstStyle/>
-          <a:p>
-            <a:pPr algn="r"/>
-            <a:r>
-              <a:rPr sz="1000" b="0">
-                <a:solidFill>
-                  <a:srgbClr val="1A1A1A"/>
-                </a:solidFill>
-                <a:latin typeface="Calibri"/>
-              </a:rPr>
-              <a:t>—</a:t>
-            </a:r>
-          </a:p>
-        </p:txBody>
-      </p:sp>
-      <p:sp>
-        <p:nvSpPr>
-          <p:cNvPr id="59" name="TextBox 58"/>
-          <p:cNvSpPr txBox="1"/>
-          <p:nvPr/>
-        </p:nvSpPr>
-        <p:spPr>
-          <a:xfrm>
-            <a:off x="5623560" y="6016752"/>
-            <a:ext cx="777240" cy="274320"/>
-          </a:xfrm>
-          <a:prstGeom prst="rect">
-            <a:avLst/>
-          </a:prstGeom>
-          <a:noFill/>
-        </p:spPr>
-        <p:txBody>
-          <a:bodyPr wrap="square" lIns="0" rIns="0" tIns="0" bIns="0" anchor="t">
-            <a:spAutoFit/>
-          </a:bodyPr>
-          <a:lstStyle/>
-          <a:p>
-            <a:pPr algn="r"/>
-            <a:r>
-              <a:rPr sz="1000" b="0">
-                <a:solidFill>
-                  <a:srgbClr val="1A1A1A"/>
-                </a:solidFill>
-                <a:latin typeface="Calibri"/>
-              </a:rPr>
-              <a:t>—</a:t>
-            </a:r>
-          </a:p>
-        </p:txBody>
-      </p:sp>
-      <p:sp>
-        <p:nvSpPr>
-          <p:cNvPr id="60" name="TextBox 59"/>
+              <a:t>19.35</a:t>
+            </a:r>
+          </a:p>
+        </p:txBody>
+      </p:sp>
+      <p:sp>
+        <p:nvSpPr>
+          <p:cNvPr id="38" name="TextBox 37"/>
           <p:cNvSpPr txBox="1"/>
           <p:nvPr/>
         </p:nvSpPr>
@@ -8715,14 +7929,14 @@
                 </a:solidFill>
                 <a:latin typeface="Calibri"/>
               </a:rPr>
-              <a:t>Consensus: Yahoo  ·  40 analysts covering</a:t>
-            </a:r>
-          </a:p>
-        </p:txBody>
-      </p:sp>
-      <p:sp>
-        <p:nvSpPr>
-          <p:cNvPr id="61" name="Rectangle 60"/>
+              <a:t>Estimates: Jabal Research  ·  Consensus: Yahoo (40 analysts)</a:t>
+            </a:r>
+          </a:p>
+        </p:txBody>
+      </p:sp>
+      <p:sp>
+        <p:nvSpPr>
+          <p:cNvPr id="39" name="Rectangle 38"/>
           <p:cNvSpPr/>
           <p:nvPr/>
         </p:nvSpPr>
@@ -8768,7 +7982,7 @@
       </p:sp>
       <p:sp>
         <p:nvSpPr>
-          <p:cNvPr id="62" name="Rectangle 61"/>
+          <p:cNvPr id="40" name="Rectangle 39"/>
           <p:cNvSpPr/>
           <p:nvPr/>
         </p:nvSpPr>
@@ -8812,7 +8026,7 @@
       </p:sp>
       <p:sp>
         <p:nvSpPr>
-          <p:cNvPr id="63" name="TextBox 62"/>
+          <p:cNvPr id="41" name="TextBox 40"/>
           <p:cNvSpPr txBox="1"/>
           <p:nvPr/>
         </p:nvSpPr>
@@ -8847,7 +8061,7 @@
       </p:sp>
       <p:sp>
         <p:nvSpPr>
-          <p:cNvPr id="64" name="Oval 63"/>
+          <p:cNvPr id="42" name="Oval 41"/>
           <p:cNvSpPr/>
           <p:nvPr/>
         </p:nvSpPr>
@@ -8890,7 +8104,7 @@
       </p:sp>
       <p:sp>
         <p:nvSpPr>
-          <p:cNvPr id="65" name="TextBox 64"/>
+          <p:cNvPr id="43" name="TextBox 42"/>
           <p:cNvSpPr txBox="1"/>
           <p:nvPr/>
         </p:nvSpPr>
@@ -8918,14 +8132,14 @@
                 </a:solidFill>
                 <a:latin typeface="Calibri"/>
               </a:rPr>
-              <a:t>EPS beat consensus by 6.4% last quarter; 3 of last 4 quarters above estimates</a:t>
-            </a:r>
-          </a:p>
-        </p:txBody>
-      </p:sp>
-      <p:sp>
-        <p:nvSpPr>
-          <p:cNvPr id="66" name="Oval 65"/>
+              <a:t>EPS missed consensus by 0.0% last quarter; 2 of last 4 quarters above estimates</a:t>
+            </a:r>
+          </a:p>
+        </p:txBody>
+      </p:sp>
+      <p:sp>
+        <p:nvSpPr>
+          <p:cNvPr id="44" name="Oval 43"/>
           <p:cNvSpPr/>
           <p:nvPr/>
         </p:nvSpPr>
@@ -8968,7 +8182,7 @@
       </p:sp>
       <p:sp>
         <p:nvSpPr>
-          <p:cNvPr id="67" name="TextBox 66"/>
+          <p:cNvPr id="45" name="TextBox 44"/>
           <p:cNvSpPr txBox="1"/>
           <p:nvPr/>
         </p:nvSpPr>
@@ -9003,7 +8217,7 @@
       </p:sp>
       <p:sp>
         <p:nvSpPr>
-          <p:cNvPr id="68" name="Oval 67"/>
+          <p:cNvPr id="46" name="Oval 45"/>
           <p:cNvSpPr/>
           <p:nvPr/>
         </p:nvSpPr>
@@ -9046,7 +8260,7 @@
       </p:sp>
       <p:sp>
         <p:nvSpPr>
-          <p:cNvPr id="69" name="TextBox 68"/>
+          <p:cNvPr id="47" name="TextBox 46"/>
           <p:cNvSpPr txBox="1"/>
           <p:nvPr/>
         </p:nvSpPr>
@@ -9081,7 +8295,7 @@
       </p:sp>
       <p:sp>
         <p:nvSpPr>
-          <p:cNvPr id="70" name="Rectangle 69"/>
+          <p:cNvPr id="48" name="Rectangle 47"/>
           <p:cNvSpPr/>
           <p:nvPr/>
         </p:nvSpPr>
@@ -9127,7 +8341,7 @@
       </p:sp>
       <p:sp>
         <p:nvSpPr>
-          <p:cNvPr id="71" name="Rectangle 70"/>
+          <p:cNvPr id="49" name="Rectangle 48"/>
           <p:cNvSpPr/>
           <p:nvPr/>
         </p:nvSpPr>
@@ -9171,7 +8385,7 @@
       </p:sp>
       <p:sp>
         <p:nvSpPr>
-          <p:cNvPr id="72" name="TextBox 71"/>
+          <p:cNvPr id="50" name="TextBox 49"/>
           <p:cNvSpPr txBox="1"/>
           <p:nvPr/>
         </p:nvSpPr>
@@ -9206,7 +8420,7 @@
       </p:sp>
       <p:sp>
         <p:nvSpPr>
-          <p:cNvPr id="73" name="Oval 72"/>
+          <p:cNvPr id="51" name="Oval 50"/>
           <p:cNvSpPr/>
           <p:nvPr/>
         </p:nvSpPr>
@@ -9249,7 +8463,7 @@
       </p:sp>
       <p:sp>
         <p:nvSpPr>
-          <p:cNvPr id="74" name="TextBox 73"/>
+          <p:cNvPr id="52" name="TextBox 51"/>
           <p:cNvSpPr txBox="1"/>
           <p:nvPr/>
         </p:nvSpPr>
@@ -9284,7 +8498,7 @@
       </p:sp>
       <p:sp>
         <p:nvSpPr>
-          <p:cNvPr id="75" name="Oval 74"/>
+          <p:cNvPr id="53" name="Oval 52"/>
           <p:cNvSpPr/>
           <p:nvPr/>
         </p:nvSpPr>
@@ -9327,7 +8541,7 @@
       </p:sp>
       <p:sp>
         <p:nvSpPr>
-          <p:cNvPr id="76" name="TextBox 75"/>
+          <p:cNvPr id="54" name="TextBox 53"/>
           <p:cNvSpPr txBox="1"/>
           <p:nvPr/>
         </p:nvSpPr>
@@ -9362,7 +8576,7 @@
       </p:sp>
       <p:sp>
         <p:nvSpPr>
-          <p:cNvPr id="77" name="Oval 76"/>
+          <p:cNvPr id="55" name="Oval 54"/>
           <p:cNvSpPr/>
           <p:nvPr/>
         </p:nvSpPr>
@@ -9405,7 +8619,7 @@
       </p:sp>
       <p:sp>
         <p:nvSpPr>
-          <p:cNvPr id="78" name="TextBox 77"/>
+          <p:cNvPr id="56" name="TextBox 55"/>
           <p:cNvSpPr txBox="1"/>
           <p:nvPr/>
         </p:nvSpPr>
@@ -9440,7 +8654,7 @@
       </p:sp>
       <p:sp>
         <p:nvSpPr>
-          <p:cNvPr id="79" name="Rectangle 78"/>
+          <p:cNvPr id="57" name="Rectangle 56"/>
           <p:cNvSpPr/>
           <p:nvPr/>
         </p:nvSpPr>
@@ -9484,7 +8698,7 @@
       </p:sp>
       <p:sp>
         <p:nvSpPr>
-          <p:cNvPr id="80" name="TextBox 79"/>
+          <p:cNvPr id="58" name="TextBox 57"/>
           <p:cNvSpPr txBox="1"/>
           <p:nvPr/>
         </p:nvSpPr>
@@ -9519,7 +8733,7 @@
       </p:sp>
       <p:sp>
         <p:nvSpPr>
-          <p:cNvPr id="81" name="TextBox 80"/>
+          <p:cNvPr id="59" name="TextBox 58"/>
           <p:cNvSpPr txBox="1"/>
           <p:nvPr/>
         </p:nvSpPr>
@@ -9554,7 +8768,7 @@
       </p:sp>
       <p:sp>
         <p:nvSpPr>
-          <p:cNvPr id="82" name="TextBox 81"/>
+          <p:cNvPr id="60" name="TextBox 59"/>
           <p:cNvSpPr txBox="1"/>
           <p:nvPr/>
         </p:nvSpPr>
@@ -9589,7 +8803,7 @@
       </p:sp>
       <p:sp>
         <p:nvSpPr>
-          <p:cNvPr id="83" name="TextBox 82"/>
+          <p:cNvPr id="61" name="TextBox 60"/>
           <p:cNvSpPr txBox="1"/>
           <p:nvPr/>
         </p:nvSpPr>
@@ -9624,7 +8838,7 @@
       </p:sp>
       <p:sp>
         <p:nvSpPr>
-          <p:cNvPr id="84" name="TextBox 83"/>
+          <p:cNvPr id="62" name="TextBox 61"/>
           <p:cNvSpPr txBox="1"/>
           <p:nvPr/>
         </p:nvSpPr>
@@ -9659,7 +8873,7 @@
       </p:sp>
       <p:sp>
         <p:nvSpPr>
-          <p:cNvPr id="85" name="TextBox 84"/>
+          <p:cNvPr id="63" name="TextBox 62"/>
           <p:cNvSpPr txBox="1"/>
           <p:nvPr/>
         </p:nvSpPr>
@@ -9694,7 +8908,7 @@
       </p:sp>
       <p:sp>
         <p:nvSpPr>
-          <p:cNvPr id="86" name="TextBox 85"/>
+          <p:cNvPr id="64" name="TextBox 63"/>
           <p:cNvSpPr txBox="1"/>
           <p:nvPr/>
         </p:nvSpPr>
@@ -9729,7 +8943,7 @@
       </p:sp>
       <p:sp>
         <p:nvSpPr>
-          <p:cNvPr id="87" name="Rectangle 86"/>
+          <p:cNvPr id="65" name="Rectangle 64"/>
           <p:cNvSpPr/>
           <p:nvPr/>
         </p:nvSpPr>
@@ -9773,7 +8987,7 @@
       </p:sp>
       <p:sp>
         <p:nvSpPr>
-          <p:cNvPr id="88" name="TextBox 87"/>
+          <p:cNvPr id="66" name="TextBox 65"/>
           <p:cNvSpPr txBox="1"/>
           <p:nvPr/>
         </p:nvSpPr>
@@ -9801,14 +9015,14 @@
                 </a:solidFill>
                 <a:latin typeface="Calibri"/>
               </a:rPr>
-              <a:t>Source: investing, marketscreener, yahoo  |  Generated 14 May 2026  |  Analyst: Jabal Research</a:t>
-            </a:r>
-          </a:p>
-        </p:txBody>
-      </p:sp>
-      <p:sp>
-        <p:nvSpPr>
-          <p:cNvPr id="89" name="TextBox 88"/>
+              <a:t>Source: Investing.com, Yahoo Finance, MarketScreener, World Bank / IMF, iShares  |  Generated 17 May 2026  |  Analyst: Jabal Research</a:t>
+            </a:r>
+          </a:p>
+        </p:txBody>
+      </p:sp>
+      <p:sp>
+        <p:nvSpPr>
+          <p:cNvPr id="67" name="TextBox 66"/>
           <p:cNvSpPr txBox="1"/>
           <p:nvPr/>
         </p:nvSpPr>
@@ -9843,7 +9057,7 @@
       </p:sp>
       <p:sp>
         <p:nvSpPr>
-          <p:cNvPr id="90" name="TextBox 89"/>
+          <p:cNvPr id="68" name="TextBox 67"/>
           <p:cNvSpPr txBox="1"/>
           <p:nvPr/>
         </p:nvSpPr>
@@ -9878,7 +9092,7 @@
       </p:sp>
       <p:sp>
         <p:nvSpPr>
-          <p:cNvPr id="91" name="TextBox 90"/>
+          <p:cNvPr id="69" name="TextBox 68"/>
           <p:cNvSpPr txBox="1"/>
           <p:nvPr/>
         </p:nvSpPr>
@@ -10323,29 +9537,29 @@
         </p:nvSpPr>
         <p:spPr>
           <a:xfrm>
-            <a:off x="3520440" y="2066543"/>
-            <a:ext cx="502920" cy="182880"/>
-          </a:xfrm>
-          <a:prstGeom prst="rect">
-            <a:avLst/>
-          </a:prstGeom>
-          <a:noFill/>
-        </p:spPr>
-        <p:txBody>
-          <a:bodyPr wrap="square" lIns="0" rIns="0" tIns="0" bIns="0" anchor="t">
-            <a:spAutoFit/>
-          </a:bodyPr>
-          <a:lstStyle/>
-          <a:p>
-            <a:pPr algn="l"/>
+            <a:off x="3520440" y="2779776"/>
+            <a:ext cx="2926079" cy="274320"/>
+          </a:xfrm>
+          <a:prstGeom prst="rect">
+            <a:avLst/>
+          </a:prstGeom>
+          <a:noFill/>
+        </p:spPr>
+        <p:txBody>
+          <a:bodyPr wrap="square" lIns="0" rIns="0" tIns="0" bIns="0" anchor="t">
+            <a:spAutoFit/>
+          </a:bodyPr>
+          <a:lstStyle/>
+          <a:p>
+            <a:pPr algn="ctr"/>
             <a:r>
               <a:rPr sz="1000" b="0">
                 <a:solidFill>
-                  <a:srgbClr val="1A1A1A"/>
-                </a:solidFill>
-                <a:latin typeface="Calibri"/>
-              </a:rPr>
-              <a:t>FY2021</a:t>
+                  <a:srgbClr val="9A9A9A"/>
+                </a:solidFill>
+                <a:latin typeface="Calibri"/>
+              </a:rPr>
+              <a:t>No P/E history available</a:t>
             </a:r>
           </a:p>
         </p:txBody>
@@ -10353,1437 +9567,6 @@
       <p:sp>
         <p:nvSpPr>
           <p:cNvPr id="14" name="Rectangle 13"/>
-          <p:cNvSpPr/>
-          <p:nvPr/>
-        </p:nvSpPr>
-        <p:spPr>
-          <a:xfrm>
-            <a:off x="4023360" y="2121408"/>
-            <a:ext cx="1837518" cy="73152"/>
-          </a:xfrm>
-          <a:prstGeom prst="rect">
-            <a:avLst/>
-          </a:prstGeom>
-          <a:solidFill>
-            <a:srgbClr val="EFE8DC"/>
-          </a:solidFill>
-          <a:ln>
-            <a:noFill/>
-          </a:ln>
-        </p:spPr>
-        <p:style>
-          <a:lnRef idx="1">
-            <a:schemeClr val="accent1"/>
-          </a:lnRef>
-          <a:fillRef idx="3">
-            <a:schemeClr val="accent1"/>
-          </a:fillRef>
-          <a:effectRef idx="2">
-            <a:schemeClr val="accent1"/>
-          </a:effectRef>
-          <a:fontRef idx="minor">
-            <a:schemeClr val="lt1"/>
-          </a:fontRef>
-        </p:style>
-        <p:txBody>
-          <a:bodyPr rtlCol="0" anchor="ctr"/>
-          <a:lstStyle/>
-          <a:p>
-            <a:pPr algn="ctr"/>
-          </a:p>
-        </p:txBody>
-      </p:sp>
-      <p:sp>
-        <p:nvSpPr>
-          <p:cNvPr id="15" name="Oval 14"/>
-          <p:cNvSpPr/>
-          <p:nvPr/>
-        </p:nvSpPr>
-        <p:spPr>
-          <a:xfrm>
-            <a:off x="5815158" y="2103120"/>
-            <a:ext cx="91440" cy="109728"/>
-          </a:xfrm>
-          <a:prstGeom prst="ellipse">
-            <a:avLst/>
-          </a:prstGeom>
-          <a:solidFill>
-            <a:srgbClr val="7E6849"/>
-          </a:solidFill>
-          <a:ln>
-            <a:noFill/>
-          </a:ln>
-        </p:spPr>
-        <p:style>
-          <a:lnRef idx="1">
-            <a:schemeClr val="accent1"/>
-          </a:lnRef>
-          <a:fillRef idx="3">
-            <a:schemeClr val="accent1"/>
-          </a:fillRef>
-          <a:effectRef idx="2">
-            <a:schemeClr val="accent1"/>
-          </a:effectRef>
-          <a:fontRef idx="minor">
-            <a:schemeClr val="lt1"/>
-          </a:fontRef>
-        </p:style>
-        <p:txBody>
-          <a:bodyPr rtlCol="0" anchor="ctr"/>
-          <a:lstStyle/>
-          <a:p>
-            <a:pPr algn="ctr"/>
-          </a:p>
-        </p:txBody>
-      </p:sp>
-      <p:sp>
-        <p:nvSpPr>
-          <p:cNvPr id="16" name="TextBox 15"/>
-          <p:cNvSpPr txBox="1"/>
-          <p:nvPr/>
-        </p:nvSpPr>
-        <p:spPr>
-          <a:xfrm>
-            <a:off x="5906598" y="2084831"/>
-            <a:ext cx="411480" cy="182880"/>
-          </a:xfrm>
-          <a:prstGeom prst="rect">
-            <a:avLst/>
-          </a:prstGeom>
-          <a:noFill/>
-        </p:spPr>
-        <p:txBody>
-          <a:bodyPr wrap="square" lIns="0" rIns="0" tIns="0" bIns="0" anchor="t">
-            <a:spAutoFit/>
-          </a:bodyPr>
-          <a:lstStyle/>
-          <a:p>
-            <a:pPr algn="l"/>
-            <a:r>
-              <a:rPr sz="1000" b="0">
-                <a:solidFill>
-                  <a:srgbClr val="1A1A1A"/>
-                </a:solidFill>
-                <a:latin typeface="Calibri"/>
-              </a:rPr>
-              <a:t>24.6x</a:t>
-            </a:r>
-          </a:p>
-        </p:txBody>
-      </p:sp>
-      <p:sp>
-        <p:nvSpPr>
-          <p:cNvPr id="17" name="TextBox 16"/>
-          <p:cNvSpPr txBox="1"/>
-          <p:nvPr/>
-        </p:nvSpPr>
-        <p:spPr>
-          <a:xfrm>
-            <a:off x="3520440" y="2340863"/>
-            <a:ext cx="502920" cy="182880"/>
-          </a:xfrm>
-          <a:prstGeom prst="rect">
-            <a:avLst/>
-          </a:prstGeom>
-          <a:noFill/>
-        </p:spPr>
-        <p:txBody>
-          <a:bodyPr wrap="square" lIns="0" rIns="0" tIns="0" bIns="0" anchor="t">
-            <a:spAutoFit/>
-          </a:bodyPr>
-          <a:lstStyle/>
-          <a:p>
-            <a:pPr algn="l"/>
-            <a:r>
-              <a:rPr sz="1000" b="0">
-                <a:solidFill>
-                  <a:srgbClr val="1A1A1A"/>
-                </a:solidFill>
-                <a:latin typeface="Calibri"/>
-              </a:rPr>
-              <a:t>FY2022</a:t>
-            </a:r>
-          </a:p>
-        </p:txBody>
-      </p:sp>
-      <p:sp>
-        <p:nvSpPr>
-          <p:cNvPr id="18" name="Rectangle 17"/>
-          <p:cNvSpPr/>
-          <p:nvPr/>
-        </p:nvSpPr>
-        <p:spPr>
-          <a:xfrm>
-            <a:off x="4023360" y="2395727"/>
-            <a:ext cx="1502693" cy="73152"/>
-          </a:xfrm>
-          <a:prstGeom prst="rect">
-            <a:avLst/>
-          </a:prstGeom>
-          <a:solidFill>
-            <a:srgbClr val="EFE8DC"/>
-          </a:solidFill>
-          <a:ln>
-            <a:noFill/>
-          </a:ln>
-        </p:spPr>
-        <p:style>
-          <a:lnRef idx="1">
-            <a:schemeClr val="accent1"/>
-          </a:lnRef>
-          <a:fillRef idx="3">
-            <a:schemeClr val="accent1"/>
-          </a:fillRef>
-          <a:effectRef idx="2">
-            <a:schemeClr val="accent1"/>
-          </a:effectRef>
-          <a:fontRef idx="minor">
-            <a:schemeClr val="lt1"/>
-          </a:fontRef>
-        </p:style>
-        <p:txBody>
-          <a:bodyPr rtlCol="0" anchor="ctr"/>
-          <a:lstStyle/>
-          <a:p>
-            <a:pPr algn="ctr"/>
-          </a:p>
-        </p:txBody>
-      </p:sp>
-      <p:sp>
-        <p:nvSpPr>
-          <p:cNvPr id="19" name="Oval 18"/>
-          <p:cNvSpPr/>
-          <p:nvPr/>
-        </p:nvSpPr>
-        <p:spPr>
-          <a:xfrm>
-            <a:off x="5480333" y="2377439"/>
-            <a:ext cx="91440" cy="109728"/>
-          </a:xfrm>
-          <a:prstGeom prst="ellipse">
-            <a:avLst/>
-          </a:prstGeom>
-          <a:solidFill>
-            <a:srgbClr val="7E6849"/>
-          </a:solidFill>
-          <a:ln>
-            <a:noFill/>
-          </a:ln>
-        </p:spPr>
-        <p:style>
-          <a:lnRef idx="1">
-            <a:schemeClr val="accent1"/>
-          </a:lnRef>
-          <a:fillRef idx="3">
-            <a:schemeClr val="accent1"/>
-          </a:fillRef>
-          <a:effectRef idx="2">
-            <a:schemeClr val="accent1"/>
-          </a:effectRef>
-          <a:fontRef idx="minor">
-            <a:schemeClr val="lt1"/>
-          </a:fontRef>
-        </p:style>
-        <p:txBody>
-          <a:bodyPr rtlCol="0" anchor="ctr"/>
-          <a:lstStyle/>
-          <a:p>
-            <a:pPr algn="ctr"/>
-          </a:p>
-        </p:txBody>
-      </p:sp>
-      <p:sp>
-        <p:nvSpPr>
-          <p:cNvPr id="20" name="TextBox 19"/>
-          <p:cNvSpPr txBox="1"/>
-          <p:nvPr/>
-        </p:nvSpPr>
-        <p:spPr>
-          <a:xfrm>
-            <a:off x="5571773" y="2359151"/>
-            <a:ext cx="411480" cy="182880"/>
-          </a:xfrm>
-          <a:prstGeom prst="rect">
-            <a:avLst/>
-          </a:prstGeom>
-          <a:noFill/>
-        </p:spPr>
-        <p:txBody>
-          <a:bodyPr wrap="square" lIns="0" rIns="0" tIns="0" bIns="0" anchor="t">
-            <a:spAutoFit/>
-          </a:bodyPr>
-          <a:lstStyle/>
-          <a:p>
-            <a:pPr algn="l"/>
-            <a:r>
-              <a:rPr sz="1000" b="0">
-                <a:solidFill>
-                  <a:srgbClr val="1A1A1A"/>
-                </a:solidFill>
-                <a:latin typeface="Calibri"/>
-              </a:rPr>
-              <a:t>22.1x</a:t>
-            </a:r>
-          </a:p>
-        </p:txBody>
-      </p:sp>
-      <p:sp>
-        <p:nvSpPr>
-          <p:cNvPr id="21" name="TextBox 20"/>
-          <p:cNvSpPr txBox="1"/>
-          <p:nvPr/>
-        </p:nvSpPr>
-        <p:spPr>
-          <a:xfrm>
-            <a:off x="3520440" y="2615184"/>
-            <a:ext cx="502920" cy="182880"/>
-          </a:xfrm>
-          <a:prstGeom prst="rect">
-            <a:avLst/>
-          </a:prstGeom>
-          <a:noFill/>
-        </p:spPr>
-        <p:txBody>
-          <a:bodyPr wrap="square" lIns="0" rIns="0" tIns="0" bIns="0" anchor="t">
-            <a:spAutoFit/>
-          </a:bodyPr>
-          <a:lstStyle/>
-          <a:p>
-            <a:pPr algn="l"/>
-            <a:r>
-              <a:rPr sz="1000" b="0">
-                <a:solidFill>
-                  <a:srgbClr val="1A1A1A"/>
-                </a:solidFill>
-                <a:latin typeface="Calibri"/>
-              </a:rPr>
-              <a:t>FY2023</a:t>
-            </a:r>
-          </a:p>
-        </p:txBody>
-      </p:sp>
-      <p:sp>
-        <p:nvSpPr>
-          <p:cNvPr id="22" name="Rectangle 21"/>
-          <p:cNvSpPr/>
-          <p:nvPr/>
-        </p:nvSpPr>
-        <p:spPr>
-          <a:xfrm>
-            <a:off x="4023360" y="2670048"/>
-            <a:ext cx="1154475" cy="73152"/>
-          </a:xfrm>
-          <a:prstGeom prst="rect">
-            <a:avLst/>
-          </a:prstGeom>
-          <a:solidFill>
-            <a:srgbClr val="EFE8DC"/>
-          </a:solidFill>
-          <a:ln>
-            <a:noFill/>
-          </a:ln>
-        </p:spPr>
-        <p:style>
-          <a:lnRef idx="1">
-            <a:schemeClr val="accent1"/>
-          </a:lnRef>
-          <a:fillRef idx="3">
-            <a:schemeClr val="accent1"/>
-          </a:fillRef>
-          <a:effectRef idx="2">
-            <a:schemeClr val="accent1"/>
-          </a:effectRef>
-          <a:fontRef idx="minor">
-            <a:schemeClr val="lt1"/>
-          </a:fontRef>
-        </p:style>
-        <p:txBody>
-          <a:bodyPr rtlCol="0" anchor="ctr"/>
-          <a:lstStyle/>
-          <a:p>
-            <a:pPr algn="ctr"/>
-          </a:p>
-        </p:txBody>
-      </p:sp>
-      <p:sp>
-        <p:nvSpPr>
-          <p:cNvPr id="23" name="Oval 22"/>
-          <p:cNvSpPr/>
-          <p:nvPr/>
-        </p:nvSpPr>
-        <p:spPr>
-          <a:xfrm>
-            <a:off x="5132115" y="2651760"/>
-            <a:ext cx="91440" cy="109728"/>
-          </a:xfrm>
-          <a:prstGeom prst="ellipse">
-            <a:avLst/>
-          </a:prstGeom>
-          <a:solidFill>
-            <a:srgbClr val="7E6849"/>
-          </a:solidFill>
-          <a:ln>
-            <a:noFill/>
-          </a:ln>
-        </p:spPr>
-        <p:style>
-          <a:lnRef idx="1">
-            <a:schemeClr val="accent1"/>
-          </a:lnRef>
-          <a:fillRef idx="3">
-            <a:schemeClr val="accent1"/>
-          </a:fillRef>
-          <a:effectRef idx="2">
-            <a:schemeClr val="accent1"/>
-          </a:effectRef>
-          <a:fontRef idx="minor">
-            <a:schemeClr val="lt1"/>
-          </a:fontRef>
-        </p:style>
-        <p:txBody>
-          <a:bodyPr rtlCol="0" anchor="ctr"/>
-          <a:lstStyle/>
-          <a:p>
-            <a:pPr algn="ctr"/>
-          </a:p>
-        </p:txBody>
-      </p:sp>
-      <p:sp>
-        <p:nvSpPr>
-          <p:cNvPr id="24" name="TextBox 23"/>
-          <p:cNvSpPr txBox="1"/>
-          <p:nvPr/>
-        </p:nvSpPr>
-        <p:spPr>
-          <a:xfrm>
-            <a:off x="5223555" y="2633472"/>
-            <a:ext cx="411480" cy="182880"/>
-          </a:xfrm>
-          <a:prstGeom prst="rect">
-            <a:avLst/>
-          </a:prstGeom>
-          <a:noFill/>
-        </p:spPr>
-        <p:txBody>
-          <a:bodyPr wrap="square" lIns="0" rIns="0" tIns="0" bIns="0" anchor="t">
-            <a:spAutoFit/>
-          </a:bodyPr>
-          <a:lstStyle/>
-          <a:p>
-            <a:pPr algn="l"/>
-            <a:r>
-              <a:rPr sz="1000" b="0">
-                <a:solidFill>
-                  <a:srgbClr val="1A1A1A"/>
-                </a:solidFill>
-                <a:latin typeface="Calibri"/>
-              </a:rPr>
-              <a:t>19.5x</a:t>
-            </a:r>
-          </a:p>
-        </p:txBody>
-      </p:sp>
-      <p:sp>
-        <p:nvSpPr>
-          <p:cNvPr id="25" name="TextBox 24"/>
-          <p:cNvSpPr txBox="1"/>
-          <p:nvPr/>
-        </p:nvSpPr>
-        <p:spPr>
-          <a:xfrm>
-            <a:off x="3520440" y="2889503"/>
-            <a:ext cx="502920" cy="182880"/>
-          </a:xfrm>
-          <a:prstGeom prst="rect">
-            <a:avLst/>
-          </a:prstGeom>
-          <a:noFill/>
-        </p:spPr>
-        <p:txBody>
-          <a:bodyPr wrap="square" lIns="0" rIns="0" tIns="0" bIns="0" anchor="t">
-            <a:spAutoFit/>
-          </a:bodyPr>
-          <a:lstStyle/>
-          <a:p>
-            <a:pPr algn="l"/>
-            <a:r>
-              <a:rPr sz="1000" b="0">
-                <a:solidFill>
-                  <a:srgbClr val="1A1A1A"/>
-                </a:solidFill>
-                <a:latin typeface="Calibri"/>
-              </a:rPr>
-              <a:t>FY2024</a:t>
-            </a:r>
-          </a:p>
-        </p:txBody>
-      </p:sp>
-      <p:sp>
-        <p:nvSpPr>
-          <p:cNvPr id="26" name="Rectangle 25"/>
-          <p:cNvSpPr/>
-          <p:nvPr/>
-        </p:nvSpPr>
-        <p:spPr>
-          <a:xfrm>
-            <a:off x="4023360" y="2944368"/>
-            <a:ext cx="1100903" cy="73152"/>
-          </a:xfrm>
-          <a:prstGeom prst="rect">
-            <a:avLst/>
-          </a:prstGeom>
-          <a:solidFill>
-            <a:srgbClr val="EFE8DC"/>
-          </a:solidFill>
-          <a:ln>
-            <a:noFill/>
-          </a:ln>
-        </p:spPr>
-        <p:style>
-          <a:lnRef idx="1">
-            <a:schemeClr val="accent1"/>
-          </a:lnRef>
-          <a:fillRef idx="3">
-            <a:schemeClr val="accent1"/>
-          </a:fillRef>
-          <a:effectRef idx="2">
-            <a:schemeClr val="accent1"/>
-          </a:effectRef>
-          <a:fontRef idx="minor">
-            <a:schemeClr val="lt1"/>
-          </a:fontRef>
-        </p:style>
-        <p:txBody>
-          <a:bodyPr rtlCol="0" anchor="ctr"/>
-          <a:lstStyle/>
-          <a:p>
-            <a:pPr algn="ctr"/>
-          </a:p>
-        </p:txBody>
-      </p:sp>
-      <p:sp>
-        <p:nvSpPr>
-          <p:cNvPr id="27" name="Oval 26"/>
-          <p:cNvSpPr/>
-          <p:nvPr/>
-        </p:nvSpPr>
-        <p:spPr>
-          <a:xfrm>
-            <a:off x="5078543" y="2926079"/>
-            <a:ext cx="91440" cy="109728"/>
-          </a:xfrm>
-          <a:prstGeom prst="ellipse">
-            <a:avLst/>
-          </a:prstGeom>
-          <a:solidFill>
-            <a:srgbClr val="7E6849"/>
-          </a:solidFill>
-          <a:ln>
-            <a:noFill/>
-          </a:ln>
-        </p:spPr>
-        <p:style>
-          <a:lnRef idx="1">
-            <a:schemeClr val="accent1"/>
-          </a:lnRef>
-          <a:fillRef idx="3">
-            <a:schemeClr val="accent1"/>
-          </a:fillRef>
-          <a:effectRef idx="2">
-            <a:schemeClr val="accent1"/>
-          </a:effectRef>
-          <a:fontRef idx="minor">
-            <a:schemeClr val="lt1"/>
-          </a:fontRef>
-        </p:style>
-        <p:txBody>
-          <a:bodyPr rtlCol="0" anchor="ctr"/>
-          <a:lstStyle/>
-          <a:p>
-            <a:pPr algn="ctr"/>
-          </a:p>
-        </p:txBody>
-      </p:sp>
-      <p:sp>
-        <p:nvSpPr>
-          <p:cNvPr id="28" name="TextBox 27"/>
-          <p:cNvSpPr txBox="1"/>
-          <p:nvPr/>
-        </p:nvSpPr>
-        <p:spPr>
-          <a:xfrm>
-            <a:off x="5169983" y="2907791"/>
-            <a:ext cx="411480" cy="182880"/>
-          </a:xfrm>
-          <a:prstGeom prst="rect">
-            <a:avLst/>
-          </a:prstGeom>
-          <a:noFill/>
-        </p:spPr>
-        <p:txBody>
-          <a:bodyPr wrap="square" lIns="0" rIns="0" tIns="0" bIns="0" anchor="t">
-            <a:spAutoFit/>
-          </a:bodyPr>
-          <a:lstStyle/>
-          <a:p>
-            <a:pPr algn="l"/>
-            <a:r>
-              <a:rPr sz="1000" b="0">
-                <a:solidFill>
-                  <a:srgbClr val="1A1A1A"/>
-                </a:solidFill>
-                <a:latin typeface="Calibri"/>
-              </a:rPr>
-              <a:t>19.1x</a:t>
-            </a:r>
-          </a:p>
-        </p:txBody>
-      </p:sp>
-      <p:sp>
-        <p:nvSpPr>
-          <p:cNvPr id="29" name="TextBox 28"/>
-          <p:cNvSpPr txBox="1"/>
-          <p:nvPr/>
-        </p:nvSpPr>
-        <p:spPr>
-          <a:xfrm>
-            <a:off x="3520440" y="3163824"/>
-            <a:ext cx="502920" cy="182880"/>
-          </a:xfrm>
-          <a:prstGeom prst="rect">
-            <a:avLst/>
-          </a:prstGeom>
-          <a:noFill/>
-        </p:spPr>
-        <p:txBody>
-          <a:bodyPr wrap="square" lIns="0" rIns="0" tIns="0" bIns="0" anchor="t">
-            <a:spAutoFit/>
-          </a:bodyPr>
-          <a:lstStyle/>
-          <a:p>
-            <a:pPr algn="l"/>
-            <a:r>
-              <a:rPr sz="1000" b="0">
-                <a:solidFill>
-                  <a:srgbClr val="1A1A1A"/>
-                </a:solidFill>
-                <a:latin typeface="Calibri"/>
-              </a:rPr>
-              <a:t>FY2025</a:t>
-            </a:r>
-          </a:p>
-        </p:txBody>
-      </p:sp>
-      <p:sp>
-        <p:nvSpPr>
-          <p:cNvPr id="30" name="Rectangle 29"/>
-          <p:cNvSpPr/>
-          <p:nvPr/>
-        </p:nvSpPr>
-        <p:spPr>
-          <a:xfrm>
-            <a:off x="4023360" y="3218688"/>
-            <a:ext cx="1288405" cy="73152"/>
-          </a:xfrm>
-          <a:prstGeom prst="rect">
-            <a:avLst/>
-          </a:prstGeom>
-          <a:solidFill>
-            <a:srgbClr val="EFE8DC"/>
-          </a:solidFill>
-          <a:ln>
-            <a:noFill/>
-          </a:ln>
-        </p:spPr>
-        <p:style>
-          <a:lnRef idx="1">
-            <a:schemeClr val="accent1"/>
-          </a:lnRef>
-          <a:fillRef idx="3">
-            <a:schemeClr val="accent1"/>
-          </a:fillRef>
-          <a:effectRef idx="2">
-            <a:schemeClr val="accent1"/>
-          </a:effectRef>
-          <a:fontRef idx="minor">
-            <a:schemeClr val="lt1"/>
-          </a:fontRef>
-        </p:style>
-        <p:txBody>
-          <a:bodyPr rtlCol="0" anchor="ctr"/>
-          <a:lstStyle/>
-          <a:p>
-            <a:pPr algn="ctr"/>
-          </a:p>
-        </p:txBody>
-      </p:sp>
-      <p:sp>
-        <p:nvSpPr>
-          <p:cNvPr id="31" name="Oval 30"/>
-          <p:cNvSpPr/>
-          <p:nvPr/>
-        </p:nvSpPr>
-        <p:spPr>
-          <a:xfrm>
-            <a:off x="5266045" y="3200400"/>
-            <a:ext cx="91440" cy="109728"/>
-          </a:xfrm>
-          <a:prstGeom prst="ellipse">
-            <a:avLst/>
-          </a:prstGeom>
-          <a:solidFill>
-            <a:srgbClr val="7E6849"/>
-          </a:solidFill>
-          <a:ln>
-            <a:noFill/>
-          </a:ln>
-        </p:spPr>
-        <p:style>
-          <a:lnRef idx="1">
-            <a:schemeClr val="accent1"/>
-          </a:lnRef>
-          <a:fillRef idx="3">
-            <a:schemeClr val="accent1"/>
-          </a:fillRef>
-          <a:effectRef idx="2">
-            <a:schemeClr val="accent1"/>
-          </a:effectRef>
-          <a:fontRef idx="minor">
-            <a:schemeClr val="lt1"/>
-          </a:fontRef>
-        </p:style>
-        <p:txBody>
-          <a:bodyPr rtlCol="0" anchor="ctr"/>
-          <a:lstStyle/>
-          <a:p>
-            <a:pPr algn="ctr"/>
-          </a:p>
-        </p:txBody>
-      </p:sp>
-      <p:sp>
-        <p:nvSpPr>
-          <p:cNvPr id="32" name="TextBox 31"/>
-          <p:cNvSpPr txBox="1"/>
-          <p:nvPr/>
-        </p:nvSpPr>
-        <p:spPr>
-          <a:xfrm>
-            <a:off x="5357485" y="3182112"/>
-            <a:ext cx="411480" cy="182880"/>
-          </a:xfrm>
-          <a:prstGeom prst="rect">
-            <a:avLst/>
-          </a:prstGeom>
-          <a:noFill/>
-        </p:spPr>
-        <p:txBody>
-          <a:bodyPr wrap="square" lIns="0" rIns="0" tIns="0" bIns="0" anchor="t">
-            <a:spAutoFit/>
-          </a:bodyPr>
-          <a:lstStyle/>
-          <a:p>
-            <a:pPr algn="l"/>
-            <a:r>
-              <a:rPr sz="1000" b="0">
-                <a:solidFill>
-                  <a:srgbClr val="1A1A1A"/>
-                </a:solidFill>
-                <a:latin typeface="Calibri"/>
-              </a:rPr>
-              <a:t>20.5x</a:t>
-            </a:r>
-          </a:p>
-        </p:txBody>
-      </p:sp>
-      <p:sp>
-        <p:nvSpPr>
-          <p:cNvPr id="33" name="TextBox 32"/>
-          <p:cNvSpPr txBox="1"/>
-          <p:nvPr/>
-        </p:nvSpPr>
-        <p:spPr>
-          <a:xfrm>
-            <a:off x="3520440" y="3438144"/>
-            <a:ext cx="502920" cy="182880"/>
-          </a:xfrm>
-          <a:prstGeom prst="rect">
-            <a:avLst/>
-          </a:prstGeom>
-          <a:noFill/>
-        </p:spPr>
-        <p:txBody>
-          <a:bodyPr wrap="square" lIns="0" rIns="0" tIns="0" bIns="0" anchor="t">
-            <a:spAutoFit/>
-          </a:bodyPr>
-          <a:lstStyle/>
-          <a:p>
-            <a:pPr algn="l"/>
-            <a:r>
-              <a:rPr sz="1000" b="0">
-                <a:solidFill>
-                  <a:srgbClr val="1A1A1A"/>
-                </a:solidFill>
-                <a:latin typeface="Calibri"/>
-              </a:rPr>
-              <a:t>FY2026</a:t>
-            </a:r>
-          </a:p>
-        </p:txBody>
-      </p:sp>
-      <p:sp>
-        <p:nvSpPr>
-          <p:cNvPr id="34" name="Rectangle 33"/>
-          <p:cNvSpPr/>
-          <p:nvPr/>
-        </p:nvSpPr>
-        <p:spPr>
-          <a:xfrm>
-            <a:off x="4023360" y="3493008"/>
-            <a:ext cx="873223" cy="73152"/>
-          </a:xfrm>
-          <a:prstGeom prst="rect">
-            <a:avLst/>
-          </a:prstGeom>
-          <a:solidFill>
-            <a:srgbClr val="EFE8DC"/>
-          </a:solidFill>
-          <a:ln>
-            <a:noFill/>
-          </a:ln>
-        </p:spPr>
-        <p:style>
-          <a:lnRef idx="1">
-            <a:schemeClr val="accent1"/>
-          </a:lnRef>
-          <a:fillRef idx="3">
-            <a:schemeClr val="accent1"/>
-          </a:fillRef>
-          <a:effectRef idx="2">
-            <a:schemeClr val="accent1"/>
-          </a:effectRef>
-          <a:fontRef idx="minor">
-            <a:schemeClr val="lt1"/>
-          </a:fontRef>
-        </p:style>
-        <p:txBody>
-          <a:bodyPr rtlCol="0" anchor="ctr"/>
-          <a:lstStyle/>
-          <a:p>
-            <a:pPr algn="ctr"/>
-          </a:p>
-        </p:txBody>
-      </p:sp>
-      <p:sp>
-        <p:nvSpPr>
-          <p:cNvPr id="35" name="Oval 34"/>
-          <p:cNvSpPr/>
-          <p:nvPr/>
-        </p:nvSpPr>
-        <p:spPr>
-          <a:xfrm>
-            <a:off x="4850863" y="3474720"/>
-            <a:ext cx="91440" cy="109728"/>
-          </a:xfrm>
-          <a:prstGeom prst="ellipse">
-            <a:avLst/>
-          </a:prstGeom>
-          <a:solidFill>
-            <a:srgbClr val="7E6849"/>
-          </a:solidFill>
-          <a:ln>
-            <a:noFill/>
-          </a:ln>
-        </p:spPr>
-        <p:style>
-          <a:lnRef idx="1">
-            <a:schemeClr val="accent1"/>
-          </a:lnRef>
-          <a:fillRef idx="3">
-            <a:schemeClr val="accent1"/>
-          </a:fillRef>
-          <a:effectRef idx="2">
-            <a:schemeClr val="accent1"/>
-          </a:effectRef>
-          <a:fontRef idx="minor">
-            <a:schemeClr val="lt1"/>
-          </a:fontRef>
-        </p:style>
-        <p:txBody>
-          <a:bodyPr rtlCol="0" anchor="ctr"/>
-          <a:lstStyle/>
-          <a:p>
-            <a:pPr algn="ctr"/>
-          </a:p>
-        </p:txBody>
-      </p:sp>
-      <p:sp>
-        <p:nvSpPr>
-          <p:cNvPr id="36" name="TextBox 35"/>
-          <p:cNvSpPr txBox="1"/>
-          <p:nvPr/>
-        </p:nvSpPr>
-        <p:spPr>
-          <a:xfrm>
-            <a:off x="4942303" y="3456432"/>
-            <a:ext cx="411480" cy="182880"/>
-          </a:xfrm>
-          <a:prstGeom prst="rect">
-            <a:avLst/>
-          </a:prstGeom>
-          <a:noFill/>
-        </p:spPr>
-        <p:txBody>
-          <a:bodyPr wrap="square" lIns="0" rIns="0" tIns="0" bIns="0" anchor="t">
-            <a:spAutoFit/>
-          </a:bodyPr>
-          <a:lstStyle/>
-          <a:p>
-            <a:pPr algn="l"/>
-            <a:r>
-              <a:rPr sz="1000" b="0">
-                <a:solidFill>
-                  <a:srgbClr val="1A1A1A"/>
-                </a:solidFill>
-                <a:latin typeface="Calibri"/>
-              </a:rPr>
-              <a:t>17.4x</a:t>
-            </a:r>
-          </a:p>
-        </p:txBody>
-      </p:sp>
-      <p:sp>
-        <p:nvSpPr>
-          <p:cNvPr id="37" name="TextBox 36"/>
-          <p:cNvSpPr txBox="1"/>
-          <p:nvPr/>
-        </p:nvSpPr>
-        <p:spPr>
-          <a:xfrm>
-            <a:off x="3520440" y="3712463"/>
-            <a:ext cx="502920" cy="182880"/>
-          </a:xfrm>
-          <a:prstGeom prst="rect">
-            <a:avLst/>
-          </a:prstGeom>
-          <a:noFill/>
-        </p:spPr>
-        <p:txBody>
-          <a:bodyPr wrap="square" lIns="0" rIns="0" tIns="0" bIns="0" anchor="t">
-            <a:spAutoFit/>
-          </a:bodyPr>
-          <a:lstStyle/>
-          <a:p>
-            <a:pPr algn="l"/>
-            <a:r>
-              <a:rPr sz="1000" b="0">
-                <a:solidFill>
-                  <a:srgbClr val="1A1A1A"/>
-                </a:solidFill>
-                <a:latin typeface="Calibri"/>
-              </a:rPr>
-              <a:t>FY2027</a:t>
-            </a:r>
-          </a:p>
-        </p:txBody>
-      </p:sp>
-      <p:sp>
-        <p:nvSpPr>
-          <p:cNvPr id="38" name="Rectangle 37"/>
-          <p:cNvSpPr/>
-          <p:nvPr/>
-        </p:nvSpPr>
-        <p:spPr>
-          <a:xfrm>
-            <a:off x="4023360" y="3767327"/>
-            <a:ext cx="645542" cy="73152"/>
-          </a:xfrm>
-          <a:prstGeom prst="rect">
-            <a:avLst/>
-          </a:prstGeom>
-          <a:solidFill>
-            <a:srgbClr val="EFE8DC"/>
-          </a:solidFill>
-          <a:ln>
-            <a:noFill/>
-          </a:ln>
-        </p:spPr>
-        <p:style>
-          <a:lnRef idx="1">
-            <a:schemeClr val="accent1"/>
-          </a:lnRef>
-          <a:fillRef idx="3">
-            <a:schemeClr val="accent1"/>
-          </a:fillRef>
-          <a:effectRef idx="2">
-            <a:schemeClr val="accent1"/>
-          </a:effectRef>
-          <a:fontRef idx="minor">
-            <a:schemeClr val="lt1"/>
-          </a:fontRef>
-        </p:style>
-        <p:txBody>
-          <a:bodyPr rtlCol="0" anchor="ctr"/>
-          <a:lstStyle/>
-          <a:p>
-            <a:pPr algn="ctr"/>
-          </a:p>
-        </p:txBody>
-      </p:sp>
-      <p:sp>
-        <p:nvSpPr>
-          <p:cNvPr id="39" name="Oval 38"/>
-          <p:cNvSpPr/>
-          <p:nvPr/>
-        </p:nvSpPr>
-        <p:spPr>
-          <a:xfrm>
-            <a:off x="4623182" y="3749039"/>
-            <a:ext cx="91440" cy="109728"/>
-          </a:xfrm>
-          <a:prstGeom prst="ellipse">
-            <a:avLst/>
-          </a:prstGeom>
-          <a:solidFill>
-            <a:srgbClr val="7E6849"/>
-          </a:solidFill>
-          <a:ln>
-            <a:noFill/>
-          </a:ln>
-        </p:spPr>
-        <p:style>
-          <a:lnRef idx="1">
-            <a:schemeClr val="accent1"/>
-          </a:lnRef>
-          <a:fillRef idx="3">
-            <a:schemeClr val="accent1"/>
-          </a:fillRef>
-          <a:effectRef idx="2">
-            <a:schemeClr val="accent1"/>
-          </a:effectRef>
-          <a:fontRef idx="minor">
-            <a:schemeClr val="lt1"/>
-          </a:fontRef>
-        </p:style>
-        <p:txBody>
-          <a:bodyPr rtlCol="0" anchor="ctr"/>
-          <a:lstStyle/>
-          <a:p>
-            <a:pPr algn="ctr"/>
-          </a:p>
-        </p:txBody>
-      </p:sp>
-      <p:sp>
-        <p:nvSpPr>
-          <p:cNvPr id="40" name="TextBox 39"/>
-          <p:cNvSpPr txBox="1"/>
-          <p:nvPr/>
-        </p:nvSpPr>
-        <p:spPr>
-          <a:xfrm>
-            <a:off x="4714622" y="3730751"/>
-            <a:ext cx="411480" cy="182880"/>
-          </a:xfrm>
-          <a:prstGeom prst="rect">
-            <a:avLst/>
-          </a:prstGeom>
-          <a:noFill/>
-        </p:spPr>
-        <p:txBody>
-          <a:bodyPr wrap="square" lIns="0" rIns="0" tIns="0" bIns="0" anchor="t">
-            <a:spAutoFit/>
-          </a:bodyPr>
-          <a:lstStyle/>
-          <a:p>
-            <a:pPr algn="l"/>
-            <a:r>
-              <a:rPr sz="1000" b="0">
-                <a:solidFill>
-                  <a:srgbClr val="1A1A1A"/>
-                </a:solidFill>
-                <a:latin typeface="Calibri"/>
-              </a:rPr>
-              <a:t>15.7x</a:t>
-            </a:r>
-          </a:p>
-        </p:txBody>
-      </p:sp>
-      <p:sp>
-        <p:nvSpPr>
-          <p:cNvPr id="41" name="TextBox 40"/>
-          <p:cNvSpPr txBox="1"/>
-          <p:nvPr/>
-        </p:nvSpPr>
-        <p:spPr>
-          <a:xfrm>
-            <a:off x="3520440" y="3986783"/>
-            <a:ext cx="502920" cy="182880"/>
-          </a:xfrm>
-          <a:prstGeom prst="rect">
-            <a:avLst/>
-          </a:prstGeom>
-          <a:noFill/>
-        </p:spPr>
-        <p:txBody>
-          <a:bodyPr wrap="square" lIns="0" rIns="0" tIns="0" bIns="0" anchor="t">
-            <a:spAutoFit/>
-          </a:bodyPr>
-          <a:lstStyle/>
-          <a:p>
-            <a:pPr algn="l"/>
-            <a:r>
-              <a:rPr sz="1000" b="0">
-                <a:solidFill>
-                  <a:srgbClr val="1A1A1A"/>
-                </a:solidFill>
-                <a:latin typeface="Calibri"/>
-              </a:rPr>
-              <a:t>FY2028</a:t>
-            </a:r>
-          </a:p>
-        </p:txBody>
-      </p:sp>
-      <p:sp>
-        <p:nvSpPr>
-          <p:cNvPr id="42" name="Rectangle 41"/>
-          <p:cNvSpPr/>
-          <p:nvPr/>
-        </p:nvSpPr>
-        <p:spPr>
-          <a:xfrm>
-            <a:off x="4023360" y="4041647"/>
-            <a:ext cx="364289" cy="73152"/>
-          </a:xfrm>
-          <a:prstGeom prst="rect">
-            <a:avLst/>
-          </a:prstGeom>
-          <a:solidFill>
-            <a:srgbClr val="EFE8DC"/>
-          </a:solidFill>
-          <a:ln>
-            <a:noFill/>
-          </a:ln>
-        </p:spPr>
-        <p:style>
-          <a:lnRef idx="1">
-            <a:schemeClr val="accent1"/>
-          </a:lnRef>
-          <a:fillRef idx="3">
-            <a:schemeClr val="accent1"/>
-          </a:fillRef>
-          <a:effectRef idx="2">
-            <a:schemeClr val="accent1"/>
-          </a:effectRef>
-          <a:fontRef idx="minor">
-            <a:schemeClr val="lt1"/>
-          </a:fontRef>
-        </p:style>
-        <p:txBody>
-          <a:bodyPr rtlCol="0" anchor="ctr"/>
-          <a:lstStyle/>
-          <a:p>
-            <a:pPr algn="ctr"/>
-          </a:p>
-        </p:txBody>
-      </p:sp>
-      <p:sp>
-        <p:nvSpPr>
-          <p:cNvPr id="43" name="Oval 42"/>
-          <p:cNvSpPr/>
-          <p:nvPr/>
-        </p:nvSpPr>
-        <p:spPr>
-          <a:xfrm>
-            <a:off x="4341929" y="4023359"/>
-            <a:ext cx="91440" cy="109728"/>
-          </a:xfrm>
-          <a:prstGeom prst="ellipse">
-            <a:avLst/>
-          </a:prstGeom>
-          <a:solidFill>
-            <a:srgbClr val="7E6849"/>
-          </a:solidFill>
-          <a:ln>
-            <a:noFill/>
-          </a:ln>
-        </p:spPr>
-        <p:style>
-          <a:lnRef idx="1">
-            <a:schemeClr val="accent1"/>
-          </a:lnRef>
-          <a:fillRef idx="3">
-            <a:schemeClr val="accent1"/>
-          </a:fillRef>
-          <a:effectRef idx="2">
-            <a:schemeClr val="accent1"/>
-          </a:effectRef>
-          <a:fontRef idx="minor">
-            <a:schemeClr val="lt1"/>
-          </a:fontRef>
-        </p:style>
-        <p:txBody>
-          <a:bodyPr rtlCol="0" anchor="ctr"/>
-          <a:lstStyle/>
-          <a:p>
-            <a:pPr algn="ctr"/>
-          </a:p>
-        </p:txBody>
-      </p:sp>
-      <p:sp>
-        <p:nvSpPr>
-          <p:cNvPr id="44" name="TextBox 43"/>
-          <p:cNvSpPr txBox="1"/>
-          <p:nvPr/>
-        </p:nvSpPr>
-        <p:spPr>
-          <a:xfrm>
-            <a:off x="4433369" y="4005071"/>
-            <a:ext cx="411480" cy="182880"/>
-          </a:xfrm>
-          <a:prstGeom prst="rect">
-            <a:avLst/>
-          </a:prstGeom>
-          <a:noFill/>
-        </p:spPr>
-        <p:txBody>
-          <a:bodyPr wrap="square" lIns="0" rIns="0" tIns="0" bIns="0" anchor="t">
-            <a:spAutoFit/>
-          </a:bodyPr>
-          <a:lstStyle/>
-          <a:p>
-            <a:pPr algn="l"/>
-            <a:r>
-              <a:rPr sz="1000" b="0">
-                <a:solidFill>
-                  <a:srgbClr val="1A1A1A"/>
-                </a:solidFill>
-                <a:latin typeface="Calibri"/>
-              </a:rPr>
-              <a:t>13.6x</a:t>
-            </a:r>
-          </a:p>
-        </p:txBody>
-      </p:sp>
-      <p:sp>
-        <p:nvSpPr>
-          <p:cNvPr id="45" name="TextBox 44"/>
-          <p:cNvSpPr txBox="1"/>
-          <p:nvPr/>
-        </p:nvSpPr>
-        <p:spPr>
-          <a:xfrm>
-            <a:off x="3886200" y="4297680"/>
-            <a:ext cx="365760" cy="164592"/>
-          </a:xfrm>
-          <a:prstGeom prst="rect">
-            <a:avLst/>
-          </a:prstGeom>
-          <a:noFill/>
-        </p:spPr>
-        <p:txBody>
-          <a:bodyPr wrap="square" lIns="0" rIns="0" tIns="0" bIns="0" anchor="t">
-            <a:spAutoFit/>
-          </a:bodyPr>
-          <a:lstStyle/>
-          <a:p>
-            <a:pPr algn="l"/>
-            <a:r>
-              <a:rPr sz="700" b="0">
-                <a:solidFill>
-                  <a:srgbClr val="9A9A9A"/>
-                </a:solidFill>
-                <a:latin typeface="Calibri"/>
-              </a:rPr>
-              <a:t>11x</a:t>
-            </a:r>
-          </a:p>
-        </p:txBody>
-      </p:sp>
-      <p:sp>
-        <p:nvSpPr>
-          <p:cNvPr id="46" name="TextBox 45"/>
-          <p:cNvSpPr txBox="1"/>
-          <p:nvPr/>
-        </p:nvSpPr>
-        <p:spPr>
-          <a:xfrm>
-            <a:off x="4663440" y="4297680"/>
-            <a:ext cx="365760" cy="164592"/>
-          </a:xfrm>
-          <a:prstGeom prst="rect">
-            <a:avLst/>
-          </a:prstGeom>
-          <a:noFill/>
-        </p:spPr>
-        <p:txBody>
-          <a:bodyPr wrap="square" lIns="0" rIns="0" tIns="0" bIns="0" anchor="t">
-            <a:spAutoFit/>
-          </a:bodyPr>
-          <a:lstStyle/>
-          <a:p>
-            <a:pPr algn="l"/>
-            <a:r>
-              <a:rPr sz="700" b="0">
-                <a:solidFill>
-                  <a:srgbClr val="9A9A9A"/>
-                </a:solidFill>
-                <a:latin typeface="Calibri"/>
-              </a:rPr>
-              <a:t>17x</a:t>
-            </a:r>
-          </a:p>
-        </p:txBody>
-      </p:sp>
-      <p:sp>
-        <p:nvSpPr>
-          <p:cNvPr id="47" name="TextBox 46"/>
-          <p:cNvSpPr txBox="1"/>
-          <p:nvPr/>
-        </p:nvSpPr>
-        <p:spPr>
-          <a:xfrm>
-            <a:off x="5440679" y="4297680"/>
-            <a:ext cx="365760" cy="164592"/>
-          </a:xfrm>
-          <a:prstGeom prst="rect">
-            <a:avLst/>
-          </a:prstGeom>
-          <a:noFill/>
-        </p:spPr>
-        <p:txBody>
-          <a:bodyPr wrap="square" lIns="0" rIns="0" tIns="0" bIns="0" anchor="t">
-            <a:spAutoFit/>
-          </a:bodyPr>
-          <a:lstStyle/>
-          <a:p>
-            <a:pPr algn="l"/>
-            <a:r>
-              <a:rPr sz="700" b="0">
-                <a:solidFill>
-                  <a:srgbClr val="9A9A9A"/>
-                </a:solidFill>
-                <a:latin typeface="Calibri"/>
-              </a:rPr>
-              <a:t>22x</a:t>
-            </a:r>
-          </a:p>
-        </p:txBody>
-      </p:sp>
-      <p:sp>
-        <p:nvSpPr>
-          <p:cNvPr id="48" name="TextBox 47"/>
-          <p:cNvSpPr txBox="1"/>
-          <p:nvPr/>
-        </p:nvSpPr>
-        <p:spPr>
-          <a:xfrm>
-            <a:off x="6217920" y="4297680"/>
-            <a:ext cx="365760" cy="164592"/>
-          </a:xfrm>
-          <a:prstGeom prst="rect">
-            <a:avLst/>
-          </a:prstGeom>
-          <a:noFill/>
-        </p:spPr>
-        <p:txBody>
-          <a:bodyPr wrap="square" lIns="0" rIns="0" tIns="0" bIns="0" anchor="t">
-            <a:spAutoFit/>
-          </a:bodyPr>
-          <a:lstStyle/>
-          <a:p>
-            <a:pPr algn="l"/>
-            <a:r>
-              <a:rPr sz="700" b="0">
-                <a:solidFill>
-                  <a:srgbClr val="9A9A9A"/>
-                </a:solidFill>
-                <a:latin typeface="Calibri"/>
-              </a:rPr>
-              <a:t>28x</a:t>
-            </a:r>
-          </a:p>
-        </p:txBody>
-      </p:sp>
-      <p:sp>
-        <p:nvSpPr>
-          <p:cNvPr id="49" name="Diamond 48"/>
-          <p:cNvSpPr/>
-          <p:nvPr/>
-        </p:nvSpPr>
-        <p:spPr>
-          <a:xfrm>
-            <a:off x="4314497" y="4242816"/>
-            <a:ext cx="146304" cy="146304"/>
-          </a:xfrm>
-          <a:prstGeom prst="diamond">
-            <a:avLst/>
-          </a:prstGeom>
-          <a:solidFill>
-            <a:srgbClr val="1A1A1A"/>
-          </a:solidFill>
-          <a:ln>
-            <a:noFill/>
-          </a:ln>
-        </p:spPr>
-        <p:style>
-          <a:lnRef idx="1">
-            <a:schemeClr val="accent1"/>
-          </a:lnRef>
-          <a:fillRef idx="3">
-            <a:schemeClr val="accent1"/>
-          </a:fillRef>
-          <a:effectRef idx="2">
-            <a:schemeClr val="accent1"/>
-          </a:effectRef>
-          <a:fontRef idx="minor">
-            <a:schemeClr val="lt1"/>
-          </a:fontRef>
-        </p:style>
-        <p:txBody>
-          <a:bodyPr rtlCol="0" anchor="ctr"/>
-          <a:lstStyle/>
-          <a:p>
-            <a:pPr algn="ctr"/>
-          </a:p>
-        </p:txBody>
-      </p:sp>
-      <p:sp>
-        <p:nvSpPr>
-          <p:cNvPr id="50" name="TextBox 49"/>
-          <p:cNvSpPr txBox="1"/>
-          <p:nvPr/>
-        </p:nvSpPr>
-        <p:spPr>
-          <a:xfrm>
-            <a:off x="4479089" y="4224528"/>
-            <a:ext cx="1280160" cy="164592"/>
-          </a:xfrm>
-          <a:prstGeom prst="rect">
-            <a:avLst/>
-          </a:prstGeom>
-          <a:noFill/>
-        </p:spPr>
-        <p:txBody>
-          <a:bodyPr wrap="square" lIns="0" rIns="0" tIns="0" bIns="0" anchor="t">
-            <a:spAutoFit/>
-          </a:bodyPr>
-          <a:lstStyle/>
-          <a:p>
-            <a:pPr algn="l"/>
-            <a:r>
-              <a:rPr sz="700" b="0">
-                <a:solidFill>
-                  <a:srgbClr val="1A1A1A"/>
-                </a:solidFill>
-                <a:latin typeface="Calibri"/>
-              </a:rPr>
-              <a:t>Current  (13.6x)</a:t>
-            </a:r>
-          </a:p>
-        </p:txBody>
-      </p:sp>
-      <p:sp>
-        <p:nvSpPr>
-          <p:cNvPr id="51" name="Rectangle 50"/>
           <p:cNvSpPr/>
           <p:nvPr/>
         </p:nvSpPr>
@@ -11827,7 +9610,7 @@
       </p:sp>
       <p:sp>
         <p:nvSpPr>
-          <p:cNvPr id="52" name="TextBox 51"/>
+          <p:cNvPr id="15" name="TextBox 14"/>
           <p:cNvSpPr txBox="1"/>
           <p:nvPr/>
         </p:nvSpPr>
@@ -11855,14 +9638,14 @@
                 </a:solidFill>
                 <a:latin typeface="Calibri"/>
               </a:rPr>
-              <a:t>PEER COMPARABLES  ·  SELECTED GLOBAL PEERS</a:t>
-            </a:r>
-          </a:p>
-        </p:txBody>
-      </p:sp>
-      <p:sp>
-        <p:nvSpPr>
-          <p:cNvPr id="53" name="TextBox 52"/>
+              <a:t>PEER COMPARABLES  ·  INDIA BANK PEERS</a:t>
+            </a:r>
+          </a:p>
+        </p:txBody>
+      </p:sp>
+      <p:sp>
+        <p:nvSpPr>
+          <p:cNvPr id="16" name="TextBox 15"/>
           <p:cNvSpPr txBox="1"/>
           <p:nvPr/>
         </p:nvSpPr>
@@ -11897,7 +9680,7 @@
       </p:sp>
       <p:sp>
         <p:nvSpPr>
-          <p:cNvPr id="54" name="TextBox 53"/>
+          <p:cNvPr id="17" name="TextBox 16"/>
           <p:cNvSpPr txBox="1"/>
           <p:nvPr/>
         </p:nvSpPr>
@@ -11932,7 +9715,7 @@
       </p:sp>
       <p:sp>
         <p:nvSpPr>
-          <p:cNvPr id="55" name="TextBox 54"/>
+          <p:cNvPr id="18" name="TextBox 17"/>
           <p:cNvSpPr txBox="1"/>
           <p:nvPr/>
         </p:nvSpPr>
@@ -11967,7 +9750,7 @@
       </p:sp>
       <p:sp>
         <p:nvSpPr>
-          <p:cNvPr id="56" name="TextBox 55"/>
+          <p:cNvPr id="19" name="TextBox 18"/>
           <p:cNvSpPr txBox="1"/>
           <p:nvPr/>
         </p:nvSpPr>
@@ -12002,7 +9785,7 @@
       </p:sp>
       <p:sp>
         <p:nvSpPr>
-          <p:cNvPr id="57" name="TextBox 56"/>
+          <p:cNvPr id="20" name="TextBox 19"/>
           <p:cNvSpPr txBox="1"/>
           <p:nvPr/>
         </p:nvSpPr>
@@ -12037,7 +9820,7 @@
       </p:sp>
       <p:sp>
         <p:nvSpPr>
-          <p:cNvPr id="58" name="TextBox 57"/>
+          <p:cNvPr id="21" name="TextBox 20"/>
           <p:cNvSpPr txBox="1"/>
           <p:nvPr/>
         </p:nvSpPr>
@@ -12072,7 +9855,7 @@
       </p:sp>
       <p:sp>
         <p:nvSpPr>
-          <p:cNvPr id="59" name="Rectangle 58"/>
+          <p:cNvPr id="22" name="Rectangle 21"/>
           <p:cNvSpPr/>
           <p:nvPr/>
         </p:nvSpPr>
@@ -12116,217 +9899,7 @@
       </p:sp>
       <p:sp>
         <p:nvSpPr>
-          <p:cNvPr id="60" name="TextBox 59"/>
-          <p:cNvSpPr txBox="1"/>
-          <p:nvPr/>
-        </p:nvSpPr>
-        <p:spPr>
-          <a:xfrm>
-            <a:off x="411480" y="5093208"/>
-            <a:ext cx="1874520" cy="256032"/>
-          </a:xfrm>
-          <a:prstGeom prst="rect">
-            <a:avLst/>
-          </a:prstGeom>
-          <a:noFill/>
-        </p:spPr>
-        <p:txBody>
-          <a:bodyPr wrap="square" lIns="0" rIns="0" tIns="0" bIns="0" anchor="t">
-            <a:spAutoFit/>
-          </a:bodyPr>
-          <a:lstStyle/>
-          <a:p>
-            <a:pPr algn="l"/>
-            <a:r>
-              <a:rPr sz="1000" b="0">
-                <a:solidFill>
-                  <a:srgbClr val="1A1A1A"/>
-                </a:solidFill>
-                <a:latin typeface="Calibri"/>
-              </a:rPr>
-              <a:t>iShares MSCI India ETF</a:t>
-            </a:r>
-          </a:p>
-        </p:txBody>
-      </p:sp>
-      <p:sp>
-        <p:nvSpPr>
-          <p:cNvPr id="61" name="TextBox 60"/>
-          <p:cNvSpPr txBox="1"/>
-          <p:nvPr/>
-        </p:nvSpPr>
-        <p:spPr>
-          <a:xfrm>
-            <a:off x="2331720" y="5093208"/>
-            <a:ext cx="960120" cy="256032"/>
-          </a:xfrm>
-          <a:prstGeom prst="rect">
-            <a:avLst/>
-          </a:prstGeom>
-          <a:noFill/>
-        </p:spPr>
-        <p:txBody>
-          <a:bodyPr wrap="square" lIns="0" rIns="0" tIns="0" bIns="0" anchor="t">
-            <a:spAutoFit/>
-          </a:bodyPr>
-          <a:lstStyle/>
-          <a:p>
-            <a:pPr algn="l"/>
-            <a:r>
-              <a:rPr sz="1000" b="0">
-                <a:solidFill>
-                  <a:srgbClr val="1A1A1A"/>
-                </a:solidFill>
-                <a:latin typeface="Calibri"/>
-              </a:rPr>
-              <a:t>INDA</a:t>
-            </a:r>
-          </a:p>
-        </p:txBody>
-      </p:sp>
-      <p:sp>
-        <p:nvSpPr>
-          <p:cNvPr id="62" name="TextBox 61"/>
-          <p:cNvSpPr txBox="1"/>
-          <p:nvPr/>
-        </p:nvSpPr>
-        <p:spPr>
-          <a:xfrm>
-            <a:off x="3337560" y="5093208"/>
-            <a:ext cx="960120" cy="256032"/>
-          </a:xfrm>
-          <a:prstGeom prst="rect">
-            <a:avLst/>
-          </a:prstGeom>
-          <a:noFill/>
-        </p:spPr>
-        <p:txBody>
-          <a:bodyPr wrap="square" lIns="0" rIns="0" tIns="0" bIns="0" anchor="t">
-            <a:spAutoFit/>
-          </a:bodyPr>
-          <a:lstStyle/>
-          <a:p>
-            <a:pPr algn="r"/>
-            <a:r>
-              <a:rPr sz="1000" b="0">
-                <a:solidFill>
-                  <a:srgbClr val="1A1A1A"/>
-                </a:solidFill>
-                <a:latin typeface="Calibri"/>
-              </a:rPr>
-              <a:t>$6.7B</a:t>
-            </a:r>
-          </a:p>
-        </p:txBody>
-      </p:sp>
-      <p:sp>
-        <p:nvSpPr>
-          <p:cNvPr id="63" name="TextBox 62"/>
-          <p:cNvSpPr txBox="1"/>
-          <p:nvPr/>
-        </p:nvSpPr>
-        <p:spPr>
-          <a:xfrm>
-            <a:off x="4343400" y="5093208"/>
-            <a:ext cx="594359" cy="256032"/>
-          </a:xfrm>
-          <a:prstGeom prst="rect">
-            <a:avLst/>
-          </a:prstGeom>
-          <a:noFill/>
-        </p:spPr>
-        <p:txBody>
-          <a:bodyPr wrap="square" lIns="0" rIns="0" tIns="0" bIns="0" anchor="t">
-            <a:spAutoFit/>
-          </a:bodyPr>
-          <a:lstStyle/>
-          <a:p>
-            <a:pPr algn="r"/>
-            <a:r>
-              <a:rPr sz="1000" b="0">
-                <a:solidFill>
-                  <a:srgbClr val="1A1A1A"/>
-                </a:solidFill>
-                <a:latin typeface="Calibri"/>
-              </a:rPr>
-              <a:t>—</a:t>
-            </a:r>
-          </a:p>
-        </p:txBody>
-      </p:sp>
-      <p:sp>
-        <p:nvSpPr>
-          <p:cNvPr id="64" name="TextBox 63"/>
-          <p:cNvSpPr txBox="1"/>
-          <p:nvPr/>
-        </p:nvSpPr>
-        <p:spPr>
-          <a:xfrm>
-            <a:off x="4983480" y="5093208"/>
-            <a:ext cx="685800" cy="256032"/>
-          </a:xfrm>
-          <a:prstGeom prst="rect">
-            <a:avLst/>
-          </a:prstGeom>
-          <a:noFill/>
-        </p:spPr>
-        <p:txBody>
-          <a:bodyPr wrap="square" lIns="0" rIns="0" tIns="0" bIns="0" anchor="t">
-            <a:spAutoFit/>
-          </a:bodyPr>
-          <a:lstStyle/>
-          <a:p>
-            <a:pPr algn="r"/>
-            <a:r>
-              <a:rPr sz="1000" b="0">
-                <a:solidFill>
-                  <a:srgbClr val="1A1A1A"/>
-                </a:solidFill>
-                <a:latin typeface="Calibri"/>
-              </a:rPr>
-              <a:t>+2.5% YTD</a:t>
-            </a:r>
-          </a:p>
-        </p:txBody>
-      </p:sp>
-      <p:sp>
-        <p:nvSpPr>
-          <p:cNvPr id="65" name="TextBox 64"/>
-          <p:cNvSpPr txBox="1"/>
-          <p:nvPr/>
-        </p:nvSpPr>
-        <p:spPr>
-          <a:xfrm>
-            <a:off x="5715000" y="5093208"/>
-            <a:ext cx="685800" cy="256032"/>
-          </a:xfrm>
-          <a:prstGeom prst="rect">
-            <a:avLst/>
-          </a:prstGeom>
-          <a:noFill/>
-        </p:spPr>
-        <p:txBody>
-          <a:bodyPr wrap="square" lIns="0" rIns="0" tIns="0" bIns="0" anchor="t">
-            <a:spAutoFit/>
-          </a:bodyPr>
-          <a:lstStyle/>
-          <a:p>
-            <a:pPr algn="r"/>
-            <a:r>
-              <a:rPr sz="1000" b="0">
-                <a:solidFill>
-                  <a:srgbClr val="B83227"/>
-                </a:solidFill>
-                <a:latin typeface="Calibri"/>
-              </a:rPr>
-              <a:t>-10.7%</a:t>
-            </a:r>
-          </a:p>
-        </p:txBody>
-      </p:sp>
-      <p:sp>
-        <p:nvSpPr>
-          <p:cNvPr id="66" name="Rectangle 65"/>
+          <p:cNvPr id="23" name="Rectangle 22"/>
           <p:cNvSpPr/>
           <p:nvPr/>
         </p:nvSpPr>
@@ -12370,7 +9943,7 @@
       </p:sp>
       <p:sp>
         <p:nvSpPr>
-          <p:cNvPr id="67" name="TextBox 66"/>
+          <p:cNvPr id="24" name="TextBox 23"/>
           <p:cNvSpPr txBox="1"/>
           <p:nvPr/>
         </p:nvSpPr>
@@ -12405,7 +9978,7 @@
       </p:sp>
       <p:sp>
         <p:nvSpPr>
-          <p:cNvPr id="68" name="Rectangle 67"/>
+          <p:cNvPr id="25" name="Rectangle 24"/>
           <p:cNvSpPr/>
           <p:nvPr/>
         </p:nvSpPr>
@@ -12451,7 +10024,7 @@
       </p:sp>
       <p:sp>
         <p:nvSpPr>
-          <p:cNvPr id="69" name="Rectangle 68"/>
+          <p:cNvPr id="26" name="Rectangle 25"/>
           <p:cNvSpPr/>
           <p:nvPr/>
         </p:nvSpPr>
@@ -12495,7 +10068,7 @@
       </p:sp>
       <p:sp>
         <p:nvSpPr>
-          <p:cNvPr id="70" name="TextBox 69"/>
+          <p:cNvPr id="27" name="TextBox 26"/>
           <p:cNvSpPr txBox="1"/>
           <p:nvPr/>
         </p:nvSpPr>
@@ -12530,7 +10103,7 @@
       </p:sp>
       <p:sp>
         <p:nvSpPr>
-          <p:cNvPr id="71" name="Rectangle 70"/>
+          <p:cNvPr id="28" name="Rectangle 27"/>
           <p:cNvSpPr/>
           <p:nvPr/>
         </p:nvSpPr>
@@ -12573,7 +10146,7 @@
       </p:sp>
       <p:sp>
         <p:nvSpPr>
-          <p:cNvPr id="72" name="Rectangle 71"/>
+          <p:cNvPr id="29" name="Rectangle 28"/>
           <p:cNvSpPr/>
           <p:nvPr/>
         </p:nvSpPr>
@@ -12616,7 +10189,7 @@
       </p:sp>
       <p:sp>
         <p:nvSpPr>
-          <p:cNvPr id="73" name="TextBox 72"/>
+          <p:cNvPr id="30" name="TextBox 29"/>
           <p:cNvSpPr txBox="1"/>
           <p:nvPr/>
         </p:nvSpPr>
@@ -12651,7 +10224,7 @@
       </p:sp>
       <p:sp>
         <p:nvSpPr>
-          <p:cNvPr id="74" name="TextBox 73"/>
+          <p:cNvPr id="31" name="TextBox 30"/>
           <p:cNvSpPr txBox="1"/>
           <p:nvPr/>
         </p:nvSpPr>
@@ -12686,7 +10259,7 @@
       </p:sp>
       <p:sp>
         <p:nvSpPr>
-          <p:cNvPr id="75" name="Rectangle 74"/>
+          <p:cNvPr id="32" name="Rectangle 31"/>
           <p:cNvSpPr/>
           <p:nvPr/>
         </p:nvSpPr>
@@ -12732,7 +10305,7 @@
       </p:sp>
       <p:sp>
         <p:nvSpPr>
-          <p:cNvPr id="76" name="Rectangle 75"/>
+          <p:cNvPr id="33" name="Rectangle 32"/>
           <p:cNvSpPr/>
           <p:nvPr/>
         </p:nvSpPr>
@@ -12776,7 +10349,7 @@
       </p:sp>
       <p:sp>
         <p:nvSpPr>
-          <p:cNvPr id="77" name="TextBox 76"/>
+          <p:cNvPr id="34" name="TextBox 33"/>
           <p:cNvSpPr txBox="1"/>
           <p:nvPr/>
         </p:nvSpPr>
@@ -12811,7 +10384,7 @@
       </p:sp>
       <p:sp>
         <p:nvSpPr>
-          <p:cNvPr id="78" name="TextBox 77"/>
+          <p:cNvPr id="35" name="TextBox 34"/>
           <p:cNvSpPr txBox="1"/>
           <p:nvPr/>
         </p:nvSpPr>
@@ -12846,7 +10419,7 @@
       </p:sp>
       <p:sp>
         <p:nvSpPr>
-          <p:cNvPr id="79" name="TextBox 78"/>
+          <p:cNvPr id="36" name="TextBox 35"/>
           <p:cNvSpPr txBox="1"/>
           <p:nvPr/>
         </p:nvSpPr>
@@ -12881,7 +10454,7 @@
       </p:sp>
       <p:sp>
         <p:nvSpPr>
-          <p:cNvPr id="80" name="TextBox 79"/>
+          <p:cNvPr id="37" name="TextBox 36"/>
           <p:cNvSpPr txBox="1"/>
           <p:nvPr/>
         </p:nvSpPr>
@@ -12909,14 +10482,14 @@
                 </a:solidFill>
                 <a:latin typeface="Calibri"/>
               </a:rPr>
-              <a:t>Implied +35.2% vs last close</a:t>
-            </a:r>
-          </a:p>
-        </p:txBody>
-      </p:sp>
-      <p:sp>
-        <p:nvSpPr>
-          <p:cNvPr id="81" name="Rectangle 80"/>
+              <a:t>Implied +34.2% vs last close</a:t>
+            </a:r>
+          </a:p>
+        </p:txBody>
+      </p:sp>
+      <p:sp>
+        <p:nvSpPr>
+          <p:cNvPr id="38" name="Rectangle 37"/>
           <p:cNvSpPr/>
           <p:nvPr/>
         </p:nvSpPr>
@@ -12962,7 +10535,7 @@
       </p:sp>
       <p:sp>
         <p:nvSpPr>
-          <p:cNvPr id="82" name="Rectangle 81"/>
+          <p:cNvPr id="39" name="Rectangle 38"/>
           <p:cNvSpPr/>
           <p:nvPr/>
         </p:nvSpPr>
@@ -13006,7 +10579,7 @@
       </p:sp>
       <p:sp>
         <p:nvSpPr>
-          <p:cNvPr id="83" name="TextBox 82"/>
+          <p:cNvPr id="40" name="TextBox 39"/>
           <p:cNvSpPr txBox="1"/>
           <p:nvPr/>
         </p:nvSpPr>
@@ -13041,7 +10614,7 @@
       </p:sp>
       <p:sp>
         <p:nvSpPr>
-          <p:cNvPr id="84" name="TextBox 83"/>
+          <p:cNvPr id="41" name="TextBox 40"/>
           <p:cNvSpPr txBox="1"/>
           <p:nvPr/>
         </p:nvSpPr>
@@ -13069,14 +10642,14 @@
                 </a:solidFill>
                 <a:latin typeface="Calibri"/>
               </a:rPr>
-              <a:t>Apr. 20</a:t>
-            </a:r>
-          </a:p>
-        </p:txBody>
-      </p:sp>
-      <p:sp>
-        <p:nvSpPr>
-          <p:cNvPr id="85" name="TextBox 84"/>
+              <a:t>20 Apr 2026</a:t>
+            </a:r>
+          </a:p>
+        </p:txBody>
+      </p:sp>
+      <p:sp>
+        <p:nvSpPr>
+          <p:cNvPr id="42" name="TextBox 41"/>
           <p:cNvSpPr txBox="1"/>
           <p:nvPr/>
         </p:nvSpPr>
@@ -13111,7 +10684,7 @@
       </p:sp>
       <p:sp>
         <p:nvSpPr>
-          <p:cNvPr id="86" name="TextBox 85"/>
+          <p:cNvPr id="43" name="TextBox 42"/>
           <p:cNvSpPr txBox="1"/>
           <p:nvPr/>
         </p:nvSpPr>
@@ -13139,14 +10712,14 @@
                 </a:solidFill>
                 <a:latin typeface="Calibri"/>
               </a:rPr>
-              <a:t>Mar. 24</a:t>
-            </a:r>
-          </a:p>
-        </p:txBody>
-      </p:sp>
-      <p:sp>
-        <p:nvSpPr>
-          <p:cNvPr id="87" name="TextBox 86"/>
+              <a:t>24 Mar 2026</a:t>
+            </a:r>
+          </a:p>
+        </p:txBody>
+      </p:sp>
+      <p:sp>
+        <p:nvSpPr>
+          <p:cNvPr id="44" name="TextBox 43"/>
           <p:cNvSpPr txBox="1"/>
           <p:nvPr/>
         </p:nvSpPr>
@@ -13181,7 +10754,7 @@
       </p:sp>
       <p:sp>
         <p:nvSpPr>
-          <p:cNvPr id="88" name="TextBox 87"/>
+          <p:cNvPr id="45" name="TextBox 44"/>
           <p:cNvSpPr txBox="1"/>
           <p:nvPr/>
         </p:nvSpPr>
@@ -13209,14 +10782,14 @@
                 </a:solidFill>
                 <a:latin typeface="Calibri"/>
               </a:rPr>
-              <a:t>Jan. 19</a:t>
-            </a:r>
-          </a:p>
-        </p:txBody>
-      </p:sp>
-      <p:sp>
-        <p:nvSpPr>
-          <p:cNvPr id="89" name="TextBox 88"/>
+              <a:t>19 Jan 2026</a:t>
+            </a:r>
+          </a:p>
+        </p:txBody>
+      </p:sp>
+      <p:sp>
+        <p:nvSpPr>
+          <p:cNvPr id="46" name="TextBox 45"/>
           <p:cNvSpPr txBox="1"/>
           <p:nvPr/>
         </p:nvSpPr>
@@ -13251,7 +10824,7 @@
       </p:sp>
       <p:sp>
         <p:nvSpPr>
-          <p:cNvPr id="90" name="Rectangle 89"/>
+          <p:cNvPr id="47" name="Rectangle 46"/>
           <p:cNvSpPr/>
           <p:nvPr/>
         </p:nvSpPr>
@@ -13295,7 +10868,7 @@
       </p:sp>
       <p:sp>
         <p:nvSpPr>
-          <p:cNvPr id="91" name="TextBox 90"/>
+          <p:cNvPr id="48" name="TextBox 47"/>
           <p:cNvSpPr txBox="1"/>
           <p:nvPr/>
         </p:nvSpPr>
@@ -13323,14 +10896,14 @@
                 </a:solidFill>
                 <a:latin typeface="Calibri"/>
               </a:rPr>
-              <a:t>Source: investing, marketscreener, yahoo  |  Generated 14 May 2026  |  Analyst: Jabal Research</a:t>
-            </a:r>
-          </a:p>
-        </p:txBody>
-      </p:sp>
-      <p:sp>
-        <p:nvSpPr>
-          <p:cNvPr id="92" name="TextBox 91"/>
+              <a:t>Source: Investing.com, Yahoo Finance, MarketScreener, World Bank / IMF, iShares  |  Generated 17 May 2026  |  Analyst: Jabal Research</a:t>
+            </a:r>
+          </a:p>
+        </p:txBody>
+      </p:sp>
+      <p:sp>
+        <p:nvSpPr>
+          <p:cNvPr id="49" name="TextBox 48"/>
           <p:cNvSpPr txBox="1"/>
           <p:nvPr/>
         </p:nvSpPr>
@@ -13365,7 +10938,7 @@
       </p:sp>
       <p:sp>
         <p:nvSpPr>
-          <p:cNvPr id="93" name="TextBox 92"/>
+          <p:cNvPr id="50" name="TextBox 49"/>
           <p:cNvSpPr txBox="1"/>
           <p:nvPr/>
         </p:nvSpPr>
@@ -13400,7 +10973,7 @@
       </p:sp>
       <p:sp>
         <p:nvSpPr>
-          <p:cNvPr id="94" name="TextBox 93"/>
+          <p:cNvPr id="51" name="TextBox 50"/>
           <p:cNvSpPr txBox="1"/>
           <p:nvPr/>
         </p:nvSpPr>
